--- a/deliverables/internship-return/zimlivestock-final-presentation.pptx
+++ b/deliverables/internship-return/zimlivestock-final-presentation.pptx
@@ -11010,7 +11010,7 @@
                 <a:ea typeface="Calibri" pitchFamily="34" charset="-122"/>
                 <a:cs typeface="Calibri" pitchFamily="34" charset="-120"/>
               </a:rPr>
-              <a:t>8 → 12 houses live. Case studies compound. Paynow formalizes us as its livestock vertical solution.</a:t>
+              <a:t>8 → 12 houses live. Case studies compound. Paynow's contacts become the channel that sources new houses.</a:t>
             </a:r>
             <a:endParaRPr lang="en-US" sz="1150" dirty="0"/>
           </a:p>
@@ -11180,7 +11180,7 @@
                 <a:ea typeface="Georgia" pitchFamily="34" charset="-122"/>
                 <a:cs typeface="Georgia" pitchFamily="34" charset="-120"/>
               </a:rPr>
-              <a:t>Position ZimLivestock as Paynow's vertical solution for livestock — reciprocal: we grow their GMV, they grow our pipeline.</a:t>
+              <a:t>Paynow's growing contacts are the channel for selling this engine — and every house it sources routes its GMV onto Paynow's rails.</a:t>
             </a:r>
             <a:pPr indent="0" marL="0">
               <a:buNone/>
@@ -15903,21 +15903,7 @@
                 <a:ea typeface="Calibri" pitchFamily="34" charset="-122"/>
                 <a:cs typeface="Calibri" pitchFamily="34" charset="-120"/>
               </a:rPr>
-              <a:t>Core Express Checkout  ·  Bisafe escrow  ·  BillPay-as-biller  ·  EcoCash USSD  ·  merchant transfers  ·  </a:t>
-            </a:r>
-            <a:pPr indent="0" marL="0">
-              <a:buNone/>
-            </a:pPr>
-            <a:r>
-              <a:rPr lang="en-US" sz="1150" i="1" dirty="0">
-                <a:solidFill>
-                  <a:srgbClr val="7A4F47"/>
-                </a:solidFill>
-                <a:latin typeface="Calibri" pitchFamily="34" charset="0"/>
-                <a:ea typeface="Calibri" pitchFamily="34" charset="-122"/>
-                <a:cs typeface="Calibri" pitchFamily="34" charset="-120"/>
-              </a:rPr>
-              <a:t>Paab cash (once unblocked)</a:t>
+              <a:t>Core Express Checkout  ·  Bisafe escrow  ·  BillPay-as-biller  ·  EcoCash USSD  ·  merchant transfers  ·  SMS notifications</a:t>
             </a:r>
             <a:endParaRPr lang="en-US" sz="1150" dirty="0"/>
           </a:p>
@@ -17067,7 +17053,7 @@
                 <a:ea typeface="Georgia" pitchFamily="34" charset="-122"/>
                 <a:cs typeface="Georgia" pitchFamily="34" charset="-120"/>
               </a:rPr>
-              <a:t>Three things, none of them a cheque.</a:t>
+              <a:t>Two things, neither of them a cheque.</a:t>
             </a:r>
             <a:endParaRPr lang="en-US" sz="1900" dirty="0"/>
           </a:p>
@@ -17081,7 +17067,7 @@
         </p:nvSpPr>
         <p:spPr>
           <a:xfrm>
-            <a:off x="640080" y="2423160"/>
+            <a:off x="640080" y="2514600"/>
             <a:ext cx="457200" cy="640080"/>
           </a:xfrm>
           <a:prstGeom prst="rect">
@@ -17120,8 +17106,8 @@
         </p:nvSpPr>
         <p:spPr>
           <a:xfrm>
-            <a:off x="1188720" y="2441448"/>
-            <a:ext cx="7315200" cy="713232"/>
+            <a:off x="1188720" y="2532888"/>
+            <a:ext cx="7315200" cy="1005840"/>
           </a:xfrm>
           <a:prstGeom prst="rect">
             <a:avLst/>
@@ -17137,7 +17123,7 @@
               <a:buNone/>
             </a:pPr>
             <a:r>
-              <a:rPr lang="en-US" sz="1600" b="1" dirty="0">
+              <a:rPr lang="en-US" sz="1700" b="1" dirty="0">
                 <a:solidFill>
                   <a:srgbClr val="F5E6D3"/>
                 </a:solidFill>
@@ -17145,13 +17131,16 @@
                 <a:ea typeface="Calibri" pitchFamily="34" charset="-122"/>
                 <a:cs typeface="Calibri" pitchFamily="34" charset="-120"/>
               </a:rPr>
-              <a:t>Unblock the rails   </a:t>
-            </a:r>
-            <a:pPr indent="0" marL="0">
-              <a:buNone/>
-            </a:pPr>
-            <a:r>
-              <a:rPr lang="en-US" sz="1200" dirty="0">
+              <a:t>Access to your growing contacts   </a:t>
+            </a:r>
+            <a:endParaRPr lang="en-US" sz="1700" dirty="0"/>
+          </a:p>
+          <a:p>
+            <a:pPr indent="0" marL="0">
+              <a:buNone/>
+            </a:pPr>
+            <a:r>
+              <a:rPr lang="en-US" sz="1250" dirty="0">
                 <a:solidFill>
                   <a:srgbClr val="BFAA98"/>
                 </a:solidFill>
@@ -17159,9 +17148,9 @@
                 <a:ea typeface="Calibri" pitchFamily="34" charset="-122"/>
                 <a:cs typeface="Calibri" pitchFamily="34" charset="-120"/>
               </a:rPr>
-              <a:t>Paab sandbox + docs (the only red on the board) and the BillPay PAY round-trip (vendor-portal creds; AUTH is already live). Both widen the buyer base and lift adoption.</a:t>
-            </a:r>
-            <a:endParaRPr lang="en-US" sz="1600" dirty="0"/>
+              <a:t>Paynow's expanding network of merchants, billers and industry relationships — as the starting point for selling this settlement engine into the livestock market. Your contacts are the doors; I do the on-the-ground operating you don't want to.</a:t>
+            </a:r>
+            <a:endParaRPr lang="en-US" sz="1700" dirty="0"/>
           </a:p>
         </p:txBody>
       </p:sp>
@@ -17173,7 +17162,7 @@
         </p:nvSpPr>
         <p:spPr>
           <a:xfrm>
-            <a:off x="640080" y="3172968"/>
+            <a:off x="640080" y="3611880"/>
             <a:ext cx="457200" cy="640080"/>
           </a:xfrm>
           <a:prstGeom prst="rect">
@@ -17212,8 +17201,8 @@
         </p:nvSpPr>
         <p:spPr>
           <a:xfrm>
-            <a:off x="1188720" y="3191256"/>
-            <a:ext cx="7315200" cy="713232"/>
+            <a:off x="1188720" y="3630168"/>
+            <a:ext cx="7315200" cy="1005840"/>
           </a:xfrm>
           <a:prstGeom prst="rect">
             <a:avLst/>
@@ -17229,7 +17218,7 @@
               <a:buNone/>
             </a:pPr>
             <a:r>
-              <a:rPr lang="en-US" sz="1600" b="1" dirty="0">
+              <a:rPr lang="en-US" sz="1700" b="1" dirty="0">
                 <a:solidFill>
                   <a:srgbClr val="F5E6D3"/>
                 </a:solidFill>
@@ -17237,13 +17226,16 @@
                 <a:ea typeface="Calibri" pitchFamily="34" charset="-122"/>
                 <a:cs typeface="Calibri" pitchFamily="34" charset="-120"/>
               </a:rPr>
-              <a:t>Formalize the partnership   </a:t>
-            </a:r>
-            <a:pPr indent="0" marL="0">
-              <a:buNone/>
-            </a:pPr>
-            <a:r>
-              <a:rPr lang="en-US" sz="1200" dirty="0">
+              <a:t>Continued access to the rails &amp; core infrastructure   </a:t>
+            </a:r>
+            <a:endParaRPr lang="en-US" sz="1700" dirty="0"/>
+          </a:p>
+          <a:p>
+            <a:pPr indent="0" marL="0">
+              <a:buNone/>
+            </a:pPr>
+            <a:r>
+              <a:rPr lang="en-US" sz="1250" dirty="0">
                 <a:solidFill>
                   <a:srgbClr val="BFAA98"/>
                 </a:solidFill>
@@ -17251,107 +17243,15 @@
                 <a:ea typeface="Calibri" pitchFamily="34" charset="-122"/>
                 <a:cs typeface="Calibri" pitchFamily="34" charset="-120"/>
               </a:rPr>
-              <a:t>Name ZimLivestock as Paynow's livestock vertical solution; Paynow BD refers livestock-industry prospects. We grow your GMV; you grow our pipeline.</a:t>
-            </a:r>
-            <a:endParaRPr lang="en-US" sz="1600" dirty="0"/>
+              <a:t>Keep me on the Paynow stack I've built ZimLivestock on — Core Express Checkout, BillPay-as-biller, EcoCash USSD, merchant transfers, SMS. The engine runs on your rails; staying plugged in is what keeps every dollar of GMV flowing onto them.</a:t>
+            </a:r>
+            <a:endParaRPr lang="en-US" sz="1700" dirty="0"/>
           </a:p>
         </p:txBody>
       </p:sp>
       <p:sp>
         <p:nvSpPr>
           <p:cNvPr id="10" name="Text 8"/>
-          <p:cNvSpPr/>
-          <p:nvPr/>
-        </p:nvSpPr>
-        <p:spPr>
-          <a:xfrm>
-            <a:off x="640080" y="3922776"/>
-            <a:ext cx="457200" cy="640080"/>
-          </a:xfrm>
-          <a:prstGeom prst="rect">
-            <a:avLst/>
-          </a:prstGeom>
-          <a:noFill/>
-          <a:ln/>
-        </p:spPr>
-        <p:txBody>
-          <a:bodyPr wrap="square" lIns="0" tIns="0" rIns="0" bIns="0" rtlCol="0" anchor="ctr"/>
-          <a:lstStyle/>
-          <a:p>
-            <a:pPr indent="0" marL="0">
-              <a:buNone/>
-            </a:pPr>
-            <a:r>
-              <a:rPr lang="en-US" sz="3000" b="1" dirty="0">
-                <a:solidFill>
-                  <a:srgbClr val="D4A843"/>
-                </a:solidFill>
-                <a:latin typeface="Georgia" pitchFamily="34" charset="0"/>
-                <a:ea typeface="Georgia" pitchFamily="34" charset="-122"/>
-                <a:cs typeface="Georgia" pitchFamily="34" charset="-120"/>
-              </a:rPr>
-              <a:t>3</a:t>
-            </a:r>
-            <a:endParaRPr lang="en-US" sz="3000" dirty="0"/>
-          </a:p>
-        </p:txBody>
-      </p:sp>
-      <p:sp>
-        <p:nvSpPr>
-          <p:cNvPr id="11" name="Text 9"/>
-          <p:cNvSpPr/>
-          <p:nvPr/>
-        </p:nvSpPr>
-        <p:spPr>
-          <a:xfrm>
-            <a:off x="1188720" y="3941064"/>
-            <a:ext cx="7315200" cy="713232"/>
-          </a:xfrm>
-          <a:prstGeom prst="rect">
-            <a:avLst/>
-          </a:prstGeom>
-          <a:noFill/>
-          <a:ln/>
-        </p:spPr>
-        <p:txBody>
-          <a:bodyPr wrap="square" lIns="0" tIns="0" rIns="0" bIns="0" rtlCol="0" anchor="t"/>
-          <a:lstStyle/>
-          <a:p>
-            <a:pPr indent="0" marL="0">
-              <a:buNone/>
-            </a:pPr>
-            <a:r>
-              <a:rPr lang="en-US" sz="1600" b="1" dirty="0">
-                <a:solidFill>
-                  <a:srgbClr val="F5E6D3"/>
-                </a:solidFill>
-                <a:latin typeface="Calibri" pitchFamily="34" charset="0"/>
-                <a:ea typeface="Calibri" pitchFamily="34" charset="-122"/>
-                <a:cs typeface="Calibri" pitchFamily="34" charset="-120"/>
-              </a:rPr>
-              <a:t>Open one door   </a:t>
-            </a:r>
-            <a:pPr indent="0" marL="0">
-              <a:buNone/>
-            </a:pPr>
-            <a:r>
-              <a:rPr lang="en-US" sz="1200" dirty="0">
-                <a:solidFill>
-                  <a:srgbClr val="BFAA98"/>
-                </a:solidFill>
-                <a:latin typeface="Calibri" pitchFamily="34" charset="0"/>
-                <a:ea typeface="Calibri" pitchFamily="34" charset="-122"/>
-                <a:cs typeface="Calibri" pitchFamily="34" charset="-120"/>
-              </a:rPr>
-              <a:t>A warm intro to one Harare-area auction house. The pilot is paid by the customer, not by Paynow — I just need the room.</a:t>
-            </a:r>
-            <a:endParaRPr lang="en-US" sz="1600" dirty="0"/>
-          </a:p>
-        </p:txBody>
-      </p:sp>
-      <p:sp>
-        <p:nvSpPr>
-          <p:cNvPr id="12" name="Text 10"/>
           <p:cNvSpPr/>
           <p:nvPr/>
         </p:nvSpPr>
@@ -17390,7 +17290,7 @@
       </p:sp>
       <p:sp>
         <p:nvSpPr>
-          <p:cNvPr id="13" name="Text 11"/>
+          <p:cNvPr id="11" name="Text 9"/>
           <p:cNvSpPr/>
           <p:nvPr/>
         </p:nvSpPr>
@@ -22293,88 +22193,7 @@
       </p:sp>
       <p:sp>
         <p:nvSpPr>
-          <p:cNvPr id="26" name="Shape 24"/>
-          <p:cNvSpPr/>
-          <p:nvPr/>
-        </p:nvSpPr>
-        <p:spPr>
-          <a:xfrm>
-            <a:off x="4754880" y="3977640"/>
-            <a:ext cx="219456" cy="219456"/>
-          </a:xfrm>
-          <a:prstGeom prst="ellipse">
-            <a:avLst/>
-          </a:prstGeom>
-          <a:solidFill>
-            <a:srgbClr val="FFFFFF"/>
-          </a:solidFill>
-          <a:ln w="19050">
-            <a:solidFill>
-              <a:srgbClr val="7A4F47"/>
-            </a:solidFill>
-            <a:prstDash val="solid"/>
-          </a:ln>
-        </p:spPr>
-      </p:sp>
-      <p:sp>
-        <p:nvSpPr>
-          <p:cNvPr id="27" name="Text 25"/>
-          <p:cNvSpPr/>
-          <p:nvPr/>
-        </p:nvSpPr>
-        <p:spPr>
-          <a:xfrm>
-            <a:off x="5120640" y="3941064"/>
-            <a:ext cx="3611880" cy="548640"/>
-          </a:xfrm>
-          <a:prstGeom prst="rect">
-            <a:avLst/>
-          </a:prstGeom>
-          <a:noFill/>
-          <a:ln/>
-        </p:spPr>
-        <p:txBody>
-          <a:bodyPr wrap="square" lIns="0" tIns="0" rIns="0" bIns="0" rtlCol="0" anchor="ctr"/>
-          <a:lstStyle/>
-          <a:p>
-            <a:pPr indent="0" marL="0">
-              <a:buNone/>
-            </a:pPr>
-            <a:r>
-              <a:rPr lang="en-US" sz="1250" b="1" dirty="0">
-                <a:solidFill>
-                  <a:srgbClr val="2D1B1A"/>
-                </a:solidFill>
-                <a:latin typeface="Calibri" pitchFamily="34" charset="0"/>
-                <a:ea typeface="Calibri" pitchFamily="34" charset="-122"/>
-                <a:cs typeface="Calibri" pitchFamily="34" charset="-120"/>
-              </a:rPr>
-              <a:t>Paab cash-collection</a:t>
-            </a:r>
-            <a:endParaRPr lang="en-US" sz="1250" dirty="0"/>
-          </a:p>
-          <a:p>
-            <a:pPr indent="0" marL="0">
-              <a:buNone/>
-            </a:pPr>
-            <a:r>
-              <a:rPr lang="en-US" sz="1000" i="1" dirty="0">
-                <a:solidFill>
-                  <a:srgbClr val="7A4F47"/>
-                </a:solidFill>
-                <a:latin typeface="Calibri" pitchFamily="34" charset="0"/>
-                <a:ea typeface="Calibri" pitchFamily="34" charset="-122"/>
-                <a:cs typeface="Calibri" pitchFamily="34" charset="-120"/>
-              </a:rPr>
-              <a:t>designed, awaiting Paynow Paab spec</a:t>
-            </a:r>
-            <a:endParaRPr lang="en-US" sz="1250" dirty="0"/>
-          </a:p>
-        </p:txBody>
-      </p:sp>
-      <p:sp>
-        <p:nvSpPr>
-          <p:cNvPr id="28" name="Text 26"/>
+          <p:cNvPr id="26" name="Text 24"/>
           <p:cNvSpPr/>
           <p:nvPr/>
         </p:nvSpPr>
@@ -22413,7 +22232,7 @@
       </p:sp>
       <p:sp>
         <p:nvSpPr>
-          <p:cNvPr id="29" name="Text 27"/>
+          <p:cNvPr id="27" name="Text 25"/>
           <p:cNvSpPr/>
           <p:nvPr/>
         </p:nvSpPr>

--- a/deliverables/internship-return/zimlivestock-final-presentation.pptx
+++ b/deliverables/internship-return/zimlivestock-final-presentation.pptx
@@ -34,9 +34,11 @@
     <p:sldId id="282" r:id="rId28"/>
     <p:sldId id="283" r:id="rId29"/>
     <p:sldId id="284" r:id="rId30"/>
+    <p:sldId id="285" r:id="rId31"/>
+    <p:sldId id="286" r:id="rId32"/>
   </p:sldIdLst>
   <p:notesMasterIdLst>
-    <p:notesMasterId r:id="rId31"/>
+    <p:notesMasterId r:id="rId33"/>
   </p:notesMasterIdLst>
   <p:sldSz cx="9144000" cy="5143500"/>
   <p:notesSz cx="5143500" cy="9144000"/>
@@ -2961,6 +2963,182 @@
 </p:notes>
 </file>
 
+<file path=ppt/notesSlides/notesSlide30.xml><?xml version="1.0" encoding="utf-8"?>
+<p:notes xmlns:a="http://schemas.openxmlformats.org/drawingml/2006/main" xmlns:r="http://schemas.openxmlformats.org/officeDocument/2006/relationships" xmlns:p="http://schemas.openxmlformats.org/presentationml/2006/main">
+  <p:cSld>
+    <p:spTree>
+      <p:nvGrpSpPr>
+        <p:cNvPr id="1" name=""/>
+        <p:cNvGrpSpPr/>
+        <p:nvPr/>
+      </p:nvGrpSpPr>
+      <p:grpSpPr>
+        <a:xfrm>
+          <a:off x="0" y="0"/>
+          <a:ext cx="0" cy="0"/>
+          <a:chOff x="0" y="0"/>
+          <a:chExt cx="0" cy="0"/>
+        </a:xfrm>
+      </p:grpSpPr>
+      <p:sp>
+        <p:nvSpPr>
+          <p:cNvPr id="2" name="Slide Image Placeholder 1"/>
+          <p:cNvSpPr>
+            <a:spLocks noGrp="1" noRot="1" noChangeAspect="1"/>
+          </p:cNvSpPr>
+          <p:nvPr>
+            <p:ph type="sldImg"/>
+          </p:nvPr>
+        </p:nvSpPr>
+        <p:spPr/>
+      </p:sp>
+      <p:sp>
+        <p:nvSpPr>
+          <p:cNvPr id="3" name="Notes Placeholder 2"/>
+          <p:cNvSpPr>
+            <a:spLocks noGrp="1"/>
+          </p:cNvSpPr>
+          <p:nvPr>
+            <p:ph type="body" idx="1"/>
+          </p:nvPr>
+        </p:nvSpPr>
+        <p:spPr/>
+        <p:txBody>
+          <a:bodyPr/>
+          <a:lstStyle/>
+          <a:p>
+            <a:r>
+              <a:rPr lang="en-US" dirty="0"/>
+              <a:t/>
+            </a:r>
+            <a:endParaRPr lang="en-US" dirty="0"/>
+          </a:p>
+        </p:txBody>
+      </p:sp>
+      <p:sp>
+        <p:nvSpPr>
+          <p:cNvPr id="4" name="Slide Number Placeholder 3"/>
+          <p:cNvSpPr>
+            <a:spLocks noGrp="1"/>
+          </p:cNvSpPr>
+          <p:nvPr>
+            <p:ph type="sldNum" sz="quarter" idx="10"/>
+          </p:nvPr>
+        </p:nvSpPr>
+        <p:spPr/>
+        <p:txBody>
+          <a:bodyPr/>
+          <a:lstStyle/>
+          <a:p>
+            <a:fld id="{F7021451-1387-4CA6-816F-3879F97B5CBC}" type="slidenum">
+              <a:rPr lang="en-US"/>
+              <a:t>30</a:t>
+            </a:fld>
+            <a:endParaRPr lang="en-US"/>
+          </a:p>
+        </p:txBody>
+      </p:sp>
+    </p:spTree>
+    <p:extLst>
+      <p:ext uri="{BB962C8B-B14F-4D97-AF65-F5344CB8AC3E}">
+        <p14:creationId xmlns:p14="http://schemas.microsoft.com/office/powerpoint/2010/main" val="1024086991"/>
+      </p:ext>
+    </p:extLst>
+  </p:cSld>
+  <p:clrMapOvr>
+    <a:masterClrMapping/>
+  </p:clrMapOvr>
+</p:notes>
+</file>
+
+<file path=ppt/notesSlides/notesSlide31.xml><?xml version="1.0" encoding="utf-8"?>
+<p:notes xmlns:a="http://schemas.openxmlformats.org/drawingml/2006/main" xmlns:r="http://schemas.openxmlformats.org/officeDocument/2006/relationships" xmlns:p="http://schemas.openxmlformats.org/presentationml/2006/main">
+  <p:cSld>
+    <p:spTree>
+      <p:nvGrpSpPr>
+        <p:cNvPr id="1" name=""/>
+        <p:cNvGrpSpPr/>
+        <p:nvPr/>
+      </p:nvGrpSpPr>
+      <p:grpSpPr>
+        <a:xfrm>
+          <a:off x="0" y="0"/>
+          <a:ext cx="0" cy="0"/>
+          <a:chOff x="0" y="0"/>
+          <a:chExt cx="0" cy="0"/>
+        </a:xfrm>
+      </p:grpSpPr>
+      <p:sp>
+        <p:nvSpPr>
+          <p:cNvPr id="2" name="Slide Image Placeholder 1"/>
+          <p:cNvSpPr>
+            <a:spLocks noGrp="1" noRot="1" noChangeAspect="1"/>
+          </p:cNvSpPr>
+          <p:nvPr>
+            <p:ph type="sldImg"/>
+          </p:nvPr>
+        </p:nvSpPr>
+        <p:spPr/>
+      </p:sp>
+      <p:sp>
+        <p:nvSpPr>
+          <p:cNvPr id="3" name="Notes Placeholder 2"/>
+          <p:cNvSpPr>
+            <a:spLocks noGrp="1"/>
+          </p:cNvSpPr>
+          <p:nvPr>
+            <p:ph type="body" idx="1"/>
+          </p:nvPr>
+        </p:nvSpPr>
+        <p:spPr/>
+        <p:txBody>
+          <a:bodyPr/>
+          <a:lstStyle/>
+          <a:p>
+            <a:r>
+              <a:rPr lang="en-US" dirty="0"/>
+              <a:t/>
+            </a:r>
+            <a:endParaRPr lang="en-US" dirty="0"/>
+          </a:p>
+        </p:txBody>
+      </p:sp>
+      <p:sp>
+        <p:nvSpPr>
+          <p:cNvPr id="4" name="Slide Number Placeholder 3"/>
+          <p:cNvSpPr>
+            <a:spLocks noGrp="1"/>
+          </p:cNvSpPr>
+          <p:nvPr>
+            <p:ph type="sldNum" sz="quarter" idx="10"/>
+          </p:nvPr>
+        </p:nvSpPr>
+        <p:spPr/>
+        <p:txBody>
+          <a:bodyPr/>
+          <a:lstStyle/>
+          <a:p>
+            <a:fld id="{F7021451-1387-4CA6-816F-3879F97B5CBC}" type="slidenum">
+              <a:rPr lang="en-US"/>
+              <a:t>31</a:t>
+            </a:fld>
+            <a:endParaRPr lang="en-US"/>
+          </a:p>
+        </p:txBody>
+      </p:sp>
+    </p:spTree>
+    <p:extLst>
+      <p:ext uri="{BB962C8B-B14F-4D97-AF65-F5344CB8AC3E}">
+        <p14:creationId xmlns:p14="http://schemas.microsoft.com/office/powerpoint/2010/main" val="1024086991"/>
+      </p:ext>
+    </p:extLst>
+  </p:cSld>
+  <p:clrMapOvr>
+    <a:masterClrMapping/>
+  </p:clrMapOvr>
+</p:notes>
+</file>
+
 <file path=ppt/notesSlides/notesSlide4.xml><?xml version="1.0" encoding="utf-8"?>
 <p:notes xmlns:a="http://schemas.openxmlformats.org/drawingml/2006/main" xmlns:r="http://schemas.openxmlformats.org/officeDocument/2006/relationships" xmlns:p="http://schemas.openxmlformats.org/presentationml/2006/main">
   <p:cSld>
@@ -4925,7 +5103,7 @@
                 <a:ea typeface="Calibri" pitchFamily="34" charset="-122"/>
                 <a:cs typeface="Calibri" pitchFamily="34" charset="-120"/>
               </a:rPr>
-              <a:t>10 / 29</a:t>
+              <a:t>10 / 31</a:t>
             </a:r>
             <a:endParaRPr lang="en-US" sz="800" dirty="0"/>
           </a:p>
@@ -6385,7 +6563,7 @@
                 <a:ea typeface="Calibri" pitchFamily="34" charset="-122"/>
                 <a:cs typeface="Calibri" pitchFamily="34" charset="-120"/>
               </a:rPr>
-              <a:t>12 / 29</a:t>
+              <a:t>12 / 31</a:t>
             </a:r>
             <a:endParaRPr lang="en-US" sz="800" dirty="0"/>
           </a:p>
@@ -7399,7 +7577,7 @@
                 <a:ea typeface="Calibri" pitchFamily="34" charset="-122"/>
                 <a:cs typeface="Calibri" pitchFamily="34" charset="-120"/>
               </a:rPr>
-              <a:t>13 / 29</a:t>
+              <a:t>13 / 31</a:t>
             </a:r>
             <a:endParaRPr lang="en-US" sz="800" dirty="0"/>
           </a:p>
@@ -8191,7 +8369,7 @@
                 <a:ea typeface="Calibri" pitchFamily="34" charset="-122"/>
                 <a:cs typeface="Calibri" pitchFamily="34" charset="-120"/>
               </a:rPr>
-              <a:t>14 / 29</a:t>
+              <a:t>14 / 31</a:t>
             </a:r>
             <a:endParaRPr lang="en-US" sz="800" dirty="0"/>
           </a:p>
@@ -9947,7 +10125,7 @@
                 <a:ea typeface="Calibri" pitchFamily="34" charset="-122"/>
                 <a:cs typeface="Calibri" pitchFamily="34" charset="-120"/>
               </a:rPr>
-              <a:t>16 / 29</a:t>
+              <a:t>16 / 31</a:t>
             </a:r>
             <a:endParaRPr lang="en-US" sz="800" dirty="0"/>
           </a:p>
@@ -10963,7 +11141,7 @@
                 <a:ea typeface="Calibri" pitchFamily="34" charset="-122"/>
                 <a:cs typeface="Calibri" pitchFamily="34" charset="-120"/>
               </a:rPr>
-              <a:t>17 / 29</a:t>
+              <a:t>17 / 31</a:t>
             </a:r>
             <a:endParaRPr lang="en-US" sz="800" dirty="0"/>
           </a:p>
@@ -11628,7 +11806,7 @@
                 <a:ea typeface="Calibri" pitchFamily="34" charset="-122"/>
                 <a:cs typeface="Calibri" pitchFamily="34" charset="-120"/>
               </a:rPr>
-              <a:t>18 / 29</a:t>
+              <a:t>18 / 31</a:t>
             </a:r>
             <a:endParaRPr lang="en-US" sz="800" dirty="0"/>
           </a:p>
@@ -12739,7 +12917,7 @@
                 <a:ea typeface="Calibri" pitchFamily="34" charset="-122"/>
                 <a:cs typeface="Calibri" pitchFamily="34" charset="-120"/>
               </a:rPr>
-              <a:t>2 / 29</a:t>
+              <a:t>2 / 31</a:t>
             </a:r>
             <a:endParaRPr lang="en-US" sz="800" dirty="0"/>
           </a:p>
@@ -13439,7 +13617,7 @@
                 <a:ea typeface="Calibri" pitchFamily="34" charset="-122"/>
                 <a:cs typeface="Calibri" pitchFamily="34" charset="-120"/>
               </a:rPr>
-              <a:t>20 / 29</a:t>
+              <a:t>20 / 31</a:t>
             </a:r>
             <a:endParaRPr lang="en-US" sz="800" dirty="0"/>
           </a:p>
@@ -15139,7 +15317,7 @@
                 <a:ea typeface="Calibri" pitchFamily="34" charset="-122"/>
                 <a:cs typeface="Calibri" pitchFamily="34" charset="-120"/>
               </a:rPr>
-              <a:t>21 / 29</a:t>
+              <a:t>21 / 31</a:t>
             </a:r>
             <a:endParaRPr lang="en-US" sz="800" dirty="0"/>
           </a:p>
@@ -16337,7 +16515,7 @@
                 <a:ea typeface="Calibri" pitchFamily="34" charset="-122"/>
                 <a:cs typeface="Calibri" pitchFamily="34" charset="-120"/>
               </a:rPr>
-              <a:t>22 / 29</a:t>
+              <a:t>22 / 31</a:t>
             </a:r>
             <a:endParaRPr lang="en-US" sz="800" dirty="0"/>
           </a:p>
@@ -17240,7 +17418,7 @@
                 <a:ea typeface="Calibri" pitchFamily="34" charset="-122"/>
                 <a:cs typeface="Calibri" pitchFamily="34" charset="-120"/>
               </a:rPr>
-              <a:t>23 / 29</a:t>
+              <a:t>23 / 31</a:t>
             </a:r>
             <a:endParaRPr lang="en-US" sz="800" dirty="0"/>
           </a:p>
@@ -17539,7 +17717,7 @@
                 <a:ea typeface="Calibri" pitchFamily="34" charset="-122"/>
                 <a:cs typeface="Calibri" pitchFamily="34" charset="-120"/>
               </a:rPr>
-              <a:t>THE VALUE PROPOSITION FOR PAYNOW</a:t>
+              <a:t>THE MARKET · HOW BIG IS THE PRIZE</a:t>
             </a:r>
             <a:endParaRPr lang="en-US" sz="1100" dirty="0"/>
           </a:p>
@@ -17570,7 +17748,7 @@
               <a:buNone/>
             </a:pPr>
             <a:r>
-              <a:rPr lang="en-US" sz="2800" b="1" dirty="0">
+              <a:rPr lang="en-US" sz="2600" b="1" dirty="0">
                 <a:solidFill>
                   <a:srgbClr val="13233F"/>
                 </a:solidFill>
@@ -17578,9 +17756,9 @@
                 <a:ea typeface="Georgia" pitchFamily="34" charset="-122"/>
                 <a:cs typeface="Georgia" pitchFamily="34" charset="-120"/>
               </a:rPr>
-              <a:t>Why ZimLivestock is a win for Paynow.</a:t>
-            </a:r>
-            <a:endParaRPr lang="en-US" sz="2800" dirty="0"/>
+              <a:t>A ~US$220M cattle trade. Almost none of it on a rail.</a:t>
+            </a:r>
+            <a:endParaRPr lang="en-US" sz="2600" dirty="0"/>
           </a:p>
         </p:txBody>
       </p:sp>
@@ -17592,7 +17770,7 @@
         </p:nvSpPr>
         <p:spPr>
           <a:xfrm>
-            <a:off x="640080" y="1783080"/>
+            <a:off x="640080" y="1627632"/>
             <a:ext cx="7955280" cy="548640"/>
           </a:xfrm>
           <a:prstGeom prst="rect">
@@ -17617,7 +17795,7 @@
                 <a:ea typeface="Calibri" pitchFamily="34" charset="-122"/>
                 <a:cs typeface="Calibri" pitchFamily="34" charset="-120"/>
               </a:rPr>
-              <a:t>Our take is thin by design. The value to Paynow is the GMV, the vertical and the network it activates — not the 0.75% we charge the house.</a:t>
+              <a:t>Zimbabwe runs one of Africa's larger cattle economies — and at the point of sale it is still overwhelmingly cash. Digitizing even a sliver routes serious GMV onto Paynow.</a:t>
             </a:r>
             <a:endParaRPr lang="en-US" sz="1300" dirty="0"/>
           </a:p>
@@ -17631,8 +17809,8 @@
         </p:nvSpPr>
         <p:spPr>
           <a:xfrm>
-            <a:off x="640080" y="2286000"/>
-            <a:ext cx="1874520" cy="2011680"/>
+            <a:off x="640080" y="2249424"/>
+            <a:ext cx="2496312" cy="1883664"/>
           </a:xfrm>
           <a:prstGeom prst="rect">
             <a:avLst/>
@@ -17658,8 +17836,8 @@
         </p:nvSpPr>
         <p:spPr>
           <a:xfrm>
-            <a:off x="640080" y="2286000"/>
-            <a:ext cx="54864" cy="2011680"/>
+            <a:off x="640080" y="2249424"/>
+            <a:ext cx="54864" cy="1883664"/>
           </a:xfrm>
           <a:prstGeom prst="rect">
             <a:avLst/>
@@ -17678,24 +17856,24 @@
         </p:nvSpPr>
         <p:spPr>
           <a:xfrm>
-            <a:off x="822960" y="2395728"/>
-            <a:ext cx="1645920" cy="566928"/>
-          </a:xfrm>
-          <a:prstGeom prst="rect">
-            <a:avLst/>
-          </a:prstGeom>
-          <a:noFill/>
-          <a:ln/>
-        </p:spPr>
-        <p:txBody>
-          <a:bodyPr wrap="square" lIns="0" tIns="0" rIns="0" bIns="0" rtlCol="0" anchor="ctr"/>
-          <a:lstStyle/>
-          <a:p>
-            <a:pPr indent="0" marL="0">
-              <a:buNone/>
-            </a:pPr>
-            <a:r>
-              <a:rPr lang="en-US" sz="2600" b="1" dirty="0">
+            <a:off x="822960" y="2359152"/>
+            <a:ext cx="2221992" cy="530352"/>
+          </a:xfrm>
+          <a:prstGeom prst="rect">
+            <a:avLst/>
+          </a:prstGeom>
+          <a:noFill/>
+          <a:ln/>
+        </p:spPr>
+        <p:txBody>
+          <a:bodyPr wrap="square" lIns="0" tIns="0" rIns="0" bIns="0" rtlCol="0" anchor="ctr"/>
+          <a:lstStyle/>
+          <a:p>
+            <a:pPr indent="0" marL="0">
+              <a:buNone/>
+            </a:pPr>
+            <a:r>
+              <a:rPr lang="en-US" sz="2400" b="1" dirty="0">
                 <a:solidFill>
                   <a:srgbClr val="175FF8"/>
                 </a:solidFill>
@@ -17703,9 +17881,9 @@
                 <a:ea typeface="Georgia" pitchFamily="34" charset="-122"/>
                 <a:cs typeface="Georgia" pitchFamily="34" charset="-120"/>
               </a:rPr>
-              <a:t>$19.5M</a:t>
-            </a:r>
-            <a:endParaRPr lang="en-US" sz="2600" dirty="0"/>
+              <a:t>~US$220M</a:t>
+            </a:r>
+            <a:endParaRPr lang="en-US" sz="2400" dirty="0"/>
           </a:p>
         </p:txBody>
       </p:sp>
@@ -17717,8 +17895,8 @@
         </p:nvSpPr>
         <p:spPr>
           <a:xfrm>
-            <a:off x="822960" y="2980944"/>
-            <a:ext cx="1645920" cy="438912"/>
+            <a:off x="822960" y="2889504"/>
+            <a:ext cx="2221992" cy="384048"/>
           </a:xfrm>
           <a:prstGeom prst="rect">
             <a:avLst/>
@@ -17742,7 +17920,7 @@
                 <a:ea typeface="Calibri" pitchFamily="34" charset="-122"/>
                 <a:cs typeface="Calibri" pitchFamily="34" charset="-120"/>
               </a:rPr>
-              <a:t>GMV onto your rails (5yr)</a:t>
+              <a:t>cattle traded nationally / year</a:t>
             </a:r>
             <a:endParaRPr lang="en-US" sz="1000" dirty="0"/>
           </a:p>
@@ -17756,24 +17934,24 @@
         </p:nvSpPr>
         <p:spPr>
           <a:xfrm>
-            <a:off x="822960" y="3456432"/>
-            <a:ext cx="1645920" cy="868680"/>
-          </a:xfrm>
-          <a:prstGeom prst="rect">
-            <a:avLst/>
-          </a:prstGeom>
-          <a:noFill/>
-          <a:ln/>
-        </p:spPr>
-        <p:txBody>
-          <a:bodyPr wrap="square" lIns="0" tIns="0" rIns="0" bIns="0" rtlCol="0" anchor="ctr"/>
-          <a:lstStyle/>
-          <a:p>
-            <a:pPr indent="0" marL="0">
-              <a:buNone/>
-            </a:pPr>
-            <a:r>
-              <a:rPr lang="en-US" sz="950" dirty="0">
+            <a:off x="822960" y="3310128"/>
+            <a:ext cx="2167128" cy="777240"/>
+          </a:xfrm>
+          <a:prstGeom prst="rect">
+            <a:avLst/>
+          </a:prstGeom>
+          <a:noFill/>
+          <a:ln/>
+        </p:spPr>
+        <p:txBody>
+          <a:bodyPr wrap="square" lIns="0" tIns="0" rIns="0" bIns="0" rtlCol="0" anchor="ctr"/>
+          <a:lstStyle/>
+          <a:p>
+            <a:pPr indent="0" marL="0">
+              <a:buNone/>
+            </a:pPr>
+            <a:r>
+              <a:rPr lang="en-US" sz="870" dirty="0">
                 <a:solidFill>
                   <a:srgbClr val="5B6B86"/>
                 </a:solidFill>
@@ -17781,9 +17959,9 @@
                 <a:ea typeface="Calibri" pitchFamily="34" charset="-122"/>
                 <a:cs typeface="Calibri" pitchFamily="34" charset="-120"/>
               </a:rPr>
-              <a:t>Livestock settlement routed through Core Express Checkout, BillPay, EcoCash USSD &amp; merchant transfers — volume that is cash today.</a:t>
-            </a:r>
-            <a:endParaRPr lang="en-US" sz="950" dirty="0"/>
+              <a:t>5.7M-head national herd × 6% off-take ≈ 342,000 cattle sold a year, at a conservative US$650 each. Most changes hands farm-gate or on WhatsApp — in cash, off any rail.</a:t>
+            </a:r>
+            <a:endParaRPr lang="en-US" sz="870" dirty="0"/>
           </a:p>
         </p:txBody>
       </p:sp>
@@ -17795,8 +17973,8 @@
         </p:nvSpPr>
         <p:spPr>
           <a:xfrm>
-            <a:off x="2651760" y="2286000"/>
-            <a:ext cx="1874520" cy="2011680"/>
+            <a:off x="3337560" y="2249424"/>
+            <a:ext cx="2496312" cy="1883664"/>
           </a:xfrm>
           <a:prstGeom prst="rect">
             <a:avLst/>
@@ -17822,8 +18000,8 @@
         </p:nvSpPr>
         <p:spPr>
           <a:xfrm>
-            <a:off x="2651760" y="2286000"/>
-            <a:ext cx="54864" cy="2011680"/>
+            <a:off x="3337560" y="2249424"/>
+            <a:ext cx="54864" cy="1883664"/>
           </a:xfrm>
           <a:prstGeom prst="rect">
             <a:avLst/>
@@ -17842,24 +18020,24 @@
         </p:nvSpPr>
         <p:spPr>
           <a:xfrm>
-            <a:off x="2834640" y="2395728"/>
-            <a:ext cx="1645920" cy="566928"/>
-          </a:xfrm>
-          <a:prstGeom prst="rect">
-            <a:avLst/>
-          </a:prstGeom>
-          <a:noFill/>
-          <a:ln/>
-        </p:spPr>
-        <p:txBody>
-          <a:bodyPr wrap="square" lIns="0" tIns="0" rIns="0" bIns="0" rtlCol="0" anchor="ctr"/>
-          <a:lstStyle/>
-          <a:p>
-            <a:pPr indent="0" marL="0">
-              <a:buNone/>
-            </a:pPr>
-            <a:r>
-              <a:rPr lang="en-US" sz="2600" b="1" dirty="0">
+            <a:off x="3520440" y="2359152"/>
+            <a:ext cx="2221992" cy="530352"/>
+          </a:xfrm>
+          <a:prstGeom prst="rect">
+            <a:avLst/>
+          </a:prstGeom>
+          <a:noFill/>
+          <a:ln/>
+        </p:spPr>
+        <p:txBody>
+          <a:bodyPr wrap="square" lIns="0" tIns="0" rIns="0" bIns="0" rtlCol="0" anchor="ctr"/>
+          <a:lstStyle/>
+          <a:p>
+            <a:pPr indent="0" marL="0">
+              <a:buNone/>
+            </a:pPr>
+            <a:r>
+              <a:rPr lang="en-US" sz="2400" b="1" dirty="0">
                 <a:solidFill>
                   <a:srgbClr val="175FF8"/>
                 </a:solidFill>
@@ -17867,9 +18045,9 @@
                 <a:ea typeface="Georgia" pitchFamily="34" charset="-122"/>
                 <a:cs typeface="Georgia" pitchFamily="34" charset="-120"/>
               </a:rPr>
-              <a:t>6</a:t>
-            </a:r>
-            <a:endParaRPr lang="en-US" sz="2600" dirty="0"/>
+              <a:t>~US$90M</a:t>
+            </a:r>
+            <a:endParaRPr lang="en-US" sz="2400" dirty="0"/>
           </a:p>
         </p:txBody>
       </p:sp>
@@ -17881,8 +18059,8 @@
         </p:nvSpPr>
         <p:spPr>
           <a:xfrm>
-            <a:off x="2834640" y="2980944"/>
-            <a:ext cx="1645920" cy="438912"/>
+            <a:off x="3520440" y="2889504"/>
+            <a:ext cx="2221992" cy="384048"/>
           </a:xfrm>
           <a:prstGeom prst="rect">
             <a:avLst/>
@@ -17906,7 +18084,7 @@
                 <a:ea typeface="Calibri" pitchFamily="34" charset="-122"/>
                 <a:cs typeface="Calibri" pitchFamily="34" charset="-120"/>
               </a:rPr>
-              <a:t>products live in production</a:t>
+              <a:t>the formal auction floor / year</a:t>
             </a:r>
             <a:endParaRPr lang="en-US" sz="1000" dirty="0"/>
           </a:p>
@@ -17920,24 +18098,24 @@
         </p:nvSpPr>
         <p:spPr>
           <a:xfrm>
-            <a:off x="2834640" y="3456432"/>
-            <a:ext cx="1645920" cy="868680"/>
-          </a:xfrm>
-          <a:prstGeom prst="rect">
-            <a:avLst/>
-          </a:prstGeom>
-          <a:noFill/>
-          <a:ln/>
-        </p:spPr>
-        <p:txBody>
-          <a:bodyPr wrap="square" lIns="0" tIns="0" rIns="0" bIns="0" rtlCol="0" anchor="ctr"/>
-          <a:lstStyle/>
-          <a:p>
-            <a:pPr indent="0" marL="0">
-              <a:buNone/>
-            </a:pPr>
-            <a:r>
-              <a:rPr lang="en-US" sz="950" dirty="0">
+            <a:off x="3520440" y="3310128"/>
+            <a:ext cx="2167128" cy="777240"/>
+          </a:xfrm>
+          <a:prstGeom prst="rect">
+            <a:avLst/>
+          </a:prstGeom>
+          <a:noFill/>
+          <a:ln/>
+        </p:spPr>
+        <p:txBody>
+          <a:bodyPr wrap="square" lIns="0" tIns="0" rIns="0" bIns="0" rtlCol="0" anchor="ctr"/>
+          <a:lstStyle/>
+          <a:p>
+            <a:pPr indent="0" marL="0">
+              <a:buNone/>
+            </a:pPr>
+            <a:r>
+              <a:rPr lang="en-US" sz="870" dirty="0">
                 <a:solidFill>
                   <a:srgbClr val="5B6B86"/>
                 </a:solidFill>
@@ -17945,9 +18123,9 @@
                 <a:ea typeface="Calibri" pitchFamily="34" charset="-122"/>
                 <a:cs typeface="Calibri" pitchFamily="34" charset="-120"/>
               </a:rPr>
-              <a:t>A flagship reference deployment proving the Paynow ecosystem composes into a real, paying business — not a demo.</a:t>
-            </a:r>
-            <a:endParaRPr lang="en-US" sz="950" dirty="0"/>
+              <a:t>~50 auction houses (8 anchor · 20 mid · 20 regional), by sale-day GMV × cadence. This is the slice we can actually reach, settle and route onto Paynow.</a:t>
+            </a:r>
+            <a:endParaRPr lang="en-US" sz="870" dirty="0"/>
           </a:p>
         </p:txBody>
       </p:sp>
@@ -17959,14 +18137,14 @@
         </p:nvSpPr>
         <p:spPr>
           <a:xfrm>
-            <a:off x="4663440" y="2286000"/>
-            <a:ext cx="1874520" cy="2011680"/>
+            <a:off x="6035040" y="2249424"/>
+            <a:ext cx="2496312" cy="1883664"/>
           </a:xfrm>
           <a:prstGeom prst="rect">
             <a:avLst/>
           </a:prstGeom>
           <a:solidFill>
-            <a:srgbClr val="FFFFFF"/>
+            <a:srgbClr val="0A2540"/>
           </a:solidFill>
           <a:ln/>
           <a:effectLst>
@@ -17986,14 +18164,14 @@
         </p:nvSpPr>
         <p:spPr>
           <a:xfrm>
-            <a:off x="4663440" y="2286000"/>
-            <a:ext cx="54864" cy="2011680"/>
+            <a:off x="6035040" y="2249424"/>
+            <a:ext cx="54864" cy="1883664"/>
           </a:xfrm>
           <a:prstGeom prst="rect">
             <a:avLst/>
           </a:prstGeom>
           <a:solidFill>
-            <a:srgbClr val="175FF8"/>
+            <a:srgbClr val="4CC3FF"/>
           </a:solidFill>
           <a:ln/>
         </p:spPr>
@@ -18006,34 +18184,34 @@
         </p:nvSpPr>
         <p:spPr>
           <a:xfrm>
-            <a:off x="4846320" y="2395728"/>
-            <a:ext cx="1645920" cy="566928"/>
-          </a:xfrm>
-          <a:prstGeom prst="rect">
-            <a:avLst/>
-          </a:prstGeom>
-          <a:noFill/>
-          <a:ln/>
-        </p:spPr>
-        <p:txBody>
-          <a:bodyPr wrap="square" lIns="0" tIns="0" rIns="0" bIns="0" rtlCol="0" anchor="ctr"/>
-          <a:lstStyle/>
-          <a:p>
-            <a:pPr indent="0" marL="0">
-              <a:buNone/>
-            </a:pPr>
-            <a:r>
-              <a:rPr lang="en-US" sz="2600" b="1" dirty="0">
-                <a:solidFill>
-                  <a:srgbClr val="175FF8"/>
+            <a:off x="6217920" y="2359152"/>
+            <a:ext cx="2221992" cy="530352"/>
+          </a:xfrm>
+          <a:prstGeom prst="rect">
+            <a:avLst/>
+          </a:prstGeom>
+          <a:noFill/>
+          <a:ln/>
+        </p:spPr>
+        <p:txBody>
+          <a:bodyPr wrap="square" lIns="0" tIns="0" rIns="0" bIns="0" rtlCol="0" anchor="ctr"/>
+          <a:lstStyle/>
+          <a:p>
+            <a:pPr indent="0" marL="0">
+              <a:buNone/>
+            </a:pPr>
+            <a:r>
+              <a:rPr lang="en-US" sz="2400" b="1" dirty="0">
+                <a:solidFill>
+                  <a:srgbClr val="4CC3FF"/>
                 </a:solidFill>
                 <a:latin typeface="Georgia" pitchFamily="34" charset="0"/>
                 <a:ea typeface="Georgia" pitchFamily="34" charset="-122"/>
                 <a:cs typeface="Georgia" pitchFamily="34" charset="-120"/>
               </a:rPr>
-              <a:t>40–60</a:t>
-            </a:r>
-            <a:endParaRPr lang="en-US" sz="2600" dirty="0"/>
+              <a:t>~US$9M</a:t>
+            </a:r>
+            <a:endParaRPr lang="en-US" sz="2400" dirty="0"/>
           </a:p>
         </p:txBody>
       </p:sp>
@@ -18045,8 +18223,8 @@
         </p:nvSpPr>
         <p:spPr>
           <a:xfrm>
-            <a:off x="4846320" y="2980944"/>
-            <a:ext cx="1645920" cy="438912"/>
+            <a:off x="6217920" y="2889504"/>
+            <a:ext cx="2221992" cy="384048"/>
           </a:xfrm>
           <a:prstGeom prst="rect">
             <a:avLst/>
@@ -18064,13 +18242,13 @@
             <a:r>
               <a:rPr lang="en-US" sz="1000" b="1" dirty="0">
                 <a:solidFill>
-                  <a:srgbClr val="13233F"/>
-                </a:solidFill>
-                <a:latin typeface="Calibri" pitchFamily="34" charset="0"/>
-                <a:ea typeface="Calibri" pitchFamily="34" charset="-122"/>
-                <a:cs typeface="Calibri" pitchFamily="34" charset="-120"/>
-              </a:rPr>
-              <a:t>a new merchant category</a:t>
+                  <a:srgbClr val="EEF3FF"/>
+                </a:solidFill>
+                <a:latin typeface="Calibri" pitchFamily="34" charset="0"/>
+                <a:ea typeface="Calibri" pitchFamily="34" charset="-122"/>
+                <a:cs typeface="Calibri" pitchFamily="34" charset="-120"/>
+              </a:rPr>
+              <a:t>if we digitize just 10%</a:t>
             </a:r>
             <a:endParaRPr lang="en-US" sz="1000" dirty="0"/>
           </a:p>
@@ -18084,24 +18262,77 @@
         </p:nvSpPr>
         <p:spPr>
           <a:xfrm>
-            <a:off x="4846320" y="3456432"/>
-            <a:ext cx="1645920" cy="868680"/>
-          </a:xfrm>
-          <a:prstGeom prst="rect">
-            <a:avLst/>
-          </a:prstGeom>
-          <a:noFill/>
-          <a:ln/>
-        </p:spPr>
-        <p:txBody>
-          <a:bodyPr wrap="square" lIns="0" tIns="0" rIns="0" bIns="0" rtlCol="0" anchor="ctr"/>
-          <a:lstStyle/>
-          <a:p>
-            <a:pPr indent="0" marL="0">
-              <a:buNone/>
-            </a:pPr>
-            <a:r>
-              <a:rPr lang="en-US" sz="950" dirty="0">
+            <a:off x="6217920" y="3310128"/>
+            <a:ext cx="2167128" cy="777240"/>
+          </a:xfrm>
+          <a:prstGeom prst="rect">
+            <a:avLst/>
+          </a:prstGeom>
+          <a:noFill/>
+          <a:ln/>
+        </p:spPr>
+        <p:txBody>
+          <a:bodyPr wrap="square" lIns="0" tIns="0" rIns="0" bIns="0" rtlCol="0" anchor="ctr"/>
+          <a:lstStyle/>
+          <a:p>
+            <a:pPr indent="0" marL="0">
+              <a:buNone/>
+            </a:pPr>
+            <a:r>
+              <a:rPr lang="en-US" sz="870" dirty="0">
+                <a:solidFill>
+                  <a:srgbClr val="AEC2E0"/>
+                </a:solidFill>
+                <a:latin typeface="Calibri" pitchFamily="34" charset="0"/>
+                <a:ea typeface="Calibri" pitchFamily="34" charset="-122"/>
+                <a:cs typeface="Calibri" pitchFamily="34" charset="-120"/>
+              </a:rPr>
+              <a:t>10% of the formal floor — onto Paynow rails, from a market that is ~100% cash today. Our 5-yr plan lands here: a US$7.1M Year-5 run-rate, ~8% of the floor.</a:t>
+            </a:r>
+            <a:endParaRPr lang="en-US" sz="870" dirty="0"/>
+          </a:p>
+        </p:txBody>
+      </p:sp>
+      <p:sp>
+        <p:nvSpPr>
+          <p:cNvPr id="21" name="Text 19"/>
+          <p:cNvSpPr/>
+          <p:nvPr/>
+        </p:nvSpPr>
+        <p:spPr>
+          <a:xfrm>
+            <a:off x="640080" y="4334256"/>
+            <a:ext cx="7955280" cy="365760"/>
+          </a:xfrm>
+          <a:prstGeom prst="rect">
+            <a:avLst/>
+          </a:prstGeom>
+          <a:noFill/>
+          <a:ln/>
+        </p:spPr>
+        <p:txBody>
+          <a:bodyPr wrap="square" lIns="0" tIns="0" rIns="0" bIns="0" rtlCol="0" anchor="ctr"/>
+          <a:lstStyle/>
+          <a:p>
+            <a:pPr indent="0" marL="0">
+              <a:buNone/>
+            </a:pPr>
+            <a:r>
+              <a:rPr lang="en-US" sz="830" b="1" i="1" dirty="0">
+                <a:solidFill>
+                  <a:srgbClr val="175FF8"/>
+                </a:solidFill>
+                <a:latin typeface="Calibri" pitchFamily="34" charset="0"/>
+                <a:ea typeface="Calibri" pitchFamily="34" charset="-122"/>
+                <a:cs typeface="Calibri" pitchFamily="34" charset="-120"/>
+              </a:rPr>
+              <a:t>Grounded in:  </a:t>
+            </a:r>
+            <a:pPr indent="0" marL="0">
+              <a:buNone/>
+            </a:pPr>
+            <a:r>
+              <a:rPr lang="en-US" sz="830" i="1" dirty="0">
                 <a:solidFill>
                   <a:srgbClr val="5B6B86"/>
                 </a:solidFill>
@@ -18109,232 +18340,15 @@
                 <a:ea typeface="Calibri" pitchFamily="34" charset="-122"/>
                 <a:cs typeface="Calibri" pitchFamily="34" charset="-120"/>
               </a:rPr>
-              <a:t>Auction houses are a class Paynow doesn't serve today. Each house onboarded is a new recurring biller + settlement account.</a:t>
-            </a:r>
-            <a:endParaRPr lang="en-US" sz="950" dirty="0"/>
-          </a:p>
-        </p:txBody>
-      </p:sp>
-      <p:sp>
-        <p:nvSpPr>
-          <p:cNvPr id="21" name="Shape 19"/>
-          <p:cNvSpPr/>
-          <p:nvPr/>
-        </p:nvSpPr>
-        <p:spPr>
-          <a:xfrm>
-            <a:off x="6675120" y="2286000"/>
-            <a:ext cx="1874520" cy="2011680"/>
-          </a:xfrm>
-          <a:prstGeom prst="rect">
-            <a:avLst/>
-          </a:prstGeom>
-          <a:solidFill>
-            <a:srgbClr val="FFFFFF"/>
-          </a:solidFill>
-          <a:ln/>
-          <a:effectLst>
-            <a:outerShdw sx="100000" sy="100000" kx="0" ky="0" algn="bl" rotWithShape="0" blurRad="101600" dist="25400" dir="5400000">
-              <a:srgbClr val="000000">
-                <a:alpha val="8000"/>
-              </a:srgbClr>
-            </a:outerShdw>
-          </a:effectLst>
-        </p:spPr>
-      </p:sp>
-      <p:sp>
-        <p:nvSpPr>
-          <p:cNvPr id="22" name="Shape 20"/>
-          <p:cNvSpPr/>
-          <p:nvPr/>
-        </p:nvSpPr>
-        <p:spPr>
-          <a:xfrm>
-            <a:off x="6675120" y="2286000"/>
-            <a:ext cx="54864" cy="2011680"/>
-          </a:xfrm>
-          <a:prstGeom prst="rect">
-            <a:avLst/>
-          </a:prstGeom>
-          <a:solidFill>
-            <a:srgbClr val="175FF8"/>
-          </a:solidFill>
-          <a:ln/>
-        </p:spPr>
-      </p:sp>
-      <p:sp>
-        <p:nvSpPr>
-          <p:cNvPr id="23" name="Text 21"/>
-          <p:cNvSpPr/>
-          <p:nvPr/>
-        </p:nvSpPr>
-        <p:spPr>
-          <a:xfrm>
-            <a:off x="6858000" y="2395728"/>
-            <a:ext cx="1645920" cy="566928"/>
-          </a:xfrm>
-          <a:prstGeom prst="rect">
-            <a:avLst/>
-          </a:prstGeom>
-          <a:noFill/>
-          <a:ln/>
-        </p:spPr>
-        <p:txBody>
-          <a:bodyPr wrap="square" lIns="0" tIns="0" rIns="0" bIns="0" rtlCol="0" anchor="ctr"/>
-          <a:lstStyle/>
-          <a:p>
-            <a:pPr indent="0" marL="0">
-              <a:buNone/>
-            </a:pPr>
-            <a:r>
-              <a:rPr lang="en-US" sz="2600" b="1" dirty="0">
-                <a:solidFill>
-                  <a:srgbClr val="175FF8"/>
-                </a:solidFill>
-                <a:latin typeface="Georgia" pitchFamily="34" charset="0"/>
-                <a:ea typeface="Georgia" pitchFamily="34" charset="-122"/>
-                <a:cs typeface="Georgia" pitchFamily="34" charset="-120"/>
-              </a:rPr>
-              <a:t>9</a:t>
-            </a:r>
-            <a:endParaRPr lang="en-US" sz="2600" dirty="0"/>
-          </a:p>
-        </p:txBody>
-      </p:sp>
-      <p:sp>
-        <p:nvSpPr>
-          <p:cNvPr id="24" name="Text 22"/>
-          <p:cNvSpPr/>
-          <p:nvPr/>
-        </p:nvSpPr>
-        <p:spPr>
-          <a:xfrm>
-            <a:off x="6858000" y="2980944"/>
-            <a:ext cx="1645920" cy="438912"/>
-          </a:xfrm>
-          <a:prstGeom prst="rect">
-            <a:avLst/>
-          </a:prstGeom>
-          <a:noFill/>
-          <a:ln/>
-        </p:spPr>
-        <p:txBody>
-          <a:bodyPr wrap="square" lIns="0" tIns="0" rIns="0" bIns="0" rtlCol="0" anchor="ctr"/>
-          <a:lstStyle/>
-          <a:p>
-            <a:pPr indent="0" marL="0">
-              <a:buNone/>
-            </a:pPr>
-            <a:r>
-              <a:rPr lang="en-US" sz="1000" b="1" dirty="0">
-                <a:solidFill>
-                  <a:srgbClr val="13233F"/>
-                </a:solidFill>
-                <a:latin typeface="Calibri" pitchFamily="34" charset="0"/>
-                <a:ea typeface="Calibri" pitchFamily="34" charset="-122"/>
-                <a:cs typeface="Calibri" pitchFamily="34" charset="-120"/>
-              </a:rPr>
-              <a:t>DX fixes delivered as feedback</a:t>
-            </a:r>
-            <a:endParaRPr lang="en-US" sz="1000" dirty="0"/>
-          </a:p>
-        </p:txBody>
-      </p:sp>
-      <p:sp>
-        <p:nvSpPr>
-          <p:cNvPr id="25" name="Text 23"/>
-          <p:cNvSpPr/>
-          <p:nvPr/>
-        </p:nvSpPr>
-        <p:spPr>
-          <a:xfrm>
-            <a:off x="6858000" y="3456432"/>
-            <a:ext cx="1645920" cy="868680"/>
-          </a:xfrm>
-          <a:prstGeom prst="rect">
-            <a:avLst/>
-          </a:prstGeom>
-          <a:noFill/>
-          <a:ln/>
-        </p:spPr>
-        <p:txBody>
-          <a:bodyPr wrap="square" lIns="0" tIns="0" rIns="0" bIns="0" rtlCol="0" anchor="ctr"/>
-          <a:lstStyle/>
-          <a:p>
-            <a:pPr indent="0" marL="0">
-              <a:buNone/>
-            </a:pPr>
-            <a:r>
-              <a:rPr lang="en-US" sz="950" dirty="0">
-                <a:solidFill>
-                  <a:srgbClr val="5B6B86"/>
-                </a:solidFill>
-                <a:latin typeface="Calibri" pitchFamily="34" charset="0"/>
-                <a:ea typeface="Calibri" pitchFamily="34" charset="-122"/>
-                <a:cs typeface="Calibri" pitchFamily="34" charset="-120"/>
-              </a:rPr>
-              <a:t>A full developer-experience benchmark vs Stripe, Paystack, Flutterwave &amp; Pesepay — the next integrator's path made shorter.</a:t>
-            </a:r>
-            <a:endParaRPr lang="en-US" sz="950" dirty="0"/>
-          </a:p>
-        </p:txBody>
-      </p:sp>
-      <p:sp>
-        <p:nvSpPr>
-          <p:cNvPr id="26" name="Text 24"/>
-          <p:cNvSpPr/>
-          <p:nvPr/>
-        </p:nvSpPr>
-        <p:spPr>
-          <a:xfrm>
-            <a:off x="640080" y="4480560"/>
-            <a:ext cx="7955280" cy="274320"/>
-          </a:xfrm>
-          <a:prstGeom prst="rect">
-            <a:avLst/>
-          </a:prstGeom>
-          <a:noFill/>
-          <a:ln/>
-        </p:spPr>
-        <p:txBody>
-          <a:bodyPr wrap="square" lIns="0" tIns="0" rIns="0" bIns="0" rtlCol="0" anchor="ctr"/>
-          <a:lstStyle/>
-          <a:p>
-            <a:pPr indent="0" marL="0">
-              <a:buNone/>
-            </a:pPr>
-            <a:r>
-              <a:rPr lang="en-US" sz="1000" b="1" i="1" dirty="0">
-                <a:solidFill>
-                  <a:srgbClr val="175FF8"/>
-                </a:solidFill>
-                <a:latin typeface="Calibri" pitchFamily="34" charset="0"/>
-                <a:ea typeface="Calibri" pitchFamily="34" charset="-122"/>
-                <a:cs typeface="Calibri" pitchFamily="34" charset="-120"/>
-              </a:rPr>
-              <a:t>The strategic fit:  </a:t>
-            </a:r>
-            <a:pPr indent="0" marL="0">
-              <a:buNone/>
-            </a:pPr>
-            <a:r>
-              <a:rPr lang="en-US" sz="1000" i="1" dirty="0">
-                <a:solidFill>
-                  <a:srgbClr val="5B6B86"/>
-                </a:solidFill>
-                <a:latin typeface="Calibri" pitchFamily="34" charset="0"/>
-                <a:ea typeface="Calibri" pitchFamily="34" charset="-122"/>
-                <a:cs typeface="Calibri" pitchFamily="34" charset="-120"/>
-              </a:rPr>
-              <a:t>Paynow's growing contacts open the doors; ZimLivestock does the on-the-ground operating — and every dollar it settles flows onto Paynow rails.</a:t>
-            </a:r>
-            <a:endParaRPr lang="en-US" sz="1000" dirty="0"/>
-          </a:p>
-        </p:txBody>
-      </p:sp>
-      <p:sp>
-        <p:nvSpPr>
-          <p:cNvPr id="27" name="Text 25"/>
+              <a:t>national herd 5.7M (Parliament / Newsday, Sept 2025) · 6% off-take (FAO) · live cattle US$2.84–3.93/kg (Selina Wamucii, 2025). Government targets a US$25bn livestock sector by 2030.</a:t>
+            </a:r>
+            <a:endParaRPr lang="en-US" sz="830" dirty="0"/>
+          </a:p>
+        </p:txBody>
+      </p:sp>
+      <p:sp>
+        <p:nvSpPr>
+          <p:cNvPr id="22" name="Text 20"/>
           <p:cNvSpPr/>
           <p:nvPr/>
         </p:nvSpPr>
@@ -18373,7 +18387,7 @@
       </p:sp>
       <p:sp>
         <p:nvSpPr>
-          <p:cNvPr id="28" name="Text 26"/>
+          <p:cNvPr id="23" name="Text 21"/>
           <p:cNvSpPr/>
           <p:nvPr/>
         </p:nvSpPr>
@@ -18404,7 +18418,7 @@
                 <a:ea typeface="Calibri" pitchFamily="34" charset="-122"/>
                 <a:cs typeface="Calibri" pitchFamily="34" charset="-120"/>
               </a:rPr>
-              <a:t>25 / 29</a:t>
+              <a:t>25 / 31</a:t>
             </a:r>
             <a:endParaRPr lang="en-US" sz="800" dirty="0"/>
           </a:p>
@@ -18495,7 +18509,7 @@
                 <a:ea typeface="Calibri" pitchFamily="34" charset="-122"/>
                 <a:cs typeface="Calibri" pitchFamily="34" charset="-120"/>
               </a:rPr>
-              <a:t>DEVELOPER EXPERIENCE BENCHMARK · FINDINGS</a:t>
+              <a:t>HOW THE NUMBERS ARE BUILT · NO BLACK BOX</a:t>
             </a:r>
             <a:endParaRPr lang="en-US" sz="1100" dirty="0"/>
           </a:p>
@@ -18534,7 +18548,7 @@
                 <a:ea typeface="Georgia" pitchFamily="34" charset="-122"/>
                 <a:cs typeface="Georgia" pitchFamily="34" charset="-120"/>
               </a:rPr>
-              <a:t>I also stress-tested your front door.</a:t>
+              <a:t>Every dollar traces to a driver.</a:t>
             </a:r>
             <a:endParaRPr lang="en-US" sz="2800" dirty="0"/>
           </a:p>
@@ -18573,7 +18587,7 @@
                 <a:ea typeface="Calibri" pitchFamily="34" charset="-122"/>
                 <a:cs typeface="Calibri" pitchFamily="34" charset="-120"/>
               </a:rPr>
-              <a:t>Four weeks integrating Paynow with no SDK, benchmarked against four global gateways — the honest scorecard, and what Paynow already does better than anyone in this market.</a:t>
+              <a:t>The US$19.5M is built bottom-up from auction-floor reality — not a top-down guess. Here is the chain, and Year 1 worked end-to-end.</a:t>
             </a:r>
             <a:endParaRPr lang="en-US" sz="1300" dirty="0"/>
           </a:p>
@@ -18587,24 +18601,24 @@
         </p:nvSpPr>
         <p:spPr>
           <a:xfrm>
-            <a:off x="640080" y="2084832"/>
-            <a:ext cx="7955280" cy="274320"/>
-          </a:xfrm>
-          <a:prstGeom prst="rect">
-            <a:avLst/>
-          </a:prstGeom>
-          <a:noFill/>
-          <a:ln/>
-        </p:spPr>
-        <p:txBody>
-          <a:bodyPr wrap="square" lIns="0" tIns="0" rIns="0" bIns="0" rtlCol="0" anchor="ctr"/>
-          <a:lstStyle/>
-          <a:p>
-            <a:pPr indent="0" marL="0">
-              <a:buNone/>
-            </a:pPr>
-            <a:r>
-              <a:rPr lang="en-US" sz="1200" b="1" dirty="0">
+            <a:off x="640080" y="2121408"/>
+            <a:ext cx="3840480" cy="228600"/>
+          </a:xfrm>
+          <a:prstGeom prst="rect">
+            <a:avLst/>
+          </a:prstGeom>
+          <a:noFill/>
+          <a:ln/>
+        </p:spPr>
+        <p:txBody>
+          <a:bodyPr wrap="square" lIns="0" tIns="0" rIns="0" bIns="0" rtlCol="0" anchor="ctr"/>
+          <a:lstStyle/>
+          <a:p>
+            <a:pPr indent="0" marL="0">
+              <a:buNone/>
+            </a:pPr>
+            <a:r>
+              <a:rPr lang="en-US" sz="950" b="1" spc="100" kern="0" dirty="0">
                 <a:solidFill>
                   <a:srgbClr val="175FF8"/>
                 </a:solidFill>
@@ -18612,60 +18626,7 @@
                 <a:ea typeface="Calibri" pitchFamily="34" charset="-122"/>
                 <a:cs typeface="Calibri" pitchFamily="34" charset="-120"/>
               </a:rPr>
-              <a:t>Overall DX: 2.3 / 5</a:t>
-            </a:r>
-            <a:pPr indent="0" marL="0">
-              <a:buNone/>
-            </a:pPr>
-            <a:r>
-              <a:rPr lang="en-US" sz="1200" dirty="0">
-                <a:solidFill>
-                  <a:srgbClr val="5B6B86"/>
-                </a:solidFill>
-                <a:latin typeface="Calibri" pitchFamily="34" charset="0"/>
-                <a:ea typeface="Calibri" pitchFamily="34" charset="-122"/>
-                <a:cs typeface="Calibri" pitchFamily="34" charset="-120"/>
-              </a:rPr>
-              <a:t>    — Stripe 4.8 · Paystack 4.2 · Flutterwave 3.5 (same framework)</a:t>
-            </a:r>
-            <a:endParaRPr lang="en-US" sz="1200" dirty="0"/>
-          </a:p>
-        </p:txBody>
-      </p:sp>
-      <p:sp>
-        <p:nvSpPr>
-          <p:cNvPr id="7" name="Text 5"/>
-          <p:cNvSpPr/>
-          <p:nvPr/>
-        </p:nvSpPr>
-        <p:spPr>
-          <a:xfrm>
-            <a:off x="640080" y="2487168"/>
-            <a:ext cx="1645920" cy="256032"/>
-          </a:xfrm>
-          <a:prstGeom prst="rect">
-            <a:avLst/>
-          </a:prstGeom>
-          <a:noFill/>
-          <a:ln/>
-        </p:spPr>
-        <p:txBody>
-          <a:bodyPr wrap="square" lIns="0" tIns="0" rIns="0" bIns="0" rtlCol="0" anchor="ctr"/>
-          <a:lstStyle/>
-          <a:p>
-            <a:pPr indent="0" marL="0">
-              <a:buNone/>
-            </a:pPr>
-            <a:r>
-              <a:rPr lang="en-US" sz="950" dirty="0">
-                <a:solidFill>
-                  <a:srgbClr val="13233F"/>
-                </a:solidFill>
-                <a:latin typeface="Calibri" pitchFamily="34" charset="0"/>
-                <a:ea typeface="Calibri" pitchFamily="34" charset="-122"/>
-                <a:cs typeface="Calibri" pitchFamily="34" charset="-120"/>
-              </a:rPr>
-              <a:t>Documentation</a:t>
+              <a:t>THE DRIVER CHAIN</a:t>
             </a:r>
             <a:endParaRPr lang="en-US" sz="950" dirty="0"/>
           </a:p>
@@ -18673,36 +18634,16 @@
       </p:sp>
       <p:sp>
         <p:nvSpPr>
-          <p:cNvPr id="8" name="Shape 6"/>
-          <p:cNvSpPr/>
-          <p:nvPr/>
-        </p:nvSpPr>
-        <p:spPr>
-          <a:xfrm>
-            <a:off x="2331720" y="2532888"/>
-            <a:ext cx="1783080" cy="146304"/>
-          </a:xfrm>
-          <a:prstGeom prst="rect">
-            <a:avLst/>
-          </a:prstGeom>
-          <a:solidFill>
-            <a:srgbClr val="D6E0F2"/>
-          </a:solidFill>
-          <a:ln/>
-        </p:spPr>
-      </p:sp>
-      <p:sp>
-        <p:nvSpPr>
-          <p:cNvPr id="9" name="Shape 7"/>
-          <p:cNvSpPr/>
-          <p:nvPr/>
-        </p:nvSpPr>
-        <p:spPr>
-          <a:xfrm>
-            <a:off x="2331720" y="2532888"/>
-            <a:ext cx="891540" cy="146304"/>
-          </a:xfrm>
-          <a:prstGeom prst="rect">
+          <p:cNvPr id="7" name="Shape 5"/>
+          <p:cNvSpPr/>
+          <p:nvPr/>
+        </p:nvSpPr>
+        <p:spPr>
+          <a:xfrm>
+            <a:off x="640080" y="2441448"/>
+            <a:ext cx="237744" cy="237744"/>
+          </a:xfrm>
+          <a:prstGeom prst="ellipse">
             <a:avLst/>
           </a:prstGeom>
           <a:solidFill>
@@ -18713,114 +18654,94 @@
       </p:sp>
       <p:sp>
         <p:nvSpPr>
-          <p:cNvPr id="10" name="Text 8"/>
-          <p:cNvSpPr/>
-          <p:nvPr/>
-        </p:nvSpPr>
-        <p:spPr>
-          <a:xfrm>
-            <a:off x="4206240" y="2487168"/>
-            <a:ext cx="457200" cy="256032"/>
-          </a:xfrm>
-          <a:prstGeom prst="rect">
-            <a:avLst/>
-          </a:prstGeom>
-          <a:noFill/>
-          <a:ln/>
-        </p:spPr>
-        <p:txBody>
-          <a:bodyPr wrap="square" lIns="0" tIns="0" rIns="0" bIns="0" rtlCol="0" anchor="ctr"/>
-          <a:lstStyle/>
-          <a:p>
-            <a:pPr indent="0" marL="0">
-              <a:buNone/>
-            </a:pPr>
-            <a:r>
-              <a:rPr lang="en-US" sz="950" b="1" dirty="0">
-                <a:solidFill>
-                  <a:srgbClr val="13233F"/>
-                </a:solidFill>
-                <a:latin typeface="Calibri" pitchFamily="34" charset="0"/>
-                <a:ea typeface="Calibri" pitchFamily="34" charset="-122"/>
-                <a:cs typeface="Calibri" pitchFamily="34" charset="-120"/>
-              </a:rPr>
-              <a:t>2.5</a:t>
-            </a:r>
-            <a:endParaRPr lang="en-US" sz="950" dirty="0"/>
-          </a:p>
-        </p:txBody>
-      </p:sp>
-      <p:sp>
-        <p:nvSpPr>
-          <p:cNvPr id="11" name="Text 9"/>
-          <p:cNvSpPr/>
-          <p:nvPr/>
-        </p:nvSpPr>
-        <p:spPr>
-          <a:xfrm>
-            <a:off x="640080" y="2798064"/>
-            <a:ext cx="1645920" cy="256032"/>
-          </a:xfrm>
-          <a:prstGeom prst="rect">
-            <a:avLst/>
-          </a:prstGeom>
-          <a:noFill/>
-          <a:ln/>
-        </p:spPr>
-        <p:txBody>
-          <a:bodyPr wrap="square" lIns="0" tIns="0" rIns="0" bIns="0" rtlCol="0" anchor="ctr"/>
-          <a:lstStyle/>
-          <a:p>
-            <a:pPr indent="0" marL="0">
-              <a:buNone/>
-            </a:pPr>
-            <a:r>
-              <a:rPr lang="en-US" sz="950" dirty="0">
-                <a:solidFill>
-                  <a:srgbClr val="13233F"/>
-                </a:solidFill>
-                <a:latin typeface="Calibri" pitchFamily="34" charset="0"/>
-                <a:ea typeface="Calibri" pitchFamily="34" charset="-122"/>
-                <a:cs typeface="Calibri" pitchFamily="34" charset="-120"/>
-              </a:rPr>
-              <a:t>Integration simplicity</a:t>
-            </a:r>
-            <a:endParaRPr lang="en-US" sz="950" dirty="0"/>
-          </a:p>
-        </p:txBody>
-      </p:sp>
-      <p:sp>
-        <p:nvSpPr>
-          <p:cNvPr id="12" name="Shape 10"/>
-          <p:cNvSpPr/>
-          <p:nvPr/>
-        </p:nvSpPr>
-        <p:spPr>
-          <a:xfrm>
-            <a:off x="2331720" y="2843784"/>
-            <a:ext cx="1783080" cy="146304"/>
-          </a:xfrm>
-          <a:prstGeom prst="rect">
-            <a:avLst/>
-          </a:prstGeom>
-          <a:solidFill>
-            <a:srgbClr val="D6E0F2"/>
-          </a:solidFill>
-          <a:ln/>
-        </p:spPr>
-      </p:sp>
-      <p:sp>
-        <p:nvSpPr>
-          <p:cNvPr id="13" name="Shape 11"/>
-          <p:cNvSpPr/>
-          <p:nvPr/>
-        </p:nvSpPr>
-        <p:spPr>
-          <a:xfrm>
-            <a:off x="2331720" y="2843784"/>
-            <a:ext cx="713232" cy="146304"/>
-          </a:xfrm>
-          <a:prstGeom prst="rect">
+          <p:cNvPr id="8" name="Text 6"/>
+          <p:cNvSpPr/>
+          <p:nvPr/>
+        </p:nvSpPr>
+        <p:spPr>
+          <a:xfrm>
+            <a:off x="640080" y="2441448"/>
+            <a:ext cx="237744" cy="237744"/>
+          </a:xfrm>
+          <a:prstGeom prst="rect">
+            <a:avLst/>
+          </a:prstGeom>
+          <a:noFill/>
+          <a:ln/>
+        </p:spPr>
+        <p:txBody>
+          <a:bodyPr wrap="square" lIns="0" tIns="0" rIns="0" bIns="0" rtlCol="0" anchor="ctr"/>
+          <a:lstStyle/>
+          <a:p>
+            <a:pPr algn="ctr" indent="0" marL="0">
+              <a:buNone/>
+            </a:pPr>
+            <a:r>
+              <a:rPr lang="en-US" sz="1000" b="1" dirty="0">
+                <a:solidFill>
+                  <a:srgbClr val="FFFFFF"/>
+                </a:solidFill>
+                <a:latin typeface="Calibri" pitchFamily="34" charset="0"/>
+                <a:ea typeface="Calibri" pitchFamily="34" charset="-122"/>
+                <a:cs typeface="Calibri" pitchFamily="34" charset="-120"/>
+              </a:rPr>
+              <a:t>1</a:t>
+            </a:r>
+            <a:endParaRPr lang="en-US" sz="1000" dirty="0"/>
+          </a:p>
+        </p:txBody>
+      </p:sp>
+      <p:sp>
+        <p:nvSpPr>
+          <p:cNvPr id="9" name="Text 7"/>
+          <p:cNvSpPr/>
+          <p:nvPr/>
+        </p:nvSpPr>
+        <p:spPr>
+          <a:xfrm>
+            <a:off x="987552" y="2414016"/>
+            <a:ext cx="3429000" cy="384048"/>
+          </a:xfrm>
+          <a:prstGeom prst="rect">
+            <a:avLst/>
+          </a:prstGeom>
+          <a:noFill/>
+          <a:ln/>
+        </p:spPr>
+        <p:txBody>
+          <a:bodyPr wrap="square" lIns="0" tIns="0" rIns="0" bIns="0" rtlCol="0" anchor="ctr"/>
+          <a:lstStyle/>
+          <a:p>
+            <a:pPr indent="0" marL="0">
+              <a:buNone/>
+            </a:pPr>
+            <a:r>
+              <a:rPr lang="en-US" sz="1000" dirty="0">
+                <a:solidFill>
+                  <a:srgbClr val="5B6B86"/>
+                </a:solidFill>
+                <a:latin typeface="Calibri" pitchFamily="34" charset="0"/>
+                <a:ea typeface="Calibri" pitchFamily="34" charset="-122"/>
+                <a:cs typeface="Calibri" pitchFamily="34" charset="-120"/>
+              </a:rPr>
+              <a:t>Houses live, by tier — 5 → 8 → 12 → 16 → 20 (anchors first)</a:t>
+            </a:r>
+            <a:endParaRPr lang="en-US" sz="1000" dirty="0"/>
+          </a:p>
+        </p:txBody>
+      </p:sp>
+      <p:sp>
+        <p:nvSpPr>
+          <p:cNvPr id="10" name="Shape 8"/>
+          <p:cNvSpPr/>
+          <p:nvPr/>
+        </p:nvSpPr>
+        <p:spPr>
+          <a:xfrm>
+            <a:off x="640080" y="2843784"/>
+            <a:ext cx="237744" cy="237744"/>
+          </a:xfrm>
+          <a:prstGeom prst="ellipse">
             <a:avLst/>
           </a:prstGeom>
           <a:solidFill>
@@ -18831,350 +18752,94 @@
       </p:sp>
       <p:sp>
         <p:nvSpPr>
-          <p:cNvPr id="14" name="Text 12"/>
-          <p:cNvSpPr/>
-          <p:nvPr/>
-        </p:nvSpPr>
-        <p:spPr>
-          <a:xfrm>
-            <a:off x="4206240" y="2798064"/>
-            <a:ext cx="457200" cy="256032"/>
-          </a:xfrm>
-          <a:prstGeom prst="rect">
-            <a:avLst/>
-          </a:prstGeom>
-          <a:noFill/>
-          <a:ln/>
-        </p:spPr>
-        <p:txBody>
-          <a:bodyPr wrap="square" lIns="0" tIns="0" rIns="0" bIns="0" rtlCol="0" anchor="ctr"/>
-          <a:lstStyle/>
-          <a:p>
-            <a:pPr indent="0" marL="0">
-              <a:buNone/>
-            </a:pPr>
-            <a:r>
-              <a:rPr lang="en-US" sz="950" b="1" dirty="0">
-                <a:solidFill>
-                  <a:srgbClr val="13233F"/>
-                </a:solidFill>
-                <a:latin typeface="Calibri" pitchFamily="34" charset="0"/>
-                <a:ea typeface="Calibri" pitchFamily="34" charset="-122"/>
-                <a:cs typeface="Calibri" pitchFamily="34" charset="-120"/>
-              </a:rPr>
-              <a:t>2.0</a:t>
-            </a:r>
-            <a:endParaRPr lang="en-US" sz="950" dirty="0"/>
-          </a:p>
-        </p:txBody>
-      </p:sp>
-      <p:sp>
-        <p:nvSpPr>
-          <p:cNvPr id="15" name="Text 13"/>
-          <p:cNvSpPr/>
-          <p:nvPr/>
-        </p:nvSpPr>
-        <p:spPr>
-          <a:xfrm>
-            <a:off x="640080" y="3108960"/>
-            <a:ext cx="1645920" cy="256032"/>
-          </a:xfrm>
-          <a:prstGeom prst="rect">
-            <a:avLst/>
-          </a:prstGeom>
-          <a:noFill/>
-          <a:ln/>
-        </p:spPr>
-        <p:txBody>
-          <a:bodyPr wrap="square" lIns="0" tIns="0" rIns="0" bIns="0" rtlCol="0" anchor="ctr"/>
-          <a:lstStyle/>
-          <a:p>
-            <a:pPr indent="0" marL="0">
-              <a:buNone/>
-            </a:pPr>
-            <a:r>
-              <a:rPr lang="en-US" sz="950" dirty="0">
-                <a:solidFill>
-                  <a:srgbClr val="13233F"/>
-                </a:solidFill>
-                <a:latin typeface="Calibri" pitchFamily="34" charset="0"/>
-                <a:ea typeface="Calibri" pitchFamily="34" charset="-122"/>
-                <a:cs typeface="Calibri" pitchFamily="34" charset="-120"/>
-              </a:rPr>
-              <a:t>Error messages</a:t>
-            </a:r>
-            <a:endParaRPr lang="en-US" sz="950" dirty="0"/>
-          </a:p>
-        </p:txBody>
-      </p:sp>
-      <p:sp>
-        <p:nvSpPr>
-          <p:cNvPr id="16" name="Shape 14"/>
-          <p:cNvSpPr/>
-          <p:nvPr/>
-        </p:nvSpPr>
-        <p:spPr>
-          <a:xfrm>
-            <a:off x="2331720" y="3154680"/>
-            <a:ext cx="1783080" cy="146304"/>
-          </a:xfrm>
-          <a:prstGeom prst="rect">
-            <a:avLst/>
-          </a:prstGeom>
-          <a:solidFill>
-            <a:srgbClr val="D6E0F2"/>
-          </a:solidFill>
-          <a:ln/>
-        </p:spPr>
-      </p:sp>
-      <p:sp>
-        <p:nvSpPr>
-          <p:cNvPr id="17" name="Shape 15"/>
-          <p:cNvSpPr/>
-          <p:nvPr/>
-        </p:nvSpPr>
-        <p:spPr>
-          <a:xfrm>
-            <a:off x="2331720" y="3154680"/>
-            <a:ext cx="534924" cy="146304"/>
-          </a:xfrm>
-          <a:prstGeom prst="rect">
-            <a:avLst/>
-          </a:prstGeom>
-          <a:solidFill>
-            <a:srgbClr val="E5484D"/>
-          </a:solidFill>
-          <a:ln/>
-        </p:spPr>
-      </p:sp>
-      <p:sp>
-        <p:nvSpPr>
-          <p:cNvPr id="18" name="Text 16"/>
-          <p:cNvSpPr/>
-          <p:nvPr/>
-        </p:nvSpPr>
-        <p:spPr>
-          <a:xfrm>
-            <a:off x="4206240" y="3108960"/>
-            <a:ext cx="457200" cy="256032"/>
-          </a:xfrm>
-          <a:prstGeom prst="rect">
-            <a:avLst/>
-          </a:prstGeom>
-          <a:noFill/>
-          <a:ln/>
-        </p:spPr>
-        <p:txBody>
-          <a:bodyPr wrap="square" lIns="0" tIns="0" rIns="0" bIns="0" rtlCol="0" anchor="ctr"/>
-          <a:lstStyle/>
-          <a:p>
-            <a:pPr indent="0" marL="0">
-              <a:buNone/>
-            </a:pPr>
-            <a:r>
-              <a:rPr lang="en-US" sz="950" b="1" dirty="0">
-                <a:solidFill>
-                  <a:srgbClr val="13233F"/>
-                </a:solidFill>
-                <a:latin typeface="Calibri" pitchFamily="34" charset="0"/>
-                <a:ea typeface="Calibri" pitchFamily="34" charset="-122"/>
-                <a:cs typeface="Calibri" pitchFamily="34" charset="-120"/>
-              </a:rPr>
-              <a:t>1.5</a:t>
-            </a:r>
-            <a:endParaRPr lang="en-US" sz="950" dirty="0"/>
-          </a:p>
-        </p:txBody>
-      </p:sp>
-      <p:sp>
-        <p:nvSpPr>
-          <p:cNvPr id="19" name="Text 17"/>
-          <p:cNvSpPr/>
-          <p:nvPr/>
-        </p:nvSpPr>
-        <p:spPr>
-          <a:xfrm>
-            <a:off x="640080" y="3419856"/>
-            <a:ext cx="1645920" cy="256032"/>
-          </a:xfrm>
-          <a:prstGeom prst="rect">
-            <a:avLst/>
-          </a:prstGeom>
-          <a:noFill/>
-          <a:ln/>
-        </p:spPr>
-        <p:txBody>
-          <a:bodyPr wrap="square" lIns="0" tIns="0" rIns="0" bIns="0" rtlCol="0" anchor="ctr"/>
-          <a:lstStyle/>
-          <a:p>
-            <a:pPr indent="0" marL="0">
-              <a:buNone/>
-            </a:pPr>
-            <a:r>
-              <a:rPr lang="en-US" sz="950" dirty="0">
-                <a:solidFill>
-                  <a:srgbClr val="13233F"/>
-                </a:solidFill>
-                <a:latin typeface="Calibri" pitchFamily="34" charset="0"/>
-                <a:ea typeface="Calibri" pitchFamily="34" charset="-122"/>
-                <a:cs typeface="Calibri" pitchFamily="34" charset="-120"/>
-              </a:rPr>
-              <a:t>API accessibility</a:t>
-            </a:r>
-            <a:endParaRPr lang="en-US" sz="950" dirty="0"/>
-          </a:p>
-        </p:txBody>
-      </p:sp>
-      <p:sp>
-        <p:nvSpPr>
-          <p:cNvPr id="20" name="Shape 18"/>
-          <p:cNvSpPr/>
-          <p:nvPr/>
-        </p:nvSpPr>
-        <p:spPr>
-          <a:xfrm>
-            <a:off x="2331720" y="3465576"/>
-            <a:ext cx="1783080" cy="146304"/>
-          </a:xfrm>
-          <a:prstGeom prst="rect">
-            <a:avLst/>
-          </a:prstGeom>
-          <a:solidFill>
-            <a:srgbClr val="D6E0F2"/>
-          </a:solidFill>
-          <a:ln/>
-        </p:spPr>
-      </p:sp>
-      <p:sp>
-        <p:nvSpPr>
-          <p:cNvPr id="21" name="Shape 19"/>
-          <p:cNvSpPr/>
-          <p:nvPr/>
-        </p:nvSpPr>
-        <p:spPr>
-          <a:xfrm>
-            <a:off x="2331720" y="3465576"/>
-            <a:ext cx="356616" cy="146304"/>
-          </a:xfrm>
-          <a:prstGeom prst="rect">
-            <a:avLst/>
-          </a:prstGeom>
-          <a:solidFill>
-            <a:srgbClr val="E5484D"/>
-          </a:solidFill>
-          <a:ln/>
-        </p:spPr>
-      </p:sp>
-      <p:sp>
-        <p:nvSpPr>
-          <p:cNvPr id="22" name="Text 20"/>
-          <p:cNvSpPr/>
-          <p:nvPr/>
-        </p:nvSpPr>
-        <p:spPr>
-          <a:xfrm>
-            <a:off x="4206240" y="3419856"/>
-            <a:ext cx="457200" cy="256032"/>
-          </a:xfrm>
-          <a:prstGeom prst="rect">
-            <a:avLst/>
-          </a:prstGeom>
-          <a:noFill/>
-          <a:ln/>
-        </p:spPr>
-        <p:txBody>
-          <a:bodyPr wrap="square" lIns="0" tIns="0" rIns="0" bIns="0" rtlCol="0" anchor="ctr"/>
-          <a:lstStyle/>
-          <a:p>
-            <a:pPr indent="0" marL="0">
-              <a:buNone/>
-            </a:pPr>
-            <a:r>
-              <a:rPr lang="en-US" sz="950" b="1" dirty="0">
-                <a:solidFill>
-                  <a:srgbClr val="13233F"/>
-                </a:solidFill>
-                <a:latin typeface="Calibri" pitchFamily="34" charset="0"/>
-                <a:ea typeface="Calibri" pitchFamily="34" charset="-122"/>
-                <a:cs typeface="Calibri" pitchFamily="34" charset="-120"/>
-              </a:rPr>
-              <a:t>1.0</a:t>
-            </a:r>
-            <a:endParaRPr lang="en-US" sz="950" dirty="0"/>
-          </a:p>
-        </p:txBody>
-      </p:sp>
-      <p:sp>
-        <p:nvSpPr>
-          <p:cNvPr id="23" name="Text 21"/>
-          <p:cNvSpPr/>
-          <p:nvPr/>
-        </p:nvSpPr>
-        <p:spPr>
-          <a:xfrm>
-            <a:off x="640080" y="3730752"/>
-            <a:ext cx="1645920" cy="256032"/>
-          </a:xfrm>
-          <a:prstGeom prst="rect">
-            <a:avLst/>
-          </a:prstGeom>
-          <a:noFill/>
-          <a:ln/>
-        </p:spPr>
-        <p:txBody>
-          <a:bodyPr wrap="square" lIns="0" tIns="0" rIns="0" bIns="0" rtlCol="0" anchor="ctr"/>
-          <a:lstStyle/>
-          <a:p>
-            <a:pPr indent="0" marL="0">
-              <a:buNone/>
-            </a:pPr>
-            <a:r>
-              <a:rPr lang="en-US" sz="950" dirty="0">
-                <a:solidFill>
-                  <a:srgbClr val="13233F"/>
-                </a:solidFill>
-                <a:latin typeface="Calibri" pitchFamily="34" charset="0"/>
-                <a:ea typeface="Calibri" pitchFamily="34" charset="-122"/>
-                <a:cs typeface="Calibri" pitchFamily="34" charset="-120"/>
-              </a:rPr>
-              <a:t>SDK quality</a:t>
-            </a:r>
-            <a:endParaRPr lang="en-US" sz="950" dirty="0"/>
-          </a:p>
-        </p:txBody>
-      </p:sp>
-      <p:sp>
-        <p:nvSpPr>
-          <p:cNvPr id="24" name="Shape 22"/>
-          <p:cNvSpPr/>
-          <p:nvPr/>
-        </p:nvSpPr>
-        <p:spPr>
-          <a:xfrm>
-            <a:off x="2331720" y="3776472"/>
-            <a:ext cx="1783080" cy="146304"/>
-          </a:xfrm>
-          <a:prstGeom prst="rect">
-            <a:avLst/>
-          </a:prstGeom>
-          <a:solidFill>
-            <a:srgbClr val="D6E0F2"/>
-          </a:solidFill>
-          <a:ln/>
-        </p:spPr>
-      </p:sp>
-      <p:sp>
-        <p:nvSpPr>
-          <p:cNvPr id="25" name="Shape 23"/>
-          <p:cNvSpPr/>
-          <p:nvPr/>
-        </p:nvSpPr>
-        <p:spPr>
-          <a:xfrm>
-            <a:off x="2331720" y="3776472"/>
-            <a:ext cx="891540" cy="146304"/>
-          </a:xfrm>
-          <a:prstGeom prst="rect">
+          <p:cNvPr id="11" name="Text 9"/>
+          <p:cNvSpPr/>
+          <p:nvPr/>
+        </p:nvSpPr>
+        <p:spPr>
+          <a:xfrm>
+            <a:off x="640080" y="2843784"/>
+            <a:ext cx="237744" cy="237744"/>
+          </a:xfrm>
+          <a:prstGeom prst="rect">
+            <a:avLst/>
+          </a:prstGeom>
+          <a:noFill/>
+          <a:ln/>
+        </p:spPr>
+        <p:txBody>
+          <a:bodyPr wrap="square" lIns="0" tIns="0" rIns="0" bIns="0" rtlCol="0" anchor="ctr"/>
+          <a:lstStyle/>
+          <a:p>
+            <a:pPr algn="ctr" indent="0" marL="0">
+              <a:buNone/>
+            </a:pPr>
+            <a:r>
+              <a:rPr lang="en-US" sz="1000" b="1" dirty="0">
+                <a:solidFill>
+                  <a:srgbClr val="FFFFFF"/>
+                </a:solidFill>
+                <a:latin typeface="Calibri" pitchFamily="34" charset="0"/>
+                <a:ea typeface="Calibri" pitchFamily="34" charset="-122"/>
+                <a:cs typeface="Calibri" pitchFamily="34" charset="-120"/>
+              </a:rPr>
+              <a:t>2</a:t>
+            </a:r>
+            <a:endParaRPr lang="en-US" sz="1000" dirty="0"/>
+          </a:p>
+        </p:txBody>
+      </p:sp>
+      <p:sp>
+        <p:nvSpPr>
+          <p:cNvPr id="12" name="Text 10"/>
+          <p:cNvSpPr/>
+          <p:nvPr/>
+        </p:nvSpPr>
+        <p:spPr>
+          <a:xfrm>
+            <a:off x="987552" y="2816352"/>
+            <a:ext cx="3429000" cy="384048"/>
+          </a:xfrm>
+          <a:prstGeom prst="rect">
+            <a:avLst/>
+          </a:prstGeom>
+          <a:noFill/>
+          <a:ln/>
+        </p:spPr>
+        <p:txBody>
+          <a:bodyPr wrap="square" lIns="0" tIns="0" rIns="0" bIns="0" rtlCol="0" anchor="ctr"/>
+          <a:lstStyle/>
+          <a:p>
+            <a:pPr indent="0" marL="0">
+              <a:buNone/>
+            </a:pPr>
+            <a:r>
+              <a:rPr lang="en-US" sz="1000" dirty="0">
+                <a:solidFill>
+                  <a:srgbClr val="5B6B86"/>
+                </a:solidFill>
+                <a:latin typeface="Calibri" pitchFamily="34" charset="0"/>
+                <a:ea typeface="Calibri" pitchFamily="34" charset="-122"/>
+                <a:cs typeface="Calibri" pitchFamily="34" charset="-120"/>
+              </a:rPr>
+              <a:t>× sale-day GMV × cadence  =  each house's annual floor</a:t>
+            </a:r>
+            <a:endParaRPr lang="en-US" sz="1000" dirty="0"/>
+          </a:p>
+        </p:txBody>
+      </p:sp>
+      <p:sp>
+        <p:nvSpPr>
+          <p:cNvPr id="13" name="Shape 11"/>
+          <p:cNvSpPr/>
+          <p:nvPr/>
+        </p:nvSpPr>
+        <p:spPr>
+          <a:xfrm>
+            <a:off x="640080" y="3246120"/>
+            <a:ext cx="237744" cy="237744"/>
+          </a:xfrm>
+          <a:prstGeom prst="ellipse">
             <a:avLst/>
           </a:prstGeom>
           <a:solidFill>
@@ -19185,114 +18850,192 @@
       </p:sp>
       <p:sp>
         <p:nvSpPr>
-          <p:cNvPr id="26" name="Text 24"/>
-          <p:cNvSpPr/>
-          <p:nvPr/>
-        </p:nvSpPr>
-        <p:spPr>
-          <a:xfrm>
-            <a:off x="4206240" y="3730752"/>
-            <a:ext cx="457200" cy="256032"/>
-          </a:xfrm>
-          <a:prstGeom prst="rect">
-            <a:avLst/>
-          </a:prstGeom>
-          <a:noFill/>
-          <a:ln/>
-        </p:spPr>
-        <p:txBody>
-          <a:bodyPr wrap="square" lIns="0" tIns="0" rIns="0" bIns="0" rtlCol="0" anchor="ctr"/>
-          <a:lstStyle/>
-          <a:p>
-            <a:pPr indent="0" marL="0">
-              <a:buNone/>
-            </a:pPr>
-            <a:r>
-              <a:rPr lang="en-US" sz="950" b="1" dirty="0">
-                <a:solidFill>
-                  <a:srgbClr val="13233F"/>
-                </a:solidFill>
-                <a:latin typeface="Calibri" pitchFamily="34" charset="0"/>
-                <a:ea typeface="Calibri" pitchFamily="34" charset="-122"/>
-                <a:cs typeface="Calibri" pitchFamily="34" charset="-120"/>
-              </a:rPr>
-              <a:t>2.5</a:t>
-            </a:r>
-            <a:endParaRPr lang="en-US" sz="950" dirty="0"/>
-          </a:p>
-        </p:txBody>
-      </p:sp>
-      <p:sp>
-        <p:nvSpPr>
-          <p:cNvPr id="27" name="Text 25"/>
-          <p:cNvSpPr/>
-          <p:nvPr/>
-        </p:nvSpPr>
-        <p:spPr>
-          <a:xfrm>
-            <a:off x="640080" y="4041648"/>
-            <a:ext cx="1645920" cy="256032"/>
-          </a:xfrm>
-          <a:prstGeom prst="rect">
-            <a:avLst/>
-          </a:prstGeom>
-          <a:noFill/>
-          <a:ln/>
-        </p:spPr>
-        <p:txBody>
-          <a:bodyPr wrap="square" lIns="0" tIns="0" rIns="0" bIns="0" rtlCol="0" anchor="ctr"/>
-          <a:lstStyle/>
-          <a:p>
-            <a:pPr indent="0" marL="0">
-              <a:buNone/>
-            </a:pPr>
-            <a:r>
-              <a:rPr lang="en-US" sz="950" dirty="0">
-                <a:solidFill>
-                  <a:srgbClr val="13233F"/>
-                </a:solidFill>
-                <a:latin typeface="Calibri" pitchFamily="34" charset="0"/>
-                <a:ea typeface="Calibri" pitchFamily="34" charset="-122"/>
-                <a:cs typeface="Calibri" pitchFamily="34" charset="-120"/>
-              </a:rPr>
-              <a:t>Sandbox / testing</a:t>
-            </a:r>
-            <a:endParaRPr lang="en-US" sz="950" dirty="0"/>
-          </a:p>
-        </p:txBody>
-      </p:sp>
-      <p:sp>
-        <p:nvSpPr>
-          <p:cNvPr id="28" name="Shape 26"/>
-          <p:cNvSpPr/>
-          <p:nvPr/>
-        </p:nvSpPr>
-        <p:spPr>
-          <a:xfrm>
-            <a:off x="2331720" y="4087368"/>
-            <a:ext cx="1783080" cy="146304"/>
-          </a:xfrm>
-          <a:prstGeom prst="rect">
+          <p:cNvPr id="14" name="Text 12"/>
+          <p:cNvSpPr/>
+          <p:nvPr/>
+        </p:nvSpPr>
+        <p:spPr>
+          <a:xfrm>
+            <a:off x="640080" y="3246120"/>
+            <a:ext cx="237744" cy="237744"/>
+          </a:xfrm>
+          <a:prstGeom prst="rect">
+            <a:avLst/>
+          </a:prstGeom>
+          <a:noFill/>
+          <a:ln/>
+        </p:spPr>
+        <p:txBody>
+          <a:bodyPr wrap="square" lIns="0" tIns="0" rIns="0" bIns="0" rtlCol="0" anchor="ctr"/>
+          <a:lstStyle/>
+          <a:p>
+            <a:pPr algn="ctr" indent="0" marL="0">
+              <a:buNone/>
+            </a:pPr>
+            <a:r>
+              <a:rPr lang="en-US" sz="1000" b="1" dirty="0">
+                <a:solidFill>
+                  <a:srgbClr val="FFFFFF"/>
+                </a:solidFill>
+                <a:latin typeface="Calibri" pitchFamily="34" charset="0"/>
+                <a:ea typeface="Calibri" pitchFamily="34" charset="-122"/>
+                <a:cs typeface="Calibri" pitchFamily="34" charset="-120"/>
+              </a:rPr>
+              <a:t>3</a:t>
+            </a:r>
+            <a:endParaRPr lang="en-US" sz="1000" dirty="0"/>
+          </a:p>
+        </p:txBody>
+      </p:sp>
+      <p:sp>
+        <p:nvSpPr>
+          <p:cNvPr id="15" name="Text 13"/>
+          <p:cNvSpPr/>
+          <p:nvPr/>
+        </p:nvSpPr>
+        <p:spPr>
+          <a:xfrm>
+            <a:off x="987552" y="3218688"/>
+            <a:ext cx="3429000" cy="384048"/>
+          </a:xfrm>
+          <a:prstGeom prst="rect">
+            <a:avLst/>
+          </a:prstGeom>
+          <a:noFill/>
+          <a:ln/>
+        </p:spPr>
+        <p:txBody>
+          <a:bodyPr wrap="square" lIns="0" tIns="0" rIns="0" bIns="0" rtlCol="0" anchor="ctr"/>
+          <a:lstStyle/>
+          <a:p>
+            <a:pPr indent="0" marL="0">
+              <a:buNone/>
+            </a:pPr>
+            <a:r>
+              <a:rPr lang="en-US" sz="1000" dirty="0">
+                <a:solidFill>
+                  <a:srgbClr val="5B6B86"/>
+                </a:solidFill>
+                <a:latin typeface="Calibri" pitchFamily="34" charset="0"/>
+                <a:ea typeface="Calibri" pitchFamily="34" charset="-122"/>
+                <a:cs typeface="Calibri" pitchFamily="34" charset="-120"/>
+              </a:rPr>
+              <a:t>× digital adoption 10.5% → 13.7% — only the remote / sub-deposit slice</a:t>
+            </a:r>
+            <a:endParaRPr lang="en-US" sz="1000" dirty="0"/>
+          </a:p>
+        </p:txBody>
+      </p:sp>
+      <p:sp>
+        <p:nvSpPr>
+          <p:cNvPr id="16" name="Shape 14"/>
+          <p:cNvSpPr/>
+          <p:nvPr/>
+        </p:nvSpPr>
+        <p:spPr>
+          <a:xfrm>
+            <a:off x="640080" y="3648456"/>
+            <a:ext cx="237744" cy="237744"/>
+          </a:xfrm>
+          <a:prstGeom prst="ellipse">
             <a:avLst/>
           </a:prstGeom>
           <a:solidFill>
-            <a:srgbClr val="D6E0F2"/>
+            <a:srgbClr val="175FF8"/>
           </a:solidFill>
           <a:ln/>
         </p:spPr>
       </p:sp>
       <p:sp>
         <p:nvSpPr>
-          <p:cNvPr id="29" name="Shape 27"/>
-          <p:cNvSpPr/>
-          <p:nvPr/>
-        </p:nvSpPr>
-        <p:spPr>
-          <a:xfrm>
-            <a:off x="2331720" y="4087368"/>
-            <a:ext cx="1248156" cy="146304"/>
-          </a:xfrm>
-          <a:prstGeom prst="rect">
+          <p:cNvPr id="17" name="Text 15"/>
+          <p:cNvSpPr/>
+          <p:nvPr/>
+        </p:nvSpPr>
+        <p:spPr>
+          <a:xfrm>
+            <a:off x="640080" y="3648456"/>
+            <a:ext cx="237744" cy="237744"/>
+          </a:xfrm>
+          <a:prstGeom prst="rect">
+            <a:avLst/>
+          </a:prstGeom>
+          <a:noFill/>
+          <a:ln/>
+        </p:spPr>
+        <p:txBody>
+          <a:bodyPr wrap="square" lIns="0" tIns="0" rIns="0" bIns="0" rtlCol="0" anchor="ctr"/>
+          <a:lstStyle/>
+          <a:p>
+            <a:pPr algn="ctr" indent="0" marL="0">
+              <a:buNone/>
+            </a:pPr>
+            <a:r>
+              <a:rPr lang="en-US" sz="1000" b="1" dirty="0">
+                <a:solidFill>
+                  <a:srgbClr val="FFFFFF"/>
+                </a:solidFill>
+                <a:latin typeface="Calibri" pitchFamily="34" charset="0"/>
+                <a:ea typeface="Calibri" pitchFamily="34" charset="-122"/>
+                <a:cs typeface="Calibri" pitchFamily="34" charset="-120"/>
+              </a:rPr>
+              <a:t>4</a:t>
+            </a:r>
+            <a:endParaRPr lang="en-US" sz="1000" dirty="0"/>
+          </a:p>
+        </p:txBody>
+      </p:sp>
+      <p:sp>
+        <p:nvSpPr>
+          <p:cNvPr id="18" name="Text 16"/>
+          <p:cNvSpPr/>
+          <p:nvPr/>
+        </p:nvSpPr>
+        <p:spPr>
+          <a:xfrm>
+            <a:off x="987552" y="3621024"/>
+            <a:ext cx="3429000" cy="384048"/>
+          </a:xfrm>
+          <a:prstGeom prst="rect">
+            <a:avLst/>
+          </a:prstGeom>
+          <a:noFill/>
+          <a:ln/>
+        </p:spPr>
+        <p:txBody>
+          <a:bodyPr wrap="square" lIns="0" tIns="0" rIns="0" bIns="0" rtlCol="0" anchor="ctr"/>
+          <a:lstStyle/>
+          <a:p>
+            <a:pPr indent="0" marL="0">
+              <a:buNone/>
+            </a:pPr>
+            <a:r>
+              <a:rPr lang="en-US" sz="1000" dirty="0">
+                <a:solidFill>
+                  <a:srgbClr val="5B6B86"/>
+                </a:solidFill>
+                <a:latin typeface="Calibri" pitchFamily="34" charset="0"/>
+                <a:ea typeface="Calibri" pitchFamily="34" charset="-122"/>
+                <a:cs typeface="Calibri" pitchFamily="34" charset="-120"/>
+              </a:rPr>
+              <a:t>× half-year go-live on every new cohort</a:t>
+            </a:r>
+            <a:endParaRPr lang="en-US" sz="1000" dirty="0"/>
+          </a:p>
+        </p:txBody>
+      </p:sp>
+      <p:sp>
+        <p:nvSpPr>
+          <p:cNvPr id="19" name="Shape 17"/>
+          <p:cNvSpPr/>
+          <p:nvPr/>
+        </p:nvSpPr>
+        <p:spPr>
+          <a:xfrm>
+            <a:off x="640080" y="4050792"/>
+            <a:ext cx="237744" cy="237744"/>
+          </a:xfrm>
+          <a:prstGeom prst="ellipse">
             <a:avLst/>
           </a:prstGeom>
           <a:solidFill>
@@ -19303,30 +19046,69 @@
       </p:sp>
       <p:sp>
         <p:nvSpPr>
-          <p:cNvPr id="30" name="Text 28"/>
-          <p:cNvSpPr/>
-          <p:nvPr/>
-        </p:nvSpPr>
-        <p:spPr>
-          <a:xfrm>
-            <a:off x="4206240" y="4041648"/>
-            <a:ext cx="457200" cy="256032"/>
-          </a:xfrm>
-          <a:prstGeom prst="rect">
-            <a:avLst/>
-          </a:prstGeom>
-          <a:noFill/>
-          <a:ln/>
-        </p:spPr>
-        <p:txBody>
-          <a:bodyPr wrap="square" lIns="0" tIns="0" rIns="0" bIns="0" rtlCol="0" anchor="ctr"/>
-          <a:lstStyle/>
-          <a:p>
-            <a:pPr indent="0" marL="0">
-              <a:buNone/>
-            </a:pPr>
-            <a:r>
-              <a:rPr lang="en-US" sz="950" b="1" dirty="0">
+          <p:cNvPr id="20" name="Text 18"/>
+          <p:cNvSpPr/>
+          <p:nvPr/>
+        </p:nvSpPr>
+        <p:spPr>
+          <a:xfrm>
+            <a:off x="640080" y="4050792"/>
+            <a:ext cx="237744" cy="237744"/>
+          </a:xfrm>
+          <a:prstGeom prst="rect">
+            <a:avLst/>
+          </a:prstGeom>
+          <a:noFill/>
+          <a:ln/>
+        </p:spPr>
+        <p:txBody>
+          <a:bodyPr wrap="square" lIns="0" tIns="0" rIns="0" bIns="0" rtlCol="0" anchor="ctr"/>
+          <a:lstStyle/>
+          <a:p>
+            <a:pPr algn="ctr" indent="0" marL="0">
+              <a:buNone/>
+            </a:pPr>
+            <a:r>
+              <a:rPr lang="en-US" sz="1000" b="1" dirty="0">
+                <a:solidFill>
+                  <a:srgbClr val="FFFFFF"/>
+                </a:solidFill>
+                <a:latin typeface="Calibri" pitchFamily="34" charset="0"/>
+                <a:ea typeface="Calibri" pitchFamily="34" charset="-122"/>
+                <a:cs typeface="Calibri" pitchFamily="34" charset="-120"/>
+              </a:rPr>
+              <a:t>5</a:t>
+            </a:r>
+            <a:endParaRPr lang="en-US" sz="1000" dirty="0"/>
+          </a:p>
+        </p:txBody>
+      </p:sp>
+      <p:sp>
+        <p:nvSpPr>
+          <p:cNvPr id="21" name="Text 19"/>
+          <p:cNvSpPr/>
+          <p:nvPr/>
+        </p:nvSpPr>
+        <p:spPr>
+          <a:xfrm>
+            <a:off x="987552" y="4023360"/>
+            <a:ext cx="3429000" cy="384048"/>
+          </a:xfrm>
+          <a:prstGeom prst="rect">
+            <a:avLst/>
+          </a:prstGeom>
+          <a:noFill/>
+          <a:ln/>
+        </p:spPr>
+        <p:txBody>
+          <a:bodyPr wrap="square" lIns="0" tIns="0" rIns="0" bIns="0" rtlCol="0" anchor="ctr"/>
+          <a:lstStyle/>
+          <a:p>
+            <a:pPr indent="0" marL="0">
+              <a:buNone/>
+            </a:pPr>
+            <a:r>
+              <a:rPr lang="en-US" sz="1000" b="1" dirty="0">
                 <a:solidFill>
                   <a:srgbClr val="13233F"/>
                 </a:solidFill>
@@ -19334,140 +19116,22 @@
                 <a:ea typeface="Calibri" pitchFamily="34" charset="-122"/>
                 <a:cs typeface="Calibri" pitchFamily="34" charset="-120"/>
               </a:rPr>
-              <a:t>3.5</a:t>
-            </a:r>
-            <a:endParaRPr lang="en-US" sz="950" dirty="0"/>
-          </a:p>
-        </p:txBody>
-      </p:sp>
-      <p:sp>
-        <p:nvSpPr>
-          <p:cNvPr id="31" name="Text 29"/>
-          <p:cNvSpPr/>
-          <p:nvPr/>
-        </p:nvSpPr>
-        <p:spPr>
-          <a:xfrm>
-            <a:off x="640080" y="4352544"/>
-            <a:ext cx="1645920" cy="256032"/>
-          </a:xfrm>
-          <a:prstGeom prst="rect">
-            <a:avLst/>
-          </a:prstGeom>
-          <a:noFill/>
-          <a:ln/>
-        </p:spPr>
-        <p:txBody>
-          <a:bodyPr wrap="square" lIns="0" tIns="0" rIns="0" bIns="0" rtlCol="0" anchor="ctr"/>
-          <a:lstStyle/>
-          <a:p>
-            <a:pPr indent="0" marL="0">
-              <a:buNone/>
-            </a:pPr>
-            <a:r>
-              <a:rPr lang="en-US" sz="950" dirty="0">
-                <a:solidFill>
-                  <a:srgbClr val="13233F"/>
-                </a:solidFill>
-                <a:latin typeface="Calibri" pitchFamily="34" charset="0"/>
-                <a:ea typeface="Calibri" pitchFamily="34" charset="-122"/>
-                <a:cs typeface="Calibri" pitchFamily="34" charset="-120"/>
-              </a:rPr>
-              <a:t>Onboarding speed</a:t>
-            </a:r>
-            <a:endParaRPr lang="en-US" sz="950" dirty="0"/>
-          </a:p>
-        </p:txBody>
-      </p:sp>
-      <p:sp>
-        <p:nvSpPr>
-          <p:cNvPr id="32" name="Shape 30"/>
-          <p:cNvSpPr/>
-          <p:nvPr/>
-        </p:nvSpPr>
-        <p:spPr>
-          <a:xfrm>
-            <a:off x="2331720" y="4398264"/>
-            <a:ext cx="1783080" cy="146304"/>
-          </a:xfrm>
-          <a:prstGeom prst="rect">
-            <a:avLst/>
-          </a:prstGeom>
-          <a:solidFill>
-            <a:srgbClr val="D6E0F2"/>
-          </a:solidFill>
-          <a:ln/>
-        </p:spPr>
-      </p:sp>
-      <p:sp>
-        <p:nvSpPr>
-          <p:cNvPr id="33" name="Shape 31"/>
-          <p:cNvSpPr/>
-          <p:nvPr/>
-        </p:nvSpPr>
-        <p:spPr>
-          <a:xfrm>
-            <a:off x="2331720" y="4398264"/>
-            <a:ext cx="1069848" cy="146304"/>
-          </a:xfrm>
-          <a:prstGeom prst="rect">
-            <a:avLst/>
-          </a:prstGeom>
-          <a:solidFill>
-            <a:srgbClr val="13BFA3"/>
-          </a:solidFill>
-          <a:ln/>
-        </p:spPr>
-      </p:sp>
-      <p:sp>
-        <p:nvSpPr>
-          <p:cNvPr id="34" name="Text 32"/>
-          <p:cNvSpPr/>
-          <p:nvPr/>
-        </p:nvSpPr>
-        <p:spPr>
-          <a:xfrm>
-            <a:off x="4206240" y="4352544"/>
-            <a:ext cx="457200" cy="256032"/>
-          </a:xfrm>
-          <a:prstGeom prst="rect">
-            <a:avLst/>
-          </a:prstGeom>
-          <a:noFill/>
-          <a:ln/>
-        </p:spPr>
-        <p:txBody>
-          <a:bodyPr wrap="square" lIns="0" tIns="0" rIns="0" bIns="0" rtlCol="0" anchor="ctr"/>
-          <a:lstStyle/>
-          <a:p>
-            <a:pPr indent="0" marL="0">
-              <a:buNone/>
-            </a:pPr>
-            <a:r>
-              <a:rPr lang="en-US" sz="950" b="1" dirty="0">
-                <a:solidFill>
-                  <a:srgbClr val="13233F"/>
-                </a:solidFill>
-                <a:latin typeface="Calibri" pitchFamily="34" charset="0"/>
-                <a:ea typeface="Calibri" pitchFamily="34" charset="-122"/>
-                <a:cs typeface="Calibri" pitchFamily="34" charset="-120"/>
-              </a:rPr>
-              <a:t>3.0</a:t>
-            </a:r>
-            <a:endParaRPr lang="en-US" sz="950" dirty="0"/>
-          </a:p>
-        </p:txBody>
-      </p:sp>
-      <p:sp>
-        <p:nvSpPr>
-          <p:cNvPr id="35" name="Shape 33"/>
-          <p:cNvSpPr/>
-          <p:nvPr/>
-        </p:nvSpPr>
-        <p:spPr>
-          <a:xfrm>
-            <a:off x="5074920" y="2395728"/>
-            <a:ext cx="3474720" cy="2212848"/>
+              <a:t>=  GMV settled onto Paynow rails</a:t>
+            </a:r>
+            <a:endParaRPr lang="en-US" sz="1000" dirty="0"/>
+          </a:p>
+        </p:txBody>
+      </p:sp>
+      <p:sp>
+        <p:nvSpPr>
+          <p:cNvPr id="22" name="Shape 20"/>
+          <p:cNvSpPr/>
+          <p:nvPr/>
+        </p:nvSpPr>
+        <p:spPr>
+          <a:xfrm>
+            <a:off x="4800600" y="2103120"/>
+            <a:ext cx="3749040" cy="2286000"/>
           </a:xfrm>
           <a:prstGeom prst="rect">
             <a:avLst/>
@@ -19480,14 +19144,14 @@
       </p:sp>
       <p:sp>
         <p:nvSpPr>
-          <p:cNvPr id="36" name="Shape 34"/>
-          <p:cNvSpPr/>
-          <p:nvPr/>
-        </p:nvSpPr>
-        <p:spPr>
-          <a:xfrm>
-            <a:off x="5074920" y="2395728"/>
-            <a:ext cx="73152" cy="2212848"/>
+          <p:cNvPr id="23" name="Shape 21"/>
+          <p:cNvSpPr/>
+          <p:nvPr/>
+        </p:nvSpPr>
+        <p:spPr>
+          <a:xfrm>
+            <a:off x="4800600" y="2103120"/>
+            <a:ext cx="73152" cy="2286000"/>
           </a:xfrm>
           <a:prstGeom prst="rect">
             <a:avLst/>
@@ -19500,14 +19164,14 @@
       </p:sp>
       <p:sp>
         <p:nvSpPr>
-          <p:cNvPr id="37" name="Text 35"/>
-          <p:cNvSpPr/>
-          <p:nvPr/>
-        </p:nvSpPr>
-        <p:spPr>
-          <a:xfrm>
-            <a:off x="5285232" y="2505456"/>
-            <a:ext cx="3108960" cy="228600"/>
+          <p:cNvPr id="24" name="Text 22"/>
+          <p:cNvSpPr/>
+          <p:nvPr/>
+        </p:nvSpPr>
+        <p:spPr>
+          <a:xfrm>
+            <a:off x="5029200" y="2194560"/>
+            <a:ext cx="3383280" cy="228600"/>
           </a:xfrm>
           <a:prstGeom prst="rect">
             <a:avLst/>
@@ -19531,7 +19195,7 @@
                 <a:ea typeface="Calibri" pitchFamily="34" charset="-122"/>
                 <a:cs typeface="Calibri" pitchFamily="34" charset="-120"/>
               </a:rPr>
-              <a:t>WHAT PAYNOW ALREADY WINS</a:t>
+              <a:t>YEAR 1, WORKED END-TO-END</a:t>
             </a:r>
             <a:endParaRPr lang="en-US" sz="950" dirty="0"/>
           </a:p>
@@ -19539,43 +19203,62 @@
       </p:sp>
       <p:sp>
         <p:nvSpPr>
-          <p:cNvPr id="38" name="Shape 36"/>
-          <p:cNvSpPr/>
-          <p:nvPr/>
-        </p:nvSpPr>
-        <p:spPr>
-          <a:xfrm>
-            <a:off x="5303520" y="2852928"/>
-            <a:ext cx="91440" cy="91440"/>
-          </a:xfrm>
-          <a:prstGeom prst="ellipse">
-            <a:avLst/>
-          </a:prstGeom>
-          <a:solidFill>
-            <a:srgbClr val="4CC3FF"/>
-          </a:solidFill>
-          <a:ln/>
-        </p:spPr>
-      </p:sp>
-      <p:sp>
-        <p:nvSpPr>
-          <p:cNvPr id="39" name="Text 37"/>
-          <p:cNvSpPr/>
-          <p:nvPr/>
-        </p:nvSpPr>
-        <p:spPr>
-          <a:xfrm>
-            <a:off x="5486400" y="2798064"/>
-            <a:ext cx="2926080" cy="347472"/>
-          </a:xfrm>
-          <a:prstGeom prst="rect">
-            <a:avLst/>
-          </a:prstGeom>
-          <a:noFill/>
-          <a:ln/>
-        </p:spPr>
-        <p:txBody>
-          <a:bodyPr wrap="square" lIns="0" tIns="0" rIns="0" bIns="0" rtlCol="0" anchor="t"/>
+          <p:cNvPr id="25" name="Text 23"/>
+          <p:cNvSpPr/>
+          <p:nvPr/>
+        </p:nvSpPr>
+        <p:spPr>
+          <a:xfrm>
+            <a:off x="5029200" y="2423160"/>
+            <a:ext cx="3383280" cy="219456"/>
+          </a:xfrm>
+          <a:prstGeom prst="rect">
+            <a:avLst/>
+          </a:prstGeom>
+          <a:noFill/>
+          <a:ln/>
+        </p:spPr>
+        <p:txBody>
+          <a:bodyPr wrap="square" lIns="0" tIns="0" rIns="0" bIns="0" rtlCol="0" anchor="ctr"/>
+          <a:lstStyle/>
+          <a:p>
+            <a:pPr indent="0" marL="0">
+              <a:buNone/>
+            </a:pPr>
+            <a:r>
+              <a:rPr lang="en-US" sz="900" i="1" dirty="0">
+                <a:solidFill>
+                  <a:srgbClr val="AEC2E0"/>
+                </a:solidFill>
+                <a:latin typeface="Calibri" pitchFamily="34" charset="0"/>
+                <a:ea typeface="Calibri" pitchFamily="34" charset="-122"/>
+                <a:cs typeface="Calibri" pitchFamily="34" charset="-120"/>
+              </a:rPr>
+              <a:t>3 anchor + 1 mid + 1 regional house (all new)</a:t>
+            </a:r>
+            <a:endParaRPr lang="en-US" sz="900" dirty="0"/>
+          </a:p>
+        </p:txBody>
+      </p:sp>
+      <p:sp>
+        <p:nvSpPr>
+          <p:cNvPr id="26" name="Text 24"/>
+          <p:cNvSpPr/>
+          <p:nvPr/>
+        </p:nvSpPr>
+        <p:spPr>
+          <a:xfrm>
+            <a:off x="5029200" y="2743200"/>
+            <a:ext cx="2331720" cy="329184"/>
+          </a:xfrm>
+          <a:prstGeom prst="rect">
+            <a:avLst/>
+          </a:prstGeom>
+          <a:noFill/>
+          <a:ln/>
+        </p:spPr>
+        <p:txBody>
+          <a:bodyPr wrap="square" lIns="0" tIns="0" rIns="0" bIns="0" rtlCol="0" anchor="ctr"/>
           <a:lstStyle/>
           <a:p>
             <a:pPr indent="0" marL="0">
@@ -19590,7 +19273,7 @@
                 <a:ea typeface="Calibri" pitchFamily="34" charset="-122"/>
                 <a:cs typeface="Calibri" pitchFamily="34" charset="-120"/>
               </a:rPr>
-              <a:t>Widest local coverage — EcoCash, OneMoney, InnBucks, O'mari, Zimswitch, Visa/MC</a:t>
+              <a:t>Full-year floor (3×$4.8M+$2.16M+$0.48M)</a:t>
             </a:r>
             <a:endParaRPr lang="en-US" sz="870" dirty="0"/>
           </a:p>
@@ -19598,43 +19281,62 @@
       </p:sp>
       <p:sp>
         <p:nvSpPr>
-          <p:cNvPr id="40" name="Shape 38"/>
-          <p:cNvSpPr/>
-          <p:nvPr/>
-        </p:nvSpPr>
-        <p:spPr>
-          <a:xfrm>
-            <a:off x="5303520" y="3209544"/>
-            <a:ext cx="91440" cy="91440"/>
-          </a:xfrm>
-          <a:prstGeom prst="ellipse">
-            <a:avLst/>
-          </a:prstGeom>
-          <a:solidFill>
-            <a:srgbClr val="4CC3FF"/>
-          </a:solidFill>
-          <a:ln/>
-        </p:spPr>
-      </p:sp>
-      <p:sp>
-        <p:nvSpPr>
-          <p:cNvPr id="41" name="Text 39"/>
-          <p:cNvSpPr/>
-          <p:nvPr/>
-        </p:nvSpPr>
-        <p:spPr>
-          <a:xfrm>
-            <a:off x="5486400" y="3154680"/>
-            <a:ext cx="2926080" cy="347472"/>
-          </a:xfrm>
-          <a:prstGeom prst="rect">
-            <a:avLst/>
-          </a:prstGeom>
-          <a:noFill/>
-          <a:ln/>
-        </p:spPr>
-        <p:txBody>
-          <a:bodyPr wrap="square" lIns="0" tIns="0" rIns="0" bIns="0" rtlCol="0" anchor="t"/>
+          <p:cNvPr id="27" name="Text 25"/>
+          <p:cNvSpPr/>
+          <p:nvPr/>
+        </p:nvSpPr>
+        <p:spPr>
+          <a:xfrm>
+            <a:off x="7196328" y="2743200"/>
+            <a:ext cx="1124712" cy="329184"/>
+          </a:xfrm>
+          <a:prstGeom prst="rect">
+            <a:avLst/>
+          </a:prstGeom>
+          <a:noFill/>
+          <a:ln/>
+        </p:spPr>
+        <p:txBody>
+          <a:bodyPr wrap="square" lIns="0" tIns="0" rIns="0" bIns="0" rtlCol="0" anchor="ctr"/>
+          <a:lstStyle/>
+          <a:p>
+            <a:pPr algn="r" indent="0" marL="0">
+              <a:buNone/>
+            </a:pPr>
+            <a:r>
+              <a:rPr lang="en-US" sz="1100" b="1" dirty="0">
+                <a:solidFill>
+                  <a:srgbClr val="EEF3FF"/>
+                </a:solidFill>
+                <a:latin typeface="Georgia" pitchFamily="34" charset="0"/>
+                <a:ea typeface="Georgia" pitchFamily="34" charset="-122"/>
+                <a:cs typeface="Georgia" pitchFamily="34" charset="-120"/>
+              </a:rPr>
+              <a:t>$17.04M</a:t>
+            </a:r>
+            <a:endParaRPr lang="en-US" sz="1100" dirty="0"/>
+          </a:p>
+        </p:txBody>
+      </p:sp>
+      <p:sp>
+        <p:nvSpPr>
+          <p:cNvPr id="28" name="Text 26"/>
+          <p:cNvSpPr/>
+          <p:nvPr/>
+        </p:nvSpPr>
+        <p:spPr>
+          <a:xfrm>
+            <a:off x="5029200" y="3118104"/>
+            <a:ext cx="2331720" cy="329184"/>
+          </a:xfrm>
+          <a:prstGeom prst="rect">
+            <a:avLst/>
+          </a:prstGeom>
+          <a:noFill/>
+          <a:ln/>
+        </p:spPr>
+        <p:txBody>
+          <a:bodyPr wrap="square" lIns="0" tIns="0" rIns="0" bIns="0" rtlCol="0" anchor="ctr"/>
           <a:lstStyle/>
           <a:p>
             <a:pPr indent="0" marL="0">
@@ -19649,7 +19351,7 @@
                 <a:ea typeface="Calibri" pitchFamily="34" charset="-122"/>
                 <a:cs typeface="Calibri" pitchFamily="34" charset="-120"/>
               </a:rPr>
-              <a:t>BuySafe escrow built in — Stripe charges extra; Paystack has none</a:t>
+              <a:t>Half-year (all new cohort)  ÷ 2</a:t>
             </a:r>
             <a:endParaRPr lang="en-US" sz="870" dirty="0"/>
           </a:p>
@@ -19657,43 +19359,140 @@
       </p:sp>
       <p:sp>
         <p:nvSpPr>
-          <p:cNvPr id="42" name="Shape 40"/>
-          <p:cNvSpPr/>
-          <p:nvPr/>
-        </p:nvSpPr>
-        <p:spPr>
-          <a:xfrm>
-            <a:off x="5303520" y="3566160"/>
-            <a:ext cx="91440" cy="91440"/>
-          </a:xfrm>
-          <a:prstGeom prst="ellipse">
-            <a:avLst/>
-          </a:prstGeom>
-          <a:solidFill>
-            <a:srgbClr val="4CC3FF"/>
-          </a:solidFill>
-          <a:ln/>
-        </p:spPr>
-      </p:sp>
-      <p:sp>
-        <p:nvSpPr>
-          <p:cNvPr id="43" name="Text 41"/>
-          <p:cNvSpPr/>
-          <p:nvPr/>
-        </p:nvSpPr>
-        <p:spPr>
-          <a:xfrm>
-            <a:off x="5486400" y="3511296"/>
-            <a:ext cx="2926080" cy="347472"/>
-          </a:xfrm>
-          <a:prstGeom prst="rect">
-            <a:avLst/>
-          </a:prstGeom>
-          <a:noFill/>
-          <a:ln/>
-        </p:spPr>
-        <p:txBody>
-          <a:bodyPr wrap="square" lIns="0" tIns="0" rIns="0" bIns="0" rtlCol="0" anchor="t"/>
+          <p:cNvPr id="29" name="Text 27"/>
+          <p:cNvSpPr/>
+          <p:nvPr/>
+        </p:nvSpPr>
+        <p:spPr>
+          <a:xfrm>
+            <a:off x="7196328" y="3118104"/>
+            <a:ext cx="1124712" cy="329184"/>
+          </a:xfrm>
+          <a:prstGeom prst="rect">
+            <a:avLst/>
+          </a:prstGeom>
+          <a:noFill/>
+          <a:ln/>
+        </p:spPr>
+        <p:txBody>
+          <a:bodyPr wrap="square" lIns="0" tIns="0" rIns="0" bIns="0" rtlCol="0" anchor="ctr"/>
+          <a:lstStyle/>
+          <a:p>
+            <a:pPr algn="r" indent="0" marL="0">
+              <a:buNone/>
+            </a:pPr>
+            <a:r>
+              <a:rPr lang="en-US" sz="1100" b="1" dirty="0">
+                <a:solidFill>
+                  <a:srgbClr val="EEF3FF"/>
+                </a:solidFill>
+                <a:latin typeface="Georgia" pitchFamily="34" charset="0"/>
+                <a:ea typeface="Georgia" pitchFamily="34" charset="-122"/>
+                <a:cs typeface="Georgia" pitchFamily="34" charset="-120"/>
+              </a:rPr>
+              <a:t>$8.52M</a:t>
+            </a:r>
+            <a:endParaRPr lang="en-US" sz="1100" dirty="0"/>
+          </a:p>
+        </p:txBody>
+      </p:sp>
+      <p:sp>
+        <p:nvSpPr>
+          <p:cNvPr id="30" name="Text 28"/>
+          <p:cNvSpPr/>
+          <p:nvPr/>
+        </p:nvSpPr>
+        <p:spPr>
+          <a:xfrm>
+            <a:off x="5029200" y="3493008"/>
+            <a:ext cx="2331720" cy="329184"/>
+          </a:xfrm>
+          <a:prstGeom prst="rect">
+            <a:avLst/>
+          </a:prstGeom>
+          <a:noFill/>
+          <a:ln/>
+        </p:spPr>
+        <p:txBody>
+          <a:bodyPr wrap="square" lIns="0" tIns="0" rIns="0" bIns="0" rtlCol="0" anchor="ctr"/>
+          <a:lstStyle/>
+          <a:p>
+            <a:pPr indent="0" marL="0">
+              <a:buNone/>
+            </a:pPr>
+            <a:r>
+              <a:rPr lang="en-US" sz="870" b="1" dirty="0">
+                <a:solidFill>
+                  <a:srgbClr val="4CC3FF"/>
+                </a:solidFill>
+                <a:latin typeface="Calibri" pitchFamily="34" charset="0"/>
+                <a:ea typeface="Calibri" pitchFamily="34" charset="-122"/>
+                <a:cs typeface="Calibri" pitchFamily="34" charset="-120"/>
+              </a:rPr>
+              <a:t>× digital adoption  10.5%</a:t>
+            </a:r>
+            <a:endParaRPr lang="en-US" sz="870" dirty="0"/>
+          </a:p>
+        </p:txBody>
+      </p:sp>
+      <p:sp>
+        <p:nvSpPr>
+          <p:cNvPr id="31" name="Text 29"/>
+          <p:cNvSpPr/>
+          <p:nvPr/>
+        </p:nvSpPr>
+        <p:spPr>
+          <a:xfrm>
+            <a:off x="7196328" y="3493008"/>
+            <a:ext cx="1124712" cy="329184"/>
+          </a:xfrm>
+          <a:prstGeom prst="rect">
+            <a:avLst/>
+          </a:prstGeom>
+          <a:noFill/>
+          <a:ln/>
+        </p:spPr>
+        <p:txBody>
+          <a:bodyPr wrap="square" lIns="0" tIns="0" rIns="0" bIns="0" rtlCol="0" anchor="ctr"/>
+          <a:lstStyle/>
+          <a:p>
+            <a:pPr algn="r" indent="0" marL="0">
+              <a:buNone/>
+            </a:pPr>
+            <a:r>
+              <a:rPr lang="en-US" sz="1300" b="1" dirty="0">
+                <a:solidFill>
+                  <a:srgbClr val="4CC3FF"/>
+                </a:solidFill>
+                <a:latin typeface="Georgia" pitchFamily="34" charset="0"/>
+                <a:ea typeface="Georgia" pitchFamily="34" charset="-122"/>
+                <a:cs typeface="Georgia" pitchFamily="34" charset="-120"/>
+              </a:rPr>
+              <a:t>$894,600</a:t>
+            </a:r>
+            <a:endParaRPr lang="en-US" sz="1300" dirty="0"/>
+          </a:p>
+        </p:txBody>
+      </p:sp>
+      <p:sp>
+        <p:nvSpPr>
+          <p:cNvPr id="32" name="Text 30"/>
+          <p:cNvSpPr/>
+          <p:nvPr/>
+        </p:nvSpPr>
+        <p:spPr>
+          <a:xfrm>
+            <a:off x="5029200" y="3867912"/>
+            <a:ext cx="2331720" cy="329184"/>
+          </a:xfrm>
+          <a:prstGeom prst="rect">
+            <a:avLst/>
+          </a:prstGeom>
+          <a:noFill/>
+          <a:ln/>
+        </p:spPr>
+        <p:txBody>
+          <a:bodyPr wrap="square" lIns="0" tIns="0" rIns="0" bIns="0" rtlCol="0" anchor="ctr"/>
           <a:lstStyle/>
           <a:p>
             <a:pPr indent="0" marL="0">
@@ -19708,7 +19507,7 @@
                 <a:ea typeface="Calibri" pitchFamily="34" charset="-122"/>
                 <a:cs typeface="Calibri" pitchFamily="34" charset="-120"/>
               </a:rPr>
-              <a:t>Realistic test mode — success / delayed / cancelled / insufficient</a:t>
+              <a:t>Cross-check:  ÷ $650 ticket</a:t>
             </a:r>
             <a:endParaRPr lang="en-US" sz="870" dirty="0"/>
           </a:p>
@@ -19716,50 +19515,69 @@
       </p:sp>
       <p:sp>
         <p:nvSpPr>
-          <p:cNvPr id="44" name="Shape 42"/>
-          <p:cNvSpPr/>
-          <p:nvPr/>
-        </p:nvSpPr>
-        <p:spPr>
-          <a:xfrm>
-            <a:off x="5303520" y="3922776"/>
-            <a:ext cx="91440" cy="91440"/>
-          </a:xfrm>
-          <a:prstGeom prst="ellipse">
-            <a:avLst/>
-          </a:prstGeom>
-          <a:solidFill>
-            <a:srgbClr val="4CC3FF"/>
-          </a:solidFill>
-          <a:ln/>
-        </p:spPr>
-      </p:sp>
-      <p:sp>
-        <p:nvSpPr>
-          <p:cNvPr id="45" name="Text 43"/>
-          <p:cNvSpPr/>
-          <p:nvPr/>
-        </p:nvSpPr>
-        <p:spPr>
-          <a:xfrm>
-            <a:off x="5486400" y="3867912"/>
-            <a:ext cx="2926080" cy="347472"/>
-          </a:xfrm>
-          <a:prstGeom prst="rect">
-            <a:avLst/>
-          </a:prstGeom>
-          <a:noFill/>
-          <a:ln/>
-        </p:spPr>
-        <p:txBody>
-          <a:bodyPr wrap="square" lIns="0" tIns="0" rIns="0" bIns="0" rtlCol="0" anchor="t"/>
-          <a:lstStyle/>
-          <a:p>
-            <a:pPr indent="0" marL="0">
-              <a:buNone/>
-            </a:pPr>
-            <a:r>
-              <a:rPr lang="en-US" sz="870" dirty="0">
+          <p:cNvPr id="33" name="Text 31"/>
+          <p:cNvSpPr/>
+          <p:nvPr/>
+        </p:nvSpPr>
+        <p:spPr>
+          <a:xfrm>
+            <a:off x="7196328" y="3867912"/>
+            <a:ext cx="1124712" cy="329184"/>
+          </a:xfrm>
+          <a:prstGeom prst="rect">
+            <a:avLst/>
+          </a:prstGeom>
+          <a:noFill/>
+          <a:ln/>
+        </p:spPr>
+        <p:txBody>
+          <a:bodyPr wrap="square" lIns="0" tIns="0" rIns="0" bIns="0" rtlCol="0" anchor="ctr"/>
+          <a:lstStyle/>
+          <a:p>
+            <a:pPr algn="r" indent="0" marL="0">
+              <a:buNone/>
+            </a:pPr>
+            <a:r>
+              <a:rPr lang="en-US" sz="1100" b="1" dirty="0">
+                <a:solidFill>
+                  <a:srgbClr val="EEF3FF"/>
+                </a:solidFill>
+                <a:latin typeface="Georgia" pitchFamily="34" charset="0"/>
+                <a:ea typeface="Georgia" pitchFamily="34" charset="-122"/>
+                <a:cs typeface="Georgia" pitchFamily="34" charset="-120"/>
+              </a:rPr>
+              <a:t>1,376 tx ✓</a:t>
+            </a:r>
+            <a:endParaRPr lang="en-US" sz="1100" dirty="0"/>
+          </a:p>
+        </p:txBody>
+      </p:sp>
+      <p:sp>
+        <p:nvSpPr>
+          <p:cNvPr id="34" name="Text 32"/>
+          <p:cNvSpPr/>
+          <p:nvPr/>
+        </p:nvSpPr>
+        <p:spPr>
+          <a:xfrm>
+            <a:off x="5029200" y="4078224"/>
+            <a:ext cx="3383280" cy="237744"/>
+          </a:xfrm>
+          <a:prstGeom prst="rect">
+            <a:avLst/>
+          </a:prstGeom>
+          <a:noFill/>
+          <a:ln/>
+        </p:spPr>
+        <p:txBody>
+          <a:bodyPr wrap="square" lIns="0" tIns="0" rIns="0" bIns="0" rtlCol="0" anchor="ctr"/>
+          <a:lstStyle/>
+          <a:p>
+            <a:pPr indent="0" marL="0">
+              <a:buNone/>
+            </a:pPr>
+            <a:r>
+              <a:rPr lang="en-US" sz="870" i="1" dirty="0">
                 <a:solidFill>
                   <a:srgbClr val="AEC2E0"/>
                 </a:solidFill>
@@ -19767,7 +19585,7 @@
                 <a:ea typeface="Calibri" pitchFamily="34" charset="-122"/>
                 <a:cs typeface="Calibri" pitchFamily="34" charset="-120"/>
               </a:rPr>
-              <a:t>BillPay Vendor API is genuinely well-designed (AUTH→PAY, JSON)</a:t>
+              <a:t>Same drivers × 5 years  →  US$19.5M cumulative onto Paynow.</a:t>
             </a:r>
             <a:endParaRPr lang="en-US" sz="870" dirty="0"/>
           </a:p>
@@ -19775,66 +19593,60 @@
       </p:sp>
       <p:sp>
         <p:nvSpPr>
-          <p:cNvPr id="46" name="Shape 44"/>
-          <p:cNvSpPr/>
-          <p:nvPr/>
-        </p:nvSpPr>
-        <p:spPr>
-          <a:xfrm>
-            <a:off x="5303520" y="4279392"/>
-            <a:ext cx="91440" cy="91440"/>
-          </a:xfrm>
-          <a:prstGeom prst="ellipse">
-            <a:avLst/>
-          </a:prstGeom>
-          <a:solidFill>
-            <a:srgbClr val="4CC3FF"/>
-          </a:solidFill>
-          <a:ln/>
-        </p:spPr>
-      </p:sp>
-      <p:sp>
-        <p:nvSpPr>
-          <p:cNvPr id="47" name="Text 45"/>
-          <p:cNvSpPr/>
-          <p:nvPr/>
-        </p:nvSpPr>
-        <p:spPr>
-          <a:xfrm>
-            <a:off x="5486400" y="4224528"/>
-            <a:ext cx="2926080" cy="347472"/>
-          </a:xfrm>
-          <a:prstGeom prst="rect">
-            <a:avLst/>
-          </a:prstGeom>
-          <a:noFill/>
-          <a:ln/>
-        </p:spPr>
-        <p:txBody>
-          <a:bodyPr wrap="square" lIns="0" tIns="0" rIns="0" bIns="0" rtlCol="0" anchor="t"/>
-          <a:lstStyle/>
-          <a:p>
-            <a:pPr indent="0" marL="0">
-              <a:buNone/>
-            </a:pPr>
-            <a:r>
-              <a:rPr lang="en-US" sz="870" dirty="0">
-                <a:solidFill>
-                  <a:srgbClr val="AEC2E0"/>
-                </a:solidFill>
-                <a:latin typeface="Calibri" pitchFamily="34" charset="0"/>
-                <a:ea typeface="Calibri" pitchFamily="34" charset="-122"/>
-                <a:cs typeface="Calibri" pitchFamily="34" charset="-120"/>
-              </a:rPr>
-              <a:t>No minimum fees — works for micro-transactions</a:t>
-            </a:r>
-            <a:endParaRPr lang="en-US" sz="870" dirty="0"/>
-          </a:p>
-        </p:txBody>
-      </p:sp>
-      <p:sp>
-        <p:nvSpPr>
-          <p:cNvPr id="48" name="Text 46"/>
+          <p:cNvPr id="35" name="Text 33"/>
+          <p:cNvSpPr/>
+          <p:nvPr/>
+        </p:nvSpPr>
+        <p:spPr>
+          <a:xfrm>
+            <a:off x="640080" y="4553712"/>
+            <a:ext cx="7955280" cy="256032"/>
+          </a:xfrm>
+          <a:prstGeom prst="rect">
+            <a:avLst/>
+          </a:prstGeom>
+          <a:noFill/>
+          <a:ln/>
+        </p:spPr>
+        <p:txBody>
+          <a:bodyPr wrap="square" lIns="0" tIns="0" rIns="0" bIns="0" rtlCol="0" anchor="ctr"/>
+          <a:lstStyle/>
+          <a:p>
+            <a:pPr indent="0" marL="0">
+              <a:buNone/>
+            </a:pPr>
+            <a:r>
+              <a:rPr lang="en-US" sz="900" b="1" i="1" dirty="0">
+                <a:solidFill>
+                  <a:srgbClr val="175FF8"/>
+                </a:solidFill>
+                <a:latin typeface="Calibri" pitchFamily="34" charset="0"/>
+                <a:ea typeface="Calibri" pitchFamily="34" charset="-122"/>
+                <a:cs typeface="Calibri" pitchFamily="34" charset="-120"/>
+              </a:rPr>
+              <a:t>Conservative by construction:  </a:t>
+            </a:r>
+            <a:pPr indent="0" marL="0">
+              <a:buNone/>
+            </a:pPr>
+            <a:r>
+              <a:rPr lang="en-US" sz="900" i="1" dirty="0">
+                <a:solidFill>
+                  <a:srgbClr val="5B6B86"/>
+                </a:solidFill>
+                <a:latin typeface="Calibri" pitchFamily="34" charset="0"/>
+                <a:ea typeface="Calibri" pitchFamily="34" charset="-122"/>
+                <a:cs typeface="Calibri" pitchFamily="34" charset="-120"/>
+              </a:rPr>
+              <a:t>1/3 of the market · adoption held &lt;14% · US$650 ticket skewed low · we model only the sub-deposit slice cash excludes. The one stretch — landing 3 of ~8 anchors in Year 1.</a:t>
+            </a:r>
+            <a:endParaRPr lang="en-US" sz="900" dirty="0"/>
+          </a:p>
+        </p:txBody>
+      </p:sp>
+      <p:sp>
+        <p:nvSpPr>
+          <p:cNvPr id="36" name="Text 34"/>
           <p:cNvSpPr/>
           <p:nvPr/>
         </p:nvSpPr>
@@ -19873,7 +19685,7 @@
       </p:sp>
       <p:sp>
         <p:nvSpPr>
-          <p:cNvPr id="49" name="Text 47"/>
+          <p:cNvPr id="37" name="Text 35"/>
           <p:cNvSpPr/>
           <p:nvPr/>
         </p:nvSpPr>
@@ -19904,7 +19716,7 @@
                 <a:ea typeface="Calibri" pitchFamily="34" charset="-122"/>
                 <a:cs typeface="Calibri" pitchFamily="34" charset="-120"/>
               </a:rPr>
-              <a:t>26 / 29</a:t>
+              <a:t>26 / 31</a:t>
             </a:r>
             <a:endParaRPr lang="en-US" sz="800" dirty="0"/>
           </a:p>
@@ -19995,7 +19807,7 @@
                 <a:ea typeface="Calibri" pitchFamily="34" charset="-122"/>
                 <a:cs typeface="Calibri" pitchFamily="34" charset="-120"/>
               </a:rPr>
-              <a:t>DEVELOPER EXPERIENCE BENCHMARK · SOLUTIONS</a:t>
+              <a:t>THE VALUE PROPOSITION FOR PAYNOW</a:t>
             </a:r>
             <a:endParaRPr lang="en-US" sz="1100" dirty="0"/>
           </a:p>
@@ -20026,7 +19838,7 @@
               <a:buNone/>
             </a:pPr>
             <a:r>
-              <a:rPr lang="en-US" sz="3100" b="1" dirty="0">
+              <a:rPr lang="en-US" sz="2800" b="1" dirty="0">
                 <a:solidFill>
                   <a:srgbClr val="13233F"/>
                 </a:solidFill>
@@ -20034,9 +19846,9 @@
                 <a:ea typeface="Georgia" pitchFamily="34" charset="-122"/>
                 <a:cs typeface="Georgia" pitchFamily="34" charset="-120"/>
               </a:rPr>
-              <a:t>Nine recommendations, ranked by severity.</a:t>
-            </a:r>
-            <a:endParaRPr lang="en-US" sz="3100" dirty="0"/>
+              <a:t>Why ZimLivestock is a win for Paynow.</a:t>
+            </a:r>
+            <a:endParaRPr lang="en-US" sz="2800" dirty="0"/>
           </a:p>
         </p:txBody>
       </p:sp>
@@ -20048,7 +19860,7 @@
         </p:nvSpPr>
         <p:spPr>
           <a:xfrm>
-            <a:off x="640080" y="1627632"/>
+            <a:off x="640080" y="1783080"/>
             <a:ext cx="7955280" cy="548640"/>
           </a:xfrm>
           <a:prstGeom prst="rect">
@@ -20073,7 +19885,7 @@
                 <a:ea typeface="Calibri" pitchFamily="34" charset="-122"/>
                 <a:cs typeface="Calibri" pitchFamily="34" charset="-120"/>
               </a:rPr>
-              <a:t>Every issue I hit became a concrete, defensible fix. The report is a gift to whoever builds on Paynow next.</a:t>
+              <a:t>Our take is thin by design. The value to Paynow is the GMV, the vertical and the network it activates — not the 0.75% we charge the house.</a:t>
             </a:r>
             <a:endParaRPr lang="en-US" sz="1300" dirty="0"/>
           </a:p>
@@ -20087,8 +19899,8 @@
         </p:nvSpPr>
         <p:spPr>
           <a:xfrm>
-            <a:off x="640080" y="2176272"/>
-            <a:ext cx="7863840" cy="512064"/>
+            <a:off x="640080" y="2286000"/>
+            <a:ext cx="1874520" cy="2011680"/>
           </a:xfrm>
           <a:prstGeom prst="rect">
             <a:avLst/>
@@ -20098,9 +19910,9 @@
           </a:solidFill>
           <a:ln/>
           <a:effectLst>
-            <a:outerShdw sx="100000" sy="100000" kx="0" ky="0" algn="bl" rotWithShape="0" blurRad="63500" dist="12700" dir="5400000">
+            <a:outerShdw sx="100000" sy="100000" kx="0" ky="0" algn="bl" rotWithShape="0" blurRad="101600" dist="25400" dir="5400000">
               <a:srgbClr val="000000">
-                <a:alpha val="7000"/>
+                <a:alpha val="8000"/>
               </a:srgbClr>
             </a:outerShdw>
           </a:effectLst>
@@ -20114,14 +19926,14 @@
         </p:nvSpPr>
         <p:spPr>
           <a:xfrm>
-            <a:off x="777240" y="2286000"/>
-            <a:ext cx="1097280" cy="329184"/>
+            <a:off x="640080" y="2286000"/>
+            <a:ext cx="54864" cy="2011680"/>
           </a:xfrm>
           <a:prstGeom prst="rect">
             <a:avLst/>
           </a:prstGeom>
           <a:solidFill>
-            <a:srgbClr val="E5484D"/>
+            <a:srgbClr val="175FF8"/>
           </a:solidFill>
           <a:ln/>
         </p:spPr>
@@ -20134,34 +19946,34 @@
         </p:nvSpPr>
         <p:spPr>
           <a:xfrm>
-            <a:off x="777240" y="2286000"/>
-            <a:ext cx="1097280" cy="329184"/>
-          </a:xfrm>
-          <a:prstGeom prst="rect">
-            <a:avLst/>
-          </a:prstGeom>
-          <a:noFill/>
-          <a:ln/>
-        </p:spPr>
-        <p:txBody>
-          <a:bodyPr wrap="square" lIns="0" tIns="0" rIns="0" bIns="0" rtlCol="0" anchor="ctr"/>
-          <a:lstStyle/>
-          <a:p>
-            <a:pPr algn="ctr" indent="0" marL="0">
-              <a:buNone/>
-            </a:pPr>
-            <a:r>
-              <a:rPr lang="en-US" sz="900" b="1" spc="100" kern="0" dirty="0">
-                <a:solidFill>
-                  <a:srgbClr val="FFFFFF"/>
-                </a:solidFill>
-                <a:latin typeface="Calibri" pitchFamily="34" charset="0"/>
-                <a:ea typeface="Calibri" pitchFamily="34" charset="-122"/>
-                <a:cs typeface="Calibri" pitchFamily="34" charset="-120"/>
-              </a:rPr>
-              <a:t>CRITICAL · 1</a:t>
-            </a:r>
-            <a:endParaRPr lang="en-US" sz="900" dirty="0"/>
+            <a:off x="822960" y="2395728"/>
+            <a:ext cx="1645920" cy="566928"/>
+          </a:xfrm>
+          <a:prstGeom prst="rect">
+            <a:avLst/>
+          </a:prstGeom>
+          <a:noFill/>
+          <a:ln/>
+        </p:spPr>
+        <p:txBody>
+          <a:bodyPr wrap="square" lIns="0" tIns="0" rIns="0" bIns="0" rtlCol="0" anchor="ctr"/>
+          <a:lstStyle/>
+          <a:p>
+            <a:pPr indent="0" marL="0">
+              <a:buNone/>
+            </a:pPr>
+            <a:r>
+              <a:rPr lang="en-US" sz="2600" b="1" dirty="0">
+                <a:solidFill>
+                  <a:srgbClr val="175FF8"/>
+                </a:solidFill>
+                <a:latin typeface="Georgia" pitchFamily="34" charset="0"/>
+                <a:ea typeface="Georgia" pitchFamily="34" charset="-122"/>
+                <a:cs typeface="Georgia" pitchFamily="34" charset="-120"/>
+              </a:rPr>
+              <a:t>$19.5M</a:t>
+            </a:r>
+            <a:endParaRPr lang="en-US" sz="2600" dirty="0"/>
           </a:p>
         </p:txBody>
       </p:sp>
@@ -20173,8 +19985,8 @@
         </p:nvSpPr>
         <p:spPr>
           <a:xfrm>
-            <a:off x="2057400" y="2176272"/>
-            <a:ext cx="6309360" cy="512064"/>
+            <a:off x="822960" y="2980944"/>
+            <a:ext cx="1645920" cy="438912"/>
           </a:xfrm>
           <a:prstGeom prst="rect">
             <a:avLst/>
@@ -20198,13 +20010,38 @@
                 <a:ea typeface="Calibri" pitchFamily="34" charset="-122"/>
                 <a:cs typeface="Calibri" pitchFamily="34" charset="-120"/>
               </a:rPr>
-              <a:t>Move the API off the bot-walled www domain — host it on api.paynow.co.zw with no Cloudflare challenge. </a:t>
-            </a:r>
-            <a:pPr indent="0" marL="0">
-              <a:buNone/>
-            </a:pPr>
-            <a:r>
-              <a:rPr lang="en-US" sz="1000" dirty="0">
+              <a:t>GMV onto your rails (5yr)</a:t>
+            </a:r>
+            <a:endParaRPr lang="en-US" sz="1000" dirty="0"/>
+          </a:p>
+        </p:txBody>
+      </p:sp>
+      <p:sp>
+        <p:nvSpPr>
+          <p:cNvPr id="10" name="Text 8"/>
+          <p:cNvSpPr/>
+          <p:nvPr/>
+        </p:nvSpPr>
+        <p:spPr>
+          <a:xfrm>
+            <a:off x="822960" y="3456432"/>
+            <a:ext cx="1645920" cy="868680"/>
+          </a:xfrm>
+          <a:prstGeom prst="rect">
+            <a:avLst/>
+          </a:prstGeom>
+          <a:noFill/>
+          <a:ln/>
+        </p:spPr>
+        <p:txBody>
+          <a:bodyPr wrap="square" lIns="0" tIns="0" rIns="0" bIns="0" rtlCol="0" anchor="ctr"/>
+          <a:lstStyle/>
+          <a:p>
+            <a:pPr indent="0" marL="0">
+              <a:buNone/>
+            </a:pPr>
+            <a:r>
+              <a:rPr lang="en-US" sz="950" dirty="0">
                 <a:solidFill>
                   <a:srgbClr val="5B6B86"/>
                 </a:solidFill>
@@ -20212,22 +20049,22 @@
                 <a:ea typeface="Calibri" pitchFamily="34" charset="-122"/>
                 <a:cs typeface="Calibri" pitchFamily="34" charset="-120"/>
               </a:rPr>
-              <a:t>This is exactly why the live demo routes through a browser-relay.</a:t>
-            </a:r>
-            <a:endParaRPr lang="en-US" sz="1000" dirty="0"/>
-          </a:p>
-        </p:txBody>
-      </p:sp>
-      <p:sp>
-        <p:nvSpPr>
-          <p:cNvPr id="10" name="Shape 8"/>
-          <p:cNvSpPr/>
-          <p:nvPr/>
-        </p:nvSpPr>
-        <p:spPr>
-          <a:xfrm>
-            <a:off x="640080" y="2761488"/>
-            <a:ext cx="7863840" cy="512064"/>
+              <a:t>Livestock settlement routed through Core Express Checkout, BillPay, EcoCash USSD &amp; merchant transfers — volume that is cash today.</a:t>
+            </a:r>
+            <a:endParaRPr lang="en-US" sz="950" dirty="0"/>
+          </a:p>
+        </p:txBody>
+      </p:sp>
+      <p:sp>
+        <p:nvSpPr>
+          <p:cNvPr id="11" name="Shape 9"/>
+          <p:cNvSpPr/>
+          <p:nvPr/>
+        </p:nvSpPr>
+        <p:spPr>
+          <a:xfrm>
+            <a:off x="2651760" y="2286000"/>
+            <a:ext cx="1874520" cy="2011680"/>
           </a:xfrm>
           <a:prstGeom prst="rect">
             <a:avLst/>
@@ -20237,9 +20074,9 @@
           </a:solidFill>
           <a:ln/>
           <a:effectLst>
-            <a:outerShdw sx="100000" sy="100000" kx="0" ky="0" algn="bl" rotWithShape="0" blurRad="63500" dist="12700" dir="5400000">
+            <a:outerShdw sx="100000" sy="100000" kx="0" ky="0" algn="bl" rotWithShape="0" blurRad="101600" dist="25400" dir="5400000">
               <a:srgbClr val="000000">
-                <a:alpha val="7000"/>
+                <a:alpha val="8000"/>
               </a:srgbClr>
             </a:outerShdw>
           </a:effectLst>
@@ -20247,14 +20084,14 @@
       </p:sp>
       <p:sp>
         <p:nvSpPr>
-          <p:cNvPr id="11" name="Shape 9"/>
-          <p:cNvSpPr/>
-          <p:nvPr/>
-        </p:nvSpPr>
-        <p:spPr>
-          <a:xfrm>
-            <a:off x="777240" y="2871216"/>
-            <a:ext cx="1097280" cy="329184"/>
+          <p:cNvPr id="12" name="Shape 10"/>
+          <p:cNvSpPr/>
+          <p:nvPr/>
+        </p:nvSpPr>
+        <p:spPr>
+          <a:xfrm>
+            <a:off x="2651760" y="2286000"/>
+            <a:ext cx="54864" cy="2011680"/>
           </a:xfrm>
           <a:prstGeom prst="rect">
             <a:avLst/>
@@ -20267,69 +20104,69 @@
       </p:sp>
       <p:sp>
         <p:nvSpPr>
-          <p:cNvPr id="12" name="Text 10"/>
-          <p:cNvSpPr/>
-          <p:nvPr/>
-        </p:nvSpPr>
-        <p:spPr>
-          <a:xfrm>
-            <a:off x="777240" y="2871216"/>
-            <a:ext cx="1097280" cy="329184"/>
-          </a:xfrm>
-          <a:prstGeom prst="rect">
-            <a:avLst/>
-          </a:prstGeom>
-          <a:noFill/>
-          <a:ln/>
-        </p:spPr>
-        <p:txBody>
-          <a:bodyPr wrap="square" lIns="0" tIns="0" rIns="0" bIns="0" rtlCol="0" anchor="ctr"/>
-          <a:lstStyle/>
-          <a:p>
-            <a:pPr algn="ctr" indent="0" marL="0">
-              <a:buNone/>
-            </a:pPr>
-            <a:r>
-              <a:rPr lang="en-US" sz="900" b="1" spc="100" kern="0" dirty="0">
-                <a:solidFill>
-                  <a:srgbClr val="FFFFFF"/>
-                </a:solidFill>
-                <a:latin typeface="Calibri" pitchFamily="34" charset="0"/>
-                <a:ea typeface="Calibri" pitchFamily="34" charset="-122"/>
-                <a:cs typeface="Calibri" pitchFamily="34" charset="-120"/>
-              </a:rPr>
-              <a:t>HIGH · 3</a:t>
-            </a:r>
-            <a:endParaRPr lang="en-US" sz="900" dirty="0"/>
-          </a:p>
-        </p:txBody>
-      </p:sp>
-      <p:sp>
-        <p:nvSpPr>
           <p:cNvPr id="13" name="Text 11"/>
           <p:cNvSpPr/>
           <p:nvPr/>
         </p:nvSpPr>
         <p:spPr>
           <a:xfrm>
-            <a:off x="2057400" y="2761488"/>
-            <a:ext cx="6309360" cy="512064"/>
-          </a:xfrm>
-          <a:prstGeom prst="rect">
-            <a:avLst/>
-          </a:prstGeom>
-          <a:noFill/>
-          <a:ln/>
-        </p:spPr>
-        <p:txBody>
-          <a:bodyPr wrap="square" lIns="0" tIns="0" rIns="0" bIns="0" rtlCol="0" anchor="ctr"/>
-          <a:lstStyle/>
-          <a:p>
-            <a:pPr indent="0" marL="0">
-              <a:buNone/>
-            </a:pPr>
-            <a:r>
-              <a:rPr lang="en-US" sz="1000" dirty="0">
+            <a:off x="2834640" y="2395728"/>
+            <a:ext cx="1645920" cy="566928"/>
+          </a:xfrm>
+          <a:prstGeom prst="rect">
+            <a:avLst/>
+          </a:prstGeom>
+          <a:noFill/>
+          <a:ln/>
+        </p:spPr>
+        <p:txBody>
+          <a:bodyPr wrap="square" lIns="0" tIns="0" rIns="0" bIns="0" rtlCol="0" anchor="ctr"/>
+          <a:lstStyle/>
+          <a:p>
+            <a:pPr indent="0" marL="0">
+              <a:buNone/>
+            </a:pPr>
+            <a:r>
+              <a:rPr lang="en-US" sz="2600" b="1" dirty="0">
+                <a:solidFill>
+                  <a:srgbClr val="175FF8"/>
+                </a:solidFill>
+                <a:latin typeface="Georgia" pitchFamily="34" charset="0"/>
+                <a:ea typeface="Georgia" pitchFamily="34" charset="-122"/>
+                <a:cs typeface="Georgia" pitchFamily="34" charset="-120"/>
+              </a:rPr>
+              <a:t>6</a:t>
+            </a:r>
+            <a:endParaRPr lang="en-US" sz="2600" dirty="0"/>
+          </a:p>
+        </p:txBody>
+      </p:sp>
+      <p:sp>
+        <p:nvSpPr>
+          <p:cNvPr id="14" name="Text 12"/>
+          <p:cNvSpPr/>
+          <p:nvPr/>
+        </p:nvSpPr>
+        <p:spPr>
+          <a:xfrm>
+            <a:off x="2834640" y="2980944"/>
+            <a:ext cx="1645920" cy="438912"/>
+          </a:xfrm>
+          <a:prstGeom prst="rect">
+            <a:avLst/>
+          </a:prstGeom>
+          <a:noFill/>
+          <a:ln/>
+        </p:spPr>
+        <p:txBody>
+          <a:bodyPr wrap="square" lIns="0" tIns="0" rIns="0" bIns="0" rtlCol="0" anchor="ctr"/>
+          <a:lstStyle/>
+          <a:p>
+            <a:pPr indent="0" marL="0">
+              <a:buNone/>
+            </a:pPr>
+            <a:r>
+              <a:rPr lang="en-US" sz="1000" b="1" dirty="0">
                 <a:solidFill>
                   <a:srgbClr val="13233F"/>
                 </a:solidFill>
@@ -20337,7 +20174,7 @@
                 <a:ea typeface="Calibri" pitchFamily="34" charset="-122"/>
                 <a:cs typeface="Calibri" pitchFamily="34" charset="-120"/>
               </a:rPr>
-              <a:t>Accept JSON alongside form-encoding · Document the hash field-order explicitly · Return structured error codes — today one “Invalid Hash” hides five different root causes.</a:t>
+              <a:t>products live in production</a:t>
             </a:r>
             <a:endParaRPr lang="en-US" sz="1000" dirty="0"/>
           </a:p>
@@ -20345,14 +20182,53 @@
       </p:sp>
       <p:sp>
         <p:nvSpPr>
-          <p:cNvPr id="14" name="Shape 12"/>
-          <p:cNvSpPr/>
-          <p:nvPr/>
-        </p:nvSpPr>
-        <p:spPr>
-          <a:xfrm>
-            <a:off x="640080" y="3346704"/>
-            <a:ext cx="7863840" cy="512064"/>
+          <p:cNvPr id="15" name="Text 13"/>
+          <p:cNvSpPr/>
+          <p:nvPr/>
+        </p:nvSpPr>
+        <p:spPr>
+          <a:xfrm>
+            <a:off x="2834640" y="3456432"/>
+            <a:ext cx="1645920" cy="868680"/>
+          </a:xfrm>
+          <a:prstGeom prst="rect">
+            <a:avLst/>
+          </a:prstGeom>
+          <a:noFill/>
+          <a:ln/>
+        </p:spPr>
+        <p:txBody>
+          <a:bodyPr wrap="square" lIns="0" tIns="0" rIns="0" bIns="0" rtlCol="0" anchor="ctr"/>
+          <a:lstStyle/>
+          <a:p>
+            <a:pPr indent="0" marL="0">
+              <a:buNone/>
+            </a:pPr>
+            <a:r>
+              <a:rPr lang="en-US" sz="950" dirty="0">
+                <a:solidFill>
+                  <a:srgbClr val="5B6B86"/>
+                </a:solidFill>
+                <a:latin typeface="Calibri" pitchFamily="34" charset="0"/>
+                <a:ea typeface="Calibri" pitchFamily="34" charset="-122"/>
+                <a:cs typeface="Calibri" pitchFamily="34" charset="-120"/>
+              </a:rPr>
+              <a:t>A flagship reference deployment proving the Paynow ecosystem composes into a real, paying business — not a demo.</a:t>
+            </a:r>
+            <a:endParaRPr lang="en-US" sz="950" dirty="0"/>
+          </a:p>
+        </p:txBody>
+      </p:sp>
+      <p:sp>
+        <p:nvSpPr>
+          <p:cNvPr id="16" name="Shape 14"/>
+          <p:cNvSpPr/>
+          <p:nvPr/>
+        </p:nvSpPr>
+        <p:spPr>
+          <a:xfrm>
+            <a:off x="4663440" y="2286000"/>
+            <a:ext cx="1874520" cy="2011680"/>
           </a:xfrm>
           <a:prstGeom prst="rect">
             <a:avLst/>
@@ -20362,9 +20238,9 @@
           </a:solidFill>
           <a:ln/>
           <a:effectLst>
-            <a:outerShdw sx="100000" sy="100000" kx="0" ky="0" algn="bl" rotWithShape="0" blurRad="63500" dist="12700" dir="5400000">
+            <a:outerShdw sx="100000" sy="100000" kx="0" ky="0" algn="bl" rotWithShape="0" blurRad="101600" dist="25400" dir="5400000">
               <a:srgbClr val="000000">
-                <a:alpha val="7000"/>
+                <a:alpha val="8000"/>
               </a:srgbClr>
             </a:outerShdw>
           </a:effectLst>
@@ -20372,89 +20248,89 @@
       </p:sp>
       <p:sp>
         <p:nvSpPr>
-          <p:cNvPr id="15" name="Shape 13"/>
-          <p:cNvSpPr/>
-          <p:nvPr/>
-        </p:nvSpPr>
-        <p:spPr>
-          <a:xfrm>
-            <a:off x="777240" y="3456432"/>
-            <a:ext cx="1097280" cy="329184"/>
+          <p:cNvPr id="17" name="Shape 15"/>
+          <p:cNvSpPr/>
+          <p:nvPr/>
+        </p:nvSpPr>
+        <p:spPr>
+          <a:xfrm>
+            <a:off x="4663440" y="2286000"/>
+            <a:ext cx="54864" cy="2011680"/>
           </a:xfrm>
           <a:prstGeom prst="rect">
             <a:avLst/>
           </a:prstGeom>
           <a:solidFill>
-            <a:srgbClr val="4CC3FF"/>
+            <a:srgbClr val="175FF8"/>
           </a:solidFill>
           <a:ln/>
         </p:spPr>
       </p:sp>
       <p:sp>
         <p:nvSpPr>
-          <p:cNvPr id="16" name="Text 14"/>
-          <p:cNvSpPr/>
-          <p:nvPr/>
-        </p:nvSpPr>
-        <p:spPr>
-          <a:xfrm>
-            <a:off x="777240" y="3456432"/>
-            <a:ext cx="1097280" cy="329184"/>
-          </a:xfrm>
-          <a:prstGeom prst="rect">
-            <a:avLst/>
-          </a:prstGeom>
-          <a:noFill/>
-          <a:ln/>
-        </p:spPr>
-        <p:txBody>
-          <a:bodyPr wrap="square" lIns="0" tIns="0" rIns="0" bIns="0" rtlCol="0" anchor="ctr"/>
-          <a:lstStyle/>
-          <a:p>
-            <a:pPr algn="ctr" indent="0" marL="0">
-              <a:buNone/>
-            </a:pPr>
-            <a:r>
-              <a:rPr lang="en-US" sz="900" b="1" spc="100" kern="0" dirty="0">
-                <a:solidFill>
-                  <a:srgbClr val="0A2540"/>
-                </a:solidFill>
-                <a:latin typeface="Calibri" pitchFamily="34" charset="0"/>
-                <a:ea typeface="Calibri" pitchFamily="34" charset="-122"/>
-                <a:cs typeface="Calibri" pitchFamily="34" charset="-120"/>
-              </a:rPr>
-              <a:t>MEDIUM · 4</a:t>
-            </a:r>
-            <a:endParaRPr lang="en-US" sz="900" dirty="0"/>
-          </a:p>
-        </p:txBody>
-      </p:sp>
-      <p:sp>
-        <p:nvSpPr>
-          <p:cNvPr id="17" name="Text 15"/>
-          <p:cNvSpPr/>
-          <p:nvPr/>
-        </p:nvSpPr>
-        <p:spPr>
-          <a:xfrm>
-            <a:off x="2057400" y="3346704"/>
-            <a:ext cx="6309360" cy="512064"/>
-          </a:xfrm>
-          <a:prstGeom prst="rect">
-            <a:avLst/>
-          </a:prstGeom>
-          <a:noFill/>
-          <a:ln/>
-        </p:spPr>
-        <p:txBody>
-          <a:bodyPr wrap="square" lIns="0" tIns="0" rIns="0" bIns="0" rtlCol="0" anchor="ctr"/>
-          <a:lstStyle/>
-          <a:p>
-            <a:pPr indent="0" marL="0">
-              <a:buNone/>
-            </a:pPr>
-            <a:r>
-              <a:rPr lang="en-US" sz="1000" dirty="0">
+          <p:cNvPr id="18" name="Text 16"/>
+          <p:cNvSpPr/>
+          <p:nvPr/>
+        </p:nvSpPr>
+        <p:spPr>
+          <a:xfrm>
+            <a:off x="4846320" y="2395728"/>
+            <a:ext cx="1645920" cy="566928"/>
+          </a:xfrm>
+          <a:prstGeom prst="rect">
+            <a:avLst/>
+          </a:prstGeom>
+          <a:noFill/>
+          <a:ln/>
+        </p:spPr>
+        <p:txBody>
+          <a:bodyPr wrap="square" lIns="0" tIns="0" rIns="0" bIns="0" rtlCol="0" anchor="ctr"/>
+          <a:lstStyle/>
+          <a:p>
+            <a:pPr indent="0" marL="0">
+              <a:buNone/>
+            </a:pPr>
+            <a:r>
+              <a:rPr lang="en-US" sz="2600" b="1" dirty="0">
+                <a:solidFill>
+                  <a:srgbClr val="175FF8"/>
+                </a:solidFill>
+                <a:latin typeface="Georgia" pitchFamily="34" charset="0"/>
+                <a:ea typeface="Georgia" pitchFamily="34" charset="-122"/>
+                <a:cs typeface="Georgia" pitchFamily="34" charset="-120"/>
+              </a:rPr>
+              <a:t>40–60</a:t>
+            </a:r>
+            <a:endParaRPr lang="en-US" sz="2600" dirty="0"/>
+          </a:p>
+        </p:txBody>
+      </p:sp>
+      <p:sp>
+        <p:nvSpPr>
+          <p:cNvPr id="19" name="Text 17"/>
+          <p:cNvSpPr/>
+          <p:nvPr/>
+        </p:nvSpPr>
+        <p:spPr>
+          <a:xfrm>
+            <a:off x="4846320" y="2980944"/>
+            <a:ext cx="1645920" cy="438912"/>
+          </a:xfrm>
+          <a:prstGeom prst="rect">
+            <a:avLst/>
+          </a:prstGeom>
+          <a:noFill/>
+          <a:ln/>
+        </p:spPr>
+        <p:txBody>
+          <a:bodyPr wrap="square" lIns="0" tIns="0" rIns="0" bIns="0" rtlCol="0" anchor="ctr"/>
+          <a:lstStyle/>
+          <a:p>
+            <a:pPr indent="0" marL="0">
+              <a:buNone/>
+            </a:pPr>
+            <a:r>
+              <a:rPr lang="en-US" sz="1000" b="1" dirty="0">
                 <a:solidFill>
                   <a:srgbClr val="13233F"/>
                 </a:solidFill>
@@ -20462,7 +20338,7 @@
                 <a:ea typeface="Calibri" pitchFamily="34" charset="-122"/>
                 <a:cs typeface="Calibri" pitchFamily="34" charset="-120"/>
               </a:rPr>
-              <a:t>Add express-checkout examples · A status page + webhook delivery logs · Publish an OpenAPI spec · Make the Node &amp; Java SDKs behave identically.</a:t>
+              <a:t>a new merchant category</a:t>
             </a:r>
             <a:endParaRPr lang="en-US" sz="1000" dirty="0"/>
           </a:p>
@@ -20470,14 +20346,53 @@
       </p:sp>
       <p:sp>
         <p:nvSpPr>
-          <p:cNvPr id="18" name="Shape 16"/>
-          <p:cNvSpPr/>
-          <p:nvPr/>
-        </p:nvSpPr>
-        <p:spPr>
-          <a:xfrm>
-            <a:off x="640080" y="3931920"/>
-            <a:ext cx="7863840" cy="512064"/>
+          <p:cNvPr id="20" name="Text 18"/>
+          <p:cNvSpPr/>
+          <p:nvPr/>
+        </p:nvSpPr>
+        <p:spPr>
+          <a:xfrm>
+            <a:off x="4846320" y="3456432"/>
+            <a:ext cx="1645920" cy="868680"/>
+          </a:xfrm>
+          <a:prstGeom prst="rect">
+            <a:avLst/>
+          </a:prstGeom>
+          <a:noFill/>
+          <a:ln/>
+        </p:spPr>
+        <p:txBody>
+          <a:bodyPr wrap="square" lIns="0" tIns="0" rIns="0" bIns="0" rtlCol="0" anchor="ctr"/>
+          <a:lstStyle/>
+          <a:p>
+            <a:pPr indent="0" marL="0">
+              <a:buNone/>
+            </a:pPr>
+            <a:r>
+              <a:rPr lang="en-US" sz="950" dirty="0">
+                <a:solidFill>
+                  <a:srgbClr val="5B6B86"/>
+                </a:solidFill>
+                <a:latin typeface="Calibri" pitchFamily="34" charset="0"/>
+                <a:ea typeface="Calibri" pitchFamily="34" charset="-122"/>
+                <a:cs typeface="Calibri" pitchFamily="34" charset="-120"/>
+              </a:rPr>
+              <a:t>Auction houses are a class Paynow doesn't serve today. Each house onboarded is a new recurring biller + settlement account.</a:t>
+            </a:r>
+            <a:endParaRPr lang="en-US" sz="950" dirty="0"/>
+          </a:p>
+        </p:txBody>
+      </p:sp>
+      <p:sp>
+        <p:nvSpPr>
+          <p:cNvPr id="21" name="Shape 19"/>
+          <p:cNvSpPr/>
+          <p:nvPr/>
+        </p:nvSpPr>
+        <p:spPr>
+          <a:xfrm>
+            <a:off x="6675120" y="2286000"/>
+            <a:ext cx="1874520" cy="2011680"/>
           </a:xfrm>
           <a:prstGeom prst="rect">
             <a:avLst/>
@@ -20487,9 +20402,9 @@
           </a:solidFill>
           <a:ln/>
           <a:effectLst>
-            <a:outerShdw sx="100000" sy="100000" kx="0" ky="0" algn="bl" rotWithShape="0" blurRad="63500" dist="12700" dir="5400000">
+            <a:outerShdw sx="100000" sy="100000" kx="0" ky="0" algn="bl" rotWithShape="0" blurRad="101600" dist="25400" dir="5400000">
               <a:srgbClr val="000000">
-                <a:alpha val="7000"/>
+                <a:alpha val="8000"/>
               </a:srgbClr>
             </a:outerShdw>
           </a:effectLst>
@@ -20497,89 +20412,89 @@
       </p:sp>
       <p:sp>
         <p:nvSpPr>
-          <p:cNvPr id="19" name="Shape 17"/>
-          <p:cNvSpPr/>
-          <p:nvPr/>
-        </p:nvSpPr>
-        <p:spPr>
-          <a:xfrm>
-            <a:off x="777240" y="4041648"/>
-            <a:ext cx="1097280" cy="329184"/>
+          <p:cNvPr id="22" name="Shape 20"/>
+          <p:cNvSpPr/>
+          <p:nvPr/>
+        </p:nvSpPr>
+        <p:spPr>
+          <a:xfrm>
+            <a:off x="6675120" y="2286000"/>
+            <a:ext cx="54864" cy="2011680"/>
           </a:xfrm>
           <a:prstGeom prst="rect">
             <a:avLst/>
           </a:prstGeom>
           <a:solidFill>
-            <a:srgbClr val="5B6B86"/>
+            <a:srgbClr val="175FF8"/>
           </a:solidFill>
           <a:ln/>
         </p:spPr>
       </p:sp>
       <p:sp>
         <p:nvSpPr>
-          <p:cNvPr id="20" name="Text 18"/>
-          <p:cNvSpPr/>
-          <p:nvPr/>
-        </p:nvSpPr>
-        <p:spPr>
-          <a:xfrm>
-            <a:off x="777240" y="4041648"/>
-            <a:ext cx="1097280" cy="329184"/>
-          </a:xfrm>
-          <a:prstGeom prst="rect">
-            <a:avLst/>
-          </a:prstGeom>
-          <a:noFill/>
-          <a:ln/>
-        </p:spPr>
-        <p:txBody>
-          <a:bodyPr wrap="square" lIns="0" tIns="0" rIns="0" bIns="0" rtlCol="0" anchor="ctr"/>
-          <a:lstStyle/>
-          <a:p>
-            <a:pPr algn="ctr" indent="0" marL="0">
-              <a:buNone/>
-            </a:pPr>
-            <a:r>
-              <a:rPr lang="en-US" sz="900" b="1" spc="100" kern="0" dirty="0">
-                <a:solidFill>
-                  <a:srgbClr val="FFFFFF"/>
-                </a:solidFill>
-                <a:latin typeface="Calibri" pitchFamily="34" charset="0"/>
-                <a:ea typeface="Calibri" pitchFamily="34" charset="-122"/>
-                <a:cs typeface="Calibri" pitchFamily="34" charset="-120"/>
-              </a:rPr>
-              <a:t>LOW · 1</a:t>
-            </a:r>
-            <a:endParaRPr lang="en-US" sz="900" dirty="0"/>
-          </a:p>
-        </p:txBody>
-      </p:sp>
-      <p:sp>
-        <p:nvSpPr>
-          <p:cNvPr id="21" name="Text 19"/>
-          <p:cNvSpPr/>
-          <p:nvPr/>
-        </p:nvSpPr>
-        <p:spPr>
-          <a:xfrm>
-            <a:off x="2057400" y="3931920"/>
-            <a:ext cx="6309360" cy="512064"/>
-          </a:xfrm>
-          <a:prstGeom prst="rect">
-            <a:avLst/>
-          </a:prstGeom>
-          <a:noFill/>
-          <a:ln/>
-        </p:spPr>
-        <p:txBody>
-          <a:bodyPr wrap="square" lIns="0" tIns="0" rIns="0" bIns="0" rtlCol="0" anchor="ctr"/>
-          <a:lstStyle/>
-          <a:p>
-            <a:pPr indent="0" marL="0">
-              <a:buNone/>
-            </a:pPr>
-            <a:r>
-              <a:rPr lang="en-US" sz="1000" dirty="0">
+          <p:cNvPr id="23" name="Text 21"/>
+          <p:cNvSpPr/>
+          <p:nvPr/>
+        </p:nvSpPr>
+        <p:spPr>
+          <a:xfrm>
+            <a:off x="6858000" y="2395728"/>
+            <a:ext cx="1645920" cy="566928"/>
+          </a:xfrm>
+          <a:prstGeom prst="rect">
+            <a:avLst/>
+          </a:prstGeom>
+          <a:noFill/>
+          <a:ln/>
+        </p:spPr>
+        <p:txBody>
+          <a:bodyPr wrap="square" lIns="0" tIns="0" rIns="0" bIns="0" rtlCol="0" anchor="ctr"/>
+          <a:lstStyle/>
+          <a:p>
+            <a:pPr indent="0" marL="0">
+              <a:buNone/>
+            </a:pPr>
+            <a:r>
+              <a:rPr lang="en-US" sz="2600" b="1" dirty="0">
+                <a:solidFill>
+                  <a:srgbClr val="175FF8"/>
+                </a:solidFill>
+                <a:latin typeface="Georgia" pitchFamily="34" charset="0"/>
+                <a:ea typeface="Georgia" pitchFamily="34" charset="-122"/>
+                <a:cs typeface="Georgia" pitchFamily="34" charset="-120"/>
+              </a:rPr>
+              <a:t>9</a:t>
+            </a:r>
+            <a:endParaRPr lang="en-US" sz="2600" dirty="0"/>
+          </a:p>
+        </p:txBody>
+      </p:sp>
+      <p:sp>
+        <p:nvSpPr>
+          <p:cNvPr id="24" name="Text 22"/>
+          <p:cNvSpPr/>
+          <p:nvPr/>
+        </p:nvSpPr>
+        <p:spPr>
+          <a:xfrm>
+            <a:off x="6858000" y="2980944"/>
+            <a:ext cx="1645920" cy="438912"/>
+          </a:xfrm>
+          <a:prstGeom prst="rect">
+            <a:avLst/>
+          </a:prstGeom>
+          <a:noFill/>
+          <a:ln/>
+        </p:spPr>
+        <p:txBody>
+          <a:bodyPr wrap="square" lIns="0" tIns="0" rIns="0" bIns="0" rtlCol="0" anchor="ctr"/>
+          <a:lstStyle/>
+          <a:p>
+            <a:pPr indent="0" marL="0">
+              <a:buNone/>
+            </a:pPr>
+            <a:r>
+              <a:rPr lang="en-US" sz="1000" b="1" dirty="0">
                 <a:solidFill>
                   <a:srgbClr val="13233F"/>
                 </a:solidFill>
@@ -20587,7 +20502,7 @@
                 <a:ea typeface="Calibri" pitchFamily="34" charset="-122"/>
                 <a:cs typeface="Calibri" pitchFamily="34" charset="-120"/>
               </a:rPr>
-              <a:t>Expand test-mode docs — team testing, webhook testing and a go-live checklist.</a:t>
+              <a:t>DX fixes delivered as feedback</a:t>
             </a:r>
             <a:endParaRPr lang="en-US" sz="1000" dirty="0"/>
           </a:p>
@@ -20595,13 +20510,52 @@
       </p:sp>
       <p:sp>
         <p:nvSpPr>
-          <p:cNvPr id="22" name="Text 20"/>
-          <p:cNvSpPr/>
-          <p:nvPr/>
-        </p:nvSpPr>
-        <p:spPr>
-          <a:xfrm>
-            <a:off x="640080" y="4535424"/>
+          <p:cNvPr id="25" name="Text 23"/>
+          <p:cNvSpPr/>
+          <p:nvPr/>
+        </p:nvSpPr>
+        <p:spPr>
+          <a:xfrm>
+            <a:off x="6858000" y="3456432"/>
+            <a:ext cx="1645920" cy="868680"/>
+          </a:xfrm>
+          <a:prstGeom prst="rect">
+            <a:avLst/>
+          </a:prstGeom>
+          <a:noFill/>
+          <a:ln/>
+        </p:spPr>
+        <p:txBody>
+          <a:bodyPr wrap="square" lIns="0" tIns="0" rIns="0" bIns="0" rtlCol="0" anchor="ctr"/>
+          <a:lstStyle/>
+          <a:p>
+            <a:pPr indent="0" marL="0">
+              <a:buNone/>
+            </a:pPr>
+            <a:r>
+              <a:rPr lang="en-US" sz="950" dirty="0">
+                <a:solidFill>
+                  <a:srgbClr val="5B6B86"/>
+                </a:solidFill>
+                <a:latin typeface="Calibri" pitchFamily="34" charset="0"/>
+                <a:ea typeface="Calibri" pitchFamily="34" charset="-122"/>
+                <a:cs typeface="Calibri" pitchFamily="34" charset="-120"/>
+              </a:rPr>
+              <a:t>A full developer-experience benchmark vs Stripe, Paystack, Flutterwave &amp; Pesepay — the next integrator's path made shorter.</a:t>
+            </a:r>
+            <a:endParaRPr lang="en-US" sz="950" dirty="0"/>
+          </a:p>
+        </p:txBody>
+      </p:sp>
+      <p:sp>
+        <p:nvSpPr>
+          <p:cNvPr id="26" name="Text 24"/>
+          <p:cNvSpPr/>
+          <p:nvPr/>
+        </p:nvSpPr>
+        <p:spPr>
+          <a:xfrm>
+            <a:off x="640080" y="4480560"/>
             <a:ext cx="7955280" cy="274320"/>
           </a:xfrm>
           <a:prstGeom prst="rect">
@@ -20618,7 +20572,7 @@
               <a:buNone/>
             </a:pPr>
             <a:r>
-              <a:rPr lang="en-US" sz="950" b="1" i="1" dirty="0">
+              <a:rPr lang="en-US" sz="1000" b="1" i="1" dirty="0">
                 <a:solidFill>
                   <a:srgbClr val="175FF8"/>
                 </a:solidFill>
@@ -20626,13 +20580,13 @@
                 <a:ea typeface="Calibri" pitchFamily="34" charset="-122"/>
                 <a:cs typeface="Calibri" pitchFamily="34" charset="-120"/>
               </a:rPr>
-              <a:t>Result:  </a:t>
-            </a:r>
-            <a:pPr indent="0" marL="0">
-              <a:buNone/>
-            </a:pPr>
-            <a:r>
-              <a:rPr lang="en-US" sz="950" i="1" dirty="0">
+              <a:t>The strategic fit:  </a:t>
+            </a:r>
+            <a:pPr indent="0" marL="0">
+              <a:buNone/>
+            </a:pPr>
+            <a:r>
+              <a:rPr lang="en-US" sz="1000" i="1" dirty="0">
                 <a:solidFill>
                   <a:srgbClr val="5B6B86"/>
                 </a:solidFill>
@@ -20640,15 +20594,15 @@
                 <a:ea typeface="Calibri" pitchFamily="34" charset="-122"/>
                 <a:cs typeface="Calibri" pitchFamily="34" charset="-120"/>
               </a:rPr>
-              <a:t>Paynow DX scored 2.3/5 — but every gap is fixable, and most are documentation, not architecture. Full report: paynow-dx-recommendations.md.</a:t>
-            </a:r>
-            <a:endParaRPr lang="en-US" sz="950" dirty="0"/>
-          </a:p>
-        </p:txBody>
-      </p:sp>
-      <p:sp>
-        <p:nvSpPr>
-          <p:cNvPr id="23" name="Text 21"/>
+              <a:t>Paynow's growing contacts open the doors; ZimLivestock does the on-the-ground operating — and every dollar it settles flows onto Paynow rails.</a:t>
+            </a:r>
+            <a:endParaRPr lang="en-US" sz="1000" dirty="0"/>
+          </a:p>
+        </p:txBody>
+      </p:sp>
+      <p:sp>
+        <p:nvSpPr>
+          <p:cNvPr id="27" name="Text 25"/>
           <p:cNvSpPr/>
           <p:nvPr/>
         </p:nvSpPr>
@@ -20687,7 +20641,7 @@
       </p:sp>
       <p:sp>
         <p:nvSpPr>
-          <p:cNvPr id="24" name="Text 22"/>
+          <p:cNvPr id="28" name="Text 26"/>
           <p:cNvSpPr/>
           <p:nvPr/>
         </p:nvSpPr>
@@ -20718,7 +20672,7 @@
                 <a:ea typeface="Calibri" pitchFamily="34" charset="-122"/>
                 <a:cs typeface="Calibri" pitchFamily="34" charset="-120"/>
               </a:rPr>
-              <a:t>27 / 29</a:t>
+              <a:t>27 / 31</a:t>
             </a:r>
             <a:endParaRPr lang="en-US" sz="800" dirty="0"/>
           </a:p>
@@ -20738,7 +20692,7 @@
     <p:bg>
       <p:bgPr>
         <a:solidFill>
-          <a:srgbClr val="0A2540"/>
+          <a:srgbClr val="EEF3FF"/>
         </a:solidFill>
       </p:bgPr>
     </p:bg>
@@ -20784,8 +20738,8 @@
         </p:nvSpPr>
         <p:spPr>
           <a:xfrm>
-            <a:off x="640080" y="502920"/>
-            <a:ext cx="5486400" cy="274320"/>
+            <a:off x="640080" y="457200"/>
+            <a:ext cx="7589520" cy="274320"/>
           </a:xfrm>
           <a:prstGeom prst="rect">
             <a:avLst/>
@@ -20803,13 +20757,13 @@
             <a:r>
               <a:rPr lang="en-US" sz="1100" b="1" spc="400" kern="0" dirty="0">
                 <a:solidFill>
-                  <a:srgbClr val="4CC3FF"/>
-                </a:solidFill>
-                <a:latin typeface="Calibri" pitchFamily="34" charset="0"/>
-                <a:ea typeface="Calibri" pitchFamily="34" charset="-122"/>
-                <a:cs typeface="Calibri" pitchFamily="34" charset="-120"/>
-              </a:rPr>
-              <a:t>THE ASK</a:t>
+                  <a:srgbClr val="175FF8"/>
+                </a:solidFill>
+                <a:latin typeface="Calibri" pitchFamily="34" charset="0"/>
+                <a:ea typeface="Calibri" pitchFamily="34" charset="-122"/>
+                <a:cs typeface="Calibri" pitchFamily="34" charset="-120"/>
+              </a:rPr>
+              <a:t>DEVELOPER EXPERIENCE BENCHMARK · FINDINGS</a:t>
             </a:r>
             <a:endParaRPr lang="en-US" sz="1100" dirty="0"/>
           </a:p>
@@ -20823,34 +20777,34 @@
         </p:nvSpPr>
         <p:spPr>
           <a:xfrm>
-            <a:off x="640080" y="960120"/>
-            <a:ext cx="7863840" cy="914400"/>
-          </a:xfrm>
-          <a:prstGeom prst="rect">
-            <a:avLst/>
-          </a:prstGeom>
-          <a:noFill/>
-          <a:ln/>
-        </p:spPr>
-        <p:txBody>
-          <a:bodyPr wrap="square" lIns="0" tIns="0" rIns="0" bIns="0" rtlCol="0" anchor="ctr"/>
-          <a:lstStyle/>
-          <a:p>
-            <a:pPr indent="0" marL="0">
-              <a:buNone/>
-            </a:pPr>
-            <a:r>
-              <a:rPr lang="en-US" sz="4000" b="1" dirty="0">
-                <a:solidFill>
-                  <a:srgbClr val="EEF3FF"/>
+            <a:off x="640080" y="841248"/>
+            <a:ext cx="7955280" cy="777240"/>
+          </a:xfrm>
+          <a:prstGeom prst="rect">
+            <a:avLst/>
+          </a:prstGeom>
+          <a:noFill/>
+          <a:ln/>
+        </p:spPr>
+        <p:txBody>
+          <a:bodyPr wrap="square" lIns="0" tIns="0" rIns="0" bIns="0" rtlCol="0" anchor="ctr"/>
+          <a:lstStyle/>
+          <a:p>
+            <a:pPr indent="0" marL="0">
+              <a:buNone/>
+            </a:pPr>
+            <a:r>
+              <a:rPr lang="en-US" sz="2800" b="1" dirty="0">
+                <a:solidFill>
+                  <a:srgbClr val="13233F"/>
                 </a:solidFill>
                 <a:latin typeface="Georgia" pitchFamily="34" charset="0"/>
                 <a:ea typeface="Georgia" pitchFamily="34" charset="-122"/>
                 <a:cs typeface="Georgia" pitchFamily="34" charset="-120"/>
               </a:rPr>
-              <a:t>Not money. Doors and rails.</a:t>
-            </a:r>
-            <a:endParaRPr lang="en-US" sz="4000" dirty="0"/>
+              <a:t>I also stress-tested your front door.</a:t>
+            </a:r>
+            <a:endParaRPr lang="en-US" sz="2800" dirty="0"/>
           </a:p>
         </p:txBody>
       </p:sp>
@@ -20862,86 +20816,1025 @@
         </p:nvSpPr>
         <p:spPr>
           <a:xfrm>
-            <a:off x="640080" y="1783080"/>
-            <a:ext cx="7863840" cy="457200"/>
-          </a:xfrm>
-          <a:prstGeom prst="rect">
-            <a:avLst/>
-          </a:prstGeom>
-          <a:noFill/>
-          <a:ln/>
-        </p:spPr>
-        <p:txBody>
-          <a:bodyPr wrap="square" lIns="0" tIns="0" rIns="0" bIns="0" rtlCol="0" anchor="ctr"/>
-          <a:lstStyle/>
-          <a:p>
-            <a:pPr indent="0" marL="0">
-              <a:buNone/>
-            </a:pPr>
-            <a:r>
-              <a:rPr lang="en-US" sz="1900" i="1" dirty="0">
+            <a:off x="640080" y="1627632"/>
+            <a:ext cx="7955280" cy="548640"/>
+          </a:xfrm>
+          <a:prstGeom prst="rect">
+            <a:avLst/>
+          </a:prstGeom>
+          <a:noFill/>
+          <a:ln/>
+        </p:spPr>
+        <p:txBody>
+          <a:bodyPr wrap="square" rtlCol="0" anchor="ctr"/>
+          <a:lstStyle/>
+          <a:p>
+            <a:pPr indent="0" marL="0">
+              <a:buNone/>
+            </a:pPr>
+            <a:r>
+              <a:rPr lang="en-US" sz="1300" dirty="0">
+                <a:solidFill>
+                  <a:srgbClr val="5B6B86"/>
+                </a:solidFill>
+                <a:latin typeface="Calibri" pitchFamily="34" charset="0"/>
+                <a:ea typeface="Calibri" pitchFamily="34" charset="-122"/>
+                <a:cs typeface="Calibri" pitchFamily="34" charset="-120"/>
+              </a:rPr>
+              <a:t>Four weeks integrating Paynow with no SDK, benchmarked against four global gateways — the honest scorecard, and what Paynow already does better than anyone in this market.</a:t>
+            </a:r>
+            <a:endParaRPr lang="en-US" sz="1300" dirty="0"/>
+          </a:p>
+        </p:txBody>
+      </p:sp>
+      <p:sp>
+        <p:nvSpPr>
+          <p:cNvPr id="6" name="Text 4"/>
+          <p:cNvSpPr/>
+          <p:nvPr/>
+        </p:nvSpPr>
+        <p:spPr>
+          <a:xfrm>
+            <a:off x="640080" y="2084832"/>
+            <a:ext cx="7955280" cy="274320"/>
+          </a:xfrm>
+          <a:prstGeom prst="rect">
+            <a:avLst/>
+          </a:prstGeom>
+          <a:noFill/>
+          <a:ln/>
+        </p:spPr>
+        <p:txBody>
+          <a:bodyPr wrap="square" lIns="0" tIns="0" rIns="0" bIns="0" rtlCol="0" anchor="ctr"/>
+          <a:lstStyle/>
+          <a:p>
+            <a:pPr indent="0" marL="0">
+              <a:buNone/>
+            </a:pPr>
+            <a:r>
+              <a:rPr lang="en-US" sz="1200" b="1" dirty="0">
+                <a:solidFill>
+                  <a:srgbClr val="175FF8"/>
+                </a:solidFill>
+                <a:latin typeface="Calibri" pitchFamily="34" charset="0"/>
+                <a:ea typeface="Calibri" pitchFamily="34" charset="-122"/>
+                <a:cs typeface="Calibri" pitchFamily="34" charset="-120"/>
+              </a:rPr>
+              <a:t>Overall DX: 3.0 / 5</a:t>
+            </a:r>
+            <a:pPr indent="0" marL="0">
+              <a:buNone/>
+            </a:pPr>
+            <a:r>
+              <a:rPr lang="en-US" sz="1200" dirty="0">
+                <a:solidFill>
+                  <a:srgbClr val="5B6B86"/>
+                </a:solidFill>
+                <a:latin typeface="Calibri" pitchFamily="34" charset="0"/>
+                <a:ea typeface="Calibri" pitchFamily="34" charset="-122"/>
+                <a:cs typeface="Calibri" pitchFamily="34" charset="-120"/>
+              </a:rPr>
+              <a:t>    — Stripe 4.8 · Paystack 4.2 · Flutterwave 3.5 (same framework)</a:t>
+            </a:r>
+            <a:endParaRPr lang="en-US" sz="1200" dirty="0"/>
+          </a:p>
+        </p:txBody>
+      </p:sp>
+      <p:sp>
+        <p:nvSpPr>
+          <p:cNvPr id="7" name="Text 5"/>
+          <p:cNvSpPr/>
+          <p:nvPr/>
+        </p:nvSpPr>
+        <p:spPr>
+          <a:xfrm>
+            <a:off x="640080" y="2487168"/>
+            <a:ext cx="1645920" cy="256032"/>
+          </a:xfrm>
+          <a:prstGeom prst="rect">
+            <a:avLst/>
+          </a:prstGeom>
+          <a:noFill/>
+          <a:ln/>
+        </p:spPr>
+        <p:txBody>
+          <a:bodyPr wrap="square" lIns="0" tIns="0" rIns="0" bIns="0" rtlCol="0" anchor="ctr"/>
+          <a:lstStyle/>
+          <a:p>
+            <a:pPr indent="0" marL="0">
+              <a:buNone/>
+            </a:pPr>
+            <a:r>
+              <a:rPr lang="en-US" sz="950" dirty="0">
+                <a:solidFill>
+                  <a:srgbClr val="13233F"/>
+                </a:solidFill>
+                <a:latin typeface="Calibri" pitchFamily="34" charset="0"/>
+                <a:ea typeface="Calibri" pitchFamily="34" charset="-122"/>
+                <a:cs typeface="Calibri" pitchFamily="34" charset="-120"/>
+              </a:rPr>
+              <a:t>Documentation</a:t>
+            </a:r>
+            <a:endParaRPr lang="en-US" sz="950" dirty="0"/>
+          </a:p>
+        </p:txBody>
+      </p:sp>
+      <p:sp>
+        <p:nvSpPr>
+          <p:cNvPr id="8" name="Shape 6"/>
+          <p:cNvSpPr/>
+          <p:nvPr/>
+        </p:nvSpPr>
+        <p:spPr>
+          <a:xfrm>
+            <a:off x="2331720" y="2532888"/>
+            <a:ext cx="1783080" cy="146304"/>
+          </a:xfrm>
+          <a:prstGeom prst="rect">
+            <a:avLst/>
+          </a:prstGeom>
+          <a:solidFill>
+            <a:srgbClr val="D6E0F2"/>
+          </a:solidFill>
+          <a:ln/>
+        </p:spPr>
+      </p:sp>
+      <p:sp>
+        <p:nvSpPr>
+          <p:cNvPr id="9" name="Shape 7"/>
+          <p:cNvSpPr/>
+          <p:nvPr/>
+        </p:nvSpPr>
+        <p:spPr>
+          <a:xfrm>
+            <a:off x="2331720" y="2532888"/>
+            <a:ext cx="1069848" cy="146304"/>
+          </a:xfrm>
+          <a:prstGeom prst="rect">
+            <a:avLst/>
+          </a:prstGeom>
+          <a:solidFill>
+            <a:srgbClr val="13BFA3"/>
+          </a:solidFill>
+          <a:ln/>
+        </p:spPr>
+      </p:sp>
+      <p:sp>
+        <p:nvSpPr>
+          <p:cNvPr id="10" name="Text 8"/>
+          <p:cNvSpPr/>
+          <p:nvPr/>
+        </p:nvSpPr>
+        <p:spPr>
+          <a:xfrm>
+            <a:off x="4206240" y="2487168"/>
+            <a:ext cx="457200" cy="256032"/>
+          </a:xfrm>
+          <a:prstGeom prst="rect">
+            <a:avLst/>
+          </a:prstGeom>
+          <a:noFill/>
+          <a:ln/>
+        </p:spPr>
+        <p:txBody>
+          <a:bodyPr wrap="square" lIns="0" tIns="0" rIns="0" bIns="0" rtlCol="0" anchor="ctr"/>
+          <a:lstStyle/>
+          <a:p>
+            <a:pPr indent="0" marL="0">
+              <a:buNone/>
+            </a:pPr>
+            <a:r>
+              <a:rPr lang="en-US" sz="950" b="1" dirty="0">
+                <a:solidFill>
+                  <a:srgbClr val="13233F"/>
+                </a:solidFill>
+                <a:latin typeface="Calibri" pitchFamily="34" charset="0"/>
+                <a:ea typeface="Calibri" pitchFamily="34" charset="-122"/>
+                <a:cs typeface="Calibri" pitchFamily="34" charset="-120"/>
+              </a:rPr>
+              <a:t>3.0</a:t>
+            </a:r>
+            <a:endParaRPr lang="en-US" sz="950" dirty="0"/>
+          </a:p>
+        </p:txBody>
+      </p:sp>
+      <p:sp>
+        <p:nvSpPr>
+          <p:cNvPr id="11" name="Text 9"/>
+          <p:cNvSpPr/>
+          <p:nvPr/>
+        </p:nvSpPr>
+        <p:spPr>
+          <a:xfrm>
+            <a:off x="640080" y="2798064"/>
+            <a:ext cx="1645920" cy="256032"/>
+          </a:xfrm>
+          <a:prstGeom prst="rect">
+            <a:avLst/>
+          </a:prstGeom>
+          <a:noFill/>
+          <a:ln/>
+        </p:spPr>
+        <p:txBody>
+          <a:bodyPr wrap="square" lIns="0" tIns="0" rIns="0" bIns="0" rtlCol="0" anchor="ctr"/>
+          <a:lstStyle/>
+          <a:p>
+            <a:pPr indent="0" marL="0">
+              <a:buNone/>
+            </a:pPr>
+            <a:r>
+              <a:rPr lang="en-US" sz="950" dirty="0">
+                <a:solidFill>
+                  <a:srgbClr val="13233F"/>
+                </a:solidFill>
+                <a:latin typeface="Calibri" pitchFamily="34" charset="0"/>
+                <a:ea typeface="Calibri" pitchFamily="34" charset="-122"/>
+                <a:cs typeface="Calibri" pitchFamily="34" charset="-120"/>
+              </a:rPr>
+              <a:t>Integration simplicity</a:t>
+            </a:r>
+            <a:endParaRPr lang="en-US" sz="950" dirty="0"/>
+          </a:p>
+        </p:txBody>
+      </p:sp>
+      <p:sp>
+        <p:nvSpPr>
+          <p:cNvPr id="12" name="Shape 10"/>
+          <p:cNvSpPr/>
+          <p:nvPr/>
+        </p:nvSpPr>
+        <p:spPr>
+          <a:xfrm>
+            <a:off x="2331720" y="2843784"/>
+            <a:ext cx="1783080" cy="146304"/>
+          </a:xfrm>
+          <a:prstGeom prst="rect">
+            <a:avLst/>
+          </a:prstGeom>
+          <a:solidFill>
+            <a:srgbClr val="D6E0F2"/>
+          </a:solidFill>
+          <a:ln/>
+        </p:spPr>
+      </p:sp>
+      <p:sp>
+        <p:nvSpPr>
+          <p:cNvPr id="13" name="Shape 11"/>
+          <p:cNvSpPr/>
+          <p:nvPr/>
+        </p:nvSpPr>
+        <p:spPr>
+          <a:xfrm>
+            <a:off x="2331720" y="2843784"/>
+            <a:ext cx="891540" cy="146304"/>
+          </a:xfrm>
+          <a:prstGeom prst="rect">
+            <a:avLst/>
+          </a:prstGeom>
+          <a:solidFill>
+            <a:srgbClr val="175FF8"/>
+          </a:solidFill>
+          <a:ln/>
+        </p:spPr>
+      </p:sp>
+      <p:sp>
+        <p:nvSpPr>
+          <p:cNvPr id="14" name="Text 12"/>
+          <p:cNvSpPr/>
+          <p:nvPr/>
+        </p:nvSpPr>
+        <p:spPr>
+          <a:xfrm>
+            <a:off x="4206240" y="2798064"/>
+            <a:ext cx="457200" cy="256032"/>
+          </a:xfrm>
+          <a:prstGeom prst="rect">
+            <a:avLst/>
+          </a:prstGeom>
+          <a:noFill/>
+          <a:ln/>
+        </p:spPr>
+        <p:txBody>
+          <a:bodyPr wrap="square" lIns="0" tIns="0" rIns="0" bIns="0" rtlCol="0" anchor="ctr"/>
+          <a:lstStyle/>
+          <a:p>
+            <a:pPr indent="0" marL="0">
+              <a:buNone/>
+            </a:pPr>
+            <a:r>
+              <a:rPr lang="en-US" sz="950" b="1" dirty="0">
+                <a:solidFill>
+                  <a:srgbClr val="13233F"/>
+                </a:solidFill>
+                <a:latin typeface="Calibri" pitchFamily="34" charset="0"/>
+                <a:ea typeface="Calibri" pitchFamily="34" charset="-122"/>
+                <a:cs typeface="Calibri" pitchFamily="34" charset="-120"/>
+              </a:rPr>
+              <a:t>2.5</a:t>
+            </a:r>
+            <a:endParaRPr lang="en-US" sz="950" dirty="0"/>
+          </a:p>
+        </p:txBody>
+      </p:sp>
+      <p:sp>
+        <p:nvSpPr>
+          <p:cNvPr id="15" name="Text 13"/>
+          <p:cNvSpPr/>
+          <p:nvPr/>
+        </p:nvSpPr>
+        <p:spPr>
+          <a:xfrm>
+            <a:off x="640080" y="3108960"/>
+            <a:ext cx="1645920" cy="256032"/>
+          </a:xfrm>
+          <a:prstGeom prst="rect">
+            <a:avLst/>
+          </a:prstGeom>
+          <a:noFill/>
+          <a:ln/>
+        </p:spPr>
+        <p:txBody>
+          <a:bodyPr wrap="square" lIns="0" tIns="0" rIns="0" bIns="0" rtlCol="0" anchor="ctr"/>
+          <a:lstStyle/>
+          <a:p>
+            <a:pPr indent="0" marL="0">
+              <a:buNone/>
+            </a:pPr>
+            <a:r>
+              <a:rPr lang="en-US" sz="950" dirty="0">
+                <a:solidFill>
+                  <a:srgbClr val="13233F"/>
+                </a:solidFill>
+                <a:latin typeface="Calibri" pitchFamily="34" charset="0"/>
+                <a:ea typeface="Calibri" pitchFamily="34" charset="-122"/>
+                <a:cs typeface="Calibri" pitchFamily="34" charset="-120"/>
+              </a:rPr>
+              <a:t>Error messages</a:t>
+            </a:r>
+            <a:endParaRPr lang="en-US" sz="950" dirty="0"/>
+          </a:p>
+        </p:txBody>
+      </p:sp>
+      <p:sp>
+        <p:nvSpPr>
+          <p:cNvPr id="16" name="Shape 14"/>
+          <p:cNvSpPr/>
+          <p:nvPr/>
+        </p:nvSpPr>
+        <p:spPr>
+          <a:xfrm>
+            <a:off x="2331720" y="3154680"/>
+            <a:ext cx="1783080" cy="146304"/>
+          </a:xfrm>
+          <a:prstGeom prst="rect">
+            <a:avLst/>
+          </a:prstGeom>
+          <a:solidFill>
+            <a:srgbClr val="D6E0F2"/>
+          </a:solidFill>
+          <a:ln/>
+        </p:spPr>
+      </p:sp>
+      <p:sp>
+        <p:nvSpPr>
+          <p:cNvPr id="17" name="Shape 15"/>
+          <p:cNvSpPr/>
+          <p:nvPr/>
+        </p:nvSpPr>
+        <p:spPr>
+          <a:xfrm>
+            <a:off x="2331720" y="3154680"/>
+            <a:ext cx="891540" cy="146304"/>
+          </a:xfrm>
+          <a:prstGeom prst="rect">
+            <a:avLst/>
+          </a:prstGeom>
+          <a:solidFill>
+            <a:srgbClr val="175FF8"/>
+          </a:solidFill>
+          <a:ln/>
+        </p:spPr>
+      </p:sp>
+      <p:sp>
+        <p:nvSpPr>
+          <p:cNvPr id="18" name="Text 16"/>
+          <p:cNvSpPr/>
+          <p:nvPr/>
+        </p:nvSpPr>
+        <p:spPr>
+          <a:xfrm>
+            <a:off x="4206240" y="3108960"/>
+            <a:ext cx="457200" cy="256032"/>
+          </a:xfrm>
+          <a:prstGeom prst="rect">
+            <a:avLst/>
+          </a:prstGeom>
+          <a:noFill/>
+          <a:ln/>
+        </p:spPr>
+        <p:txBody>
+          <a:bodyPr wrap="square" lIns="0" tIns="0" rIns="0" bIns="0" rtlCol="0" anchor="ctr"/>
+          <a:lstStyle/>
+          <a:p>
+            <a:pPr indent="0" marL="0">
+              <a:buNone/>
+            </a:pPr>
+            <a:r>
+              <a:rPr lang="en-US" sz="950" b="1" dirty="0">
+                <a:solidFill>
+                  <a:srgbClr val="13233F"/>
+                </a:solidFill>
+                <a:latin typeface="Calibri" pitchFamily="34" charset="0"/>
+                <a:ea typeface="Calibri" pitchFamily="34" charset="-122"/>
+                <a:cs typeface="Calibri" pitchFamily="34" charset="-120"/>
+              </a:rPr>
+              <a:t>2.5</a:t>
+            </a:r>
+            <a:endParaRPr lang="en-US" sz="950" dirty="0"/>
+          </a:p>
+        </p:txBody>
+      </p:sp>
+      <p:sp>
+        <p:nvSpPr>
+          <p:cNvPr id="19" name="Text 17"/>
+          <p:cNvSpPr/>
+          <p:nvPr/>
+        </p:nvSpPr>
+        <p:spPr>
+          <a:xfrm>
+            <a:off x="640080" y="3419856"/>
+            <a:ext cx="1645920" cy="256032"/>
+          </a:xfrm>
+          <a:prstGeom prst="rect">
+            <a:avLst/>
+          </a:prstGeom>
+          <a:noFill/>
+          <a:ln/>
+        </p:spPr>
+        <p:txBody>
+          <a:bodyPr wrap="square" lIns="0" tIns="0" rIns="0" bIns="0" rtlCol="0" anchor="ctr"/>
+          <a:lstStyle/>
+          <a:p>
+            <a:pPr indent="0" marL="0">
+              <a:buNone/>
+            </a:pPr>
+            <a:r>
+              <a:rPr lang="en-US" sz="950" dirty="0">
+                <a:solidFill>
+                  <a:srgbClr val="13233F"/>
+                </a:solidFill>
+                <a:latin typeface="Calibri" pitchFamily="34" charset="0"/>
+                <a:ea typeface="Calibri" pitchFamily="34" charset="-122"/>
+                <a:cs typeface="Calibri" pitchFamily="34" charset="-120"/>
+              </a:rPr>
+              <a:t>API accessibility</a:t>
+            </a:r>
+            <a:endParaRPr lang="en-US" sz="950" dirty="0"/>
+          </a:p>
+        </p:txBody>
+      </p:sp>
+      <p:sp>
+        <p:nvSpPr>
+          <p:cNvPr id="20" name="Shape 18"/>
+          <p:cNvSpPr/>
+          <p:nvPr/>
+        </p:nvSpPr>
+        <p:spPr>
+          <a:xfrm>
+            <a:off x="2331720" y="3465576"/>
+            <a:ext cx="1783080" cy="146304"/>
+          </a:xfrm>
+          <a:prstGeom prst="rect">
+            <a:avLst/>
+          </a:prstGeom>
+          <a:solidFill>
+            <a:srgbClr val="D6E0F2"/>
+          </a:solidFill>
+          <a:ln/>
+        </p:spPr>
+      </p:sp>
+      <p:sp>
+        <p:nvSpPr>
+          <p:cNvPr id="21" name="Shape 19"/>
+          <p:cNvSpPr/>
+          <p:nvPr/>
+        </p:nvSpPr>
+        <p:spPr>
+          <a:xfrm>
+            <a:off x="2331720" y="3465576"/>
+            <a:ext cx="713232" cy="146304"/>
+          </a:xfrm>
+          <a:prstGeom prst="rect">
+            <a:avLst/>
+          </a:prstGeom>
+          <a:solidFill>
+            <a:srgbClr val="175FF8"/>
+          </a:solidFill>
+          <a:ln/>
+        </p:spPr>
+      </p:sp>
+      <p:sp>
+        <p:nvSpPr>
+          <p:cNvPr id="22" name="Text 20"/>
+          <p:cNvSpPr/>
+          <p:nvPr/>
+        </p:nvSpPr>
+        <p:spPr>
+          <a:xfrm>
+            <a:off x="4206240" y="3419856"/>
+            <a:ext cx="457200" cy="256032"/>
+          </a:xfrm>
+          <a:prstGeom prst="rect">
+            <a:avLst/>
+          </a:prstGeom>
+          <a:noFill/>
+          <a:ln/>
+        </p:spPr>
+        <p:txBody>
+          <a:bodyPr wrap="square" lIns="0" tIns="0" rIns="0" bIns="0" rtlCol="0" anchor="ctr"/>
+          <a:lstStyle/>
+          <a:p>
+            <a:pPr indent="0" marL="0">
+              <a:buNone/>
+            </a:pPr>
+            <a:r>
+              <a:rPr lang="en-US" sz="950" b="1" dirty="0">
+                <a:solidFill>
+                  <a:srgbClr val="13233F"/>
+                </a:solidFill>
+                <a:latin typeface="Calibri" pitchFamily="34" charset="0"/>
+                <a:ea typeface="Calibri" pitchFamily="34" charset="-122"/>
+                <a:cs typeface="Calibri" pitchFamily="34" charset="-120"/>
+              </a:rPr>
+              <a:t>2.0</a:t>
+            </a:r>
+            <a:endParaRPr lang="en-US" sz="950" dirty="0"/>
+          </a:p>
+        </p:txBody>
+      </p:sp>
+      <p:sp>
+        <p:nvSpPr>
+          <p:cNvPr id="23" name="Text 21"/>
+          <p:cNvSpPr/>
+          <p:nvPr/>
+        </p:nvSpPr>
+        <p:spPr>
+          <a:xfrm>
+            <a:off x="640080" y="3730752"/>
+            <a:ext cx="1645920" cy="256032"/>
+          </a:xfrm>
+          <a:prstGeom prst="rect">
+            <a:avLst/>
+          </a:prstGeom>
+          <a:noFill/>
+          <a:ln/>
+        </p:spPr>
+        <p:txBody>
+          <a:bodyPr wrap="square" lIns="0" tIns="0" rIns="0" bIns="0" rtlCol="0" anchor="ctr"/>
+          <a:lstStyle/>
+          <a:p>
+            <a:pPr indent="0" marL="0">
+              <a:buNone/>
+            </a:pPr>
+            <a:r>
+              <a:rPr lang="en-US" sz="950" dirty="0">
+                <a:solidFill>
+                  <a:srgbClr val="13233F"/>
+                </a:solidFill>
+                <a:latin typeface="Calibri" pitchFamily="34" charset="0"/>
+                <a:ea typeface="Calibri" pitchFamily="34" charset="-122"/>
+                <a:cs typeface="Calibri" pitchFamily="34" charset="-120"/>
+              </a:rPr>
+              <a:t>SDK quality</a:t>
+            </a:r>
+            <a:endParaRPr lang="en-US" sz="950" dirty="0"/>
+          </a:p>
+        </p:txBody>
+      </p:sp>
+      <p:sp>
+        <p:nvSpPr>
+          <p:cNvPr id="24" name="Shape 22"/>
+          <p:cNvSpPr/>
+          <p:nvPr/>
+        </p:nvSpPr>
+        <p:spPr>
+          <a:xfrm>
+            <a:off x="2331720" y="3776472"/>
+            <a:ext cx="1783080" cy="146304"/>
+          </a:xfrm>
+          <a:prstGeom prst="rect">
+            <a:avLst/>
+          </a:prstGeom>
+          <a:solidFill>
+            <a:srgbClr val="D6E0F2"/>
+          </a:solidFill>
+          <a:ln/>
+        </p:spPr>
+      </p:sp>
+      <p:sp>
+        <p:nvSpPr>
+          <p:cNvPr id="25" name="Shape 23"/>
+          <p:cNvSpPr/>
+          <p:nvPr/>
+        </p:nvSpPr>
+        <p:spPr>
+          <a:xfrm>
+            <a:off x="2331720" y="3776472"/>
+            <a:ext cx="1069848" cy="146304"/>
+          </a:xfrm>
+          <a:prstGeom prst="rect">
+            <a:avLst/>
+          </a:prstGeom>
+          <a:solidFill>
+            <a:srgbClr val="13BFA3"/>
+          </a:solidFill>
+          <a:ln/>
+        </p:spPr>
+      </p:sp>
+      <p:sp>
+        <p:nvSpPr>
+          <p:cNvPr id="26" name="Text 24"/>
+          <p:cNvSpPr/>
+          <p:nvPr/>
+        </p:nvSpPr>
+        <p:spPr>
+          <a:xfrm>
+            <a:off x="4206240" y="3730752"/>
+            <a:ext cx="457200" cy="256032"/>
+          </a:xfrm>
+          <a:prstGeom prst="rect">
+            <a:avLst/>
+          </a:prstGeom>
+          <a:noFill/>
+          <a:ln/>
+        </p:spPr>
+        <p:txBody>
+          <a:bodyPr wrap="square" lIns="0" tIns="0" rIns="0" bIns="0" rtlCol="0" anchor="ctr"/>
+          <a:lstStyle/>
+          <a:p>
+            <a:pPr indent="0" marL="0">
+              <a:buNone/>
+            </a:pPr>
+            <a:r>
+              <a:rPr lang="en-US" sz="950" b="1" dirty="0">
+                <a:solidFill>
+                  <a:srgbClr val="13233F"/>
+                </a:solidFill>
+                <a:latin typeface="Calibri" pitchFamily="34" charset="0"/>
+                <a:ea typeface="Calibri" pitchFamily="34" charset="-122"/>
+                <a:cs typeface="Calibri" pitchFamily="34" charset="-120"/>
+              </a:rPr>
+              <a:t>3.0</a:t>
+            </a:r>
+            <a:endParaRPr lang="en-US" sz="950" dirty="0"/>
+          </a:p>
+        </p:txBody>
+      </p:sp>
+      <p:sp>
+        <p:nvSpPr>
+          <p:cNvPr id="27" name="Text 25"/>
+          <p:cNvSpPr/>
+          <p:nvPr/>
+        </p:nvSpPr>
+        <p:spPr>
+          <a:xfrm>
+            <a:off x="640080" y="4041648"/>
+            <a:ext cx="1645920" cy="256032"/>
+          </a:xfrm>
+          <a:prstGeom prst="rect">
+            <a:avLst/>
+          </a:prstGeom>
+          <a:noFill/>
+          <a:ln/>
+        </p:spPr>
+        <p:txBody>
+          <a:bodyPr wrap="square" lIns="0" tIns="0" rIns="0" bIns="0" rtlCol="0" anchor="ctr"/>
+          <a:lstStyle/>
+          <a:p>
+            <a:pPr indent="0" marL="0">
+              <a:buNone/>
+            </a:pPr>
+            <a:r>
+              <a:rPr lang="en-US" sz="950" dirty="0">
+                <a:solidFill>
+                  <a:srgbClr val="13233F"/>
+                </a:solidFill>
+                <a:latin typeface="Calibri" pitchFamily="34" charset="0"/>
+                <a:ea typeface="Calibri" pitchFamily="34" charset="-122"/>
+                <a:cs typeface="Calibri" pitchFamily="34" charset="-120"/>
+              </a:rPr>
+              <a:t>Sandbox / testing</a:t>
+            </a:r>
+            <a:endParaRPr lang="en-US" sz="950" dirty="0"/>
+          </a:p>
+        </p:txBody>
+      </p:sp>
+      <p:sp>
+        <p:nvSpPr>
+          <p:cNvPr id="28" name="Shape 26"/>
+          <p:cNvSpPr/>
+          <p:nvPr/>
+        </p:nvSpPr>
+        <p:spPr>
+          <a:xfrm>
+            <a:off x="2331720" y="4087368"/>
+            <a:ext cx="1783080" cy="146304"/>
+          </a:xfrm>
+          <a:prstGeom prst="rect">
+            <a:avLst/>
+          </a:prstGeom>
+          <a:solidFill>
+            <a:srgbClr val="D6E0F2"/>
+          </a:solidFill>
+          <a:ln/>
+        </p:spPr>
+      </p:sp>
+      <p:sp>
+        <p:nvSpPr>
+          <p:cNvPr id="29" name="Shape 27"/>
+          <p:cNvSpPr/>
+          <p:nvPr/>
+        </p:nvSpPr>
+        <p:spPr>
+          <a:xfrm>
+            <a:off x="2331720" y="4087368"/>
+            <a:ext cx="1426464" cy="146304"/>
+          </a:xfrm>
+          <a:prstGeom prst="rect">
+            <a:avLst/>
+          </a:prstGeom>
+          <a:solidFill>
+            <a:srgbClr val="13BFA3"/>
+          </a:solidFill>
+          <a:ln/>
+        </p:spPr>
+      </p:sp>
+      <p:sp>
+        <p:nvSpPr>
+          <p:cNvPr id="30" name="Text 28"/>
+          <p:cNvSpPr/>
+          <p:nvPr/>
+        </p:nvSpPr>
+        <p:spPr>
+          <a:xfrm>
+            <a:off x="4206240" y="4041648"/>
+            <a:ext cx="457200" cy="256032"/>
+          </a:xfrm>
+          <a:prstGeom prst="rect">
+            <a:avLst/>
+          </a:prstGeom>
+          <a:noFill/>
+          <a:ln/>
+        </p:spPr>
+        <p:txBody>
+          <a:bodyPr wrap="square" lIns="0" tIns="0" rIns="0" bIns="0" rtlCol="0" anchor="ctr"/>
+          <a:lstStyle/>
+          <a:p>
+            <a:pPr indent="0" marL="0">
+              <a:buNone/>
+            </a:pPr>
+            <a:r>
+              <a:rPr lang="en-US" sz="950" b="1" dirty="0">
+                <a:solidFill>
+                  <a:srgbClr val="13233F"/>
+                </a:solidFill>
+                <a:latin typeface="Calibri" pitchFamily="34" charset="0"/>
+                <a:ea typeface="Calibri" pitchFamily="34" charset="-122"/>
+                <a:cs typeface="Calibri" pitchFamily="34" charset="-120"/>
+              </a:rPr>
+              <a:t>4.0</a:t>
+            </a:r>
+            <a:endParaRPr lang="en-US" sz="950" dirty="0"/>
+          </a:p>
+        </p:txBody>
+      </p:sp>
+      <p:sp>
+        <p:nvSpPr>
+          <p:cNvPr id="31" name="Text 29"/>
+          <p:cNvSpPr/>
+          <p:nvPr/>
+        </p:nvSpPr>
+        <p:spPr>
+          <a:xfrm>
+            <a:off x="640080" y="4352544"/>
+            <a:ext cx="1645920" cy="256032"/>
+          </a:xfrm>
+          <a:prstGeom prst="rect">
+            <a:avLst/>
+          </a:prstGeom>
+          <a:noFill/>
+          <a:ln/>
+        </p:spPr>
+        <p:txBody>
+          <a:bodyPr wrap="square" lIns="0" tIns="0" rIns="0" bIns="0" rtlCol="0" anchor="ctr"/>
+          <a:lstStyle/>
+          <a:p>
+            <a:pPr indent="0" marL="0">
+              <a:buNone/>
+            </a:pPr>
+            <a:r>
+              <a:rPr lang="en-US" sz="950" dirty="0">
+                <a:solidFill>
+                  <a:srgbClr val="13233F"/>
+                </a:solidFill>
+                <a:latin typeface="Calibri" pitchFamily="34" charset="0"/>
+                <a:ea typeface="Calibri" pitchFamily="34" charset="-122"/>
+                <a:cs typeface="Calibri" pitchFamily="34" charset="-120"/>
+              </a:rPr>
+              <a:t>Onboarding speed</a:t>
+            </a:r>
+            <a:endParaRPr lang="en-US" sz="950" dirty="0"/>
+          </a:p>
+        </p:txBody>
+      </p:sp>
+      <p:sp>
+        <p:nvSpPr>
+          <p:cNvPr id="32" name="Shape 30"/>
+          <p:cNvSpPr/>
+          <p:nvPr/>
+        </p:nvSpPr>
+        <p:spPr>
+          <a:xfrm>
+            <a:off x="2331720" y="4398264"/>
+            <a:ext cx="1783080" cy="146304"/>
+          </a:xfrm>
+          <a:prstGeom prst="rect">
+            <a:avLst/>
+          </a:prstGeom>
+          <a:solidFill>
+            <a:srgbClr val="D6E0F2"/>
+          </a:solidFill>
+          <a:ln/>
+        </p:spPr>
+      </p:sp>
+      <p:sp>
+        <p:nvSpPr>
+          <p:cNvPr id="33" name="Shape 31"/>
+          <p:cNvSpPr/>
+          <p:nvPr/>
+        </p:nvSpPr>
+        <p:spPr>
+          <a:xfrm>
+            <a:off x="2331720" y="4398264"/>
+            <a:ext cx="1426464" cy="146304"/>
+          </a:xfrm>
+          <a:prstGeom prst="rect">
+            <a:avLst/>
+          </a:prstGeom>
+          <a:solidFill>
+            <a:srgbClr val="13BFA3"/>
+          </a:solidFill>
+          <a:ln/>
+        </p:spPr>
+      </p:sp>
+      <p:sp>
+        <p:nvSpPr>
+          <p:cNvPr id="34" name="Text 32"/>
+          <p:cNvSpPr/>
+          <p:nvPr/>
+        </p:nvSpPr>
+        <p:spPr>
+          <a:xfrm>
+            <a:off x="4206240" y="4352544"/>
+            <a:ext cx="457200" cy="256032"/>
+          </a:xfrm>
+          <a:prstGeom prst="rect">
+            <a:avLst/>
+          </a:prstGeom>
+          <a:noFill/>
+          <a:ln/>
+        </p:spPr>
+        <p:txBody>
+          <a:bodyPr wrap="square" lIns="0" tIns="0" rIns="0" bIns="0" rtlCol="0" anchor="ctr"/>
+          <a:lstStyle/>
+          <a:p>
+            <a:pPr indent="0" marL="0">
+              <a:buNone/>
+            </a:pPr>
+            <a:r>
+              <a:rPr lang="en-US" sz="950" b="1" dirty="0">
+                <a:solidFill>
+                  <a:srgbClr val="13233F"/>
+                </a:solidFill>
+                <a:latin typeface="Calibri" pitchFamily="34" charset="0"/>
+                <a:ea typeface="Calibri" pitchFamily="34" charset="-122"/>
+                <a:cs typeface="Calibri" pitchFamily="34" charset="-120"/>
+              </a:rPr>
+              <a:t>4.0</a:t>
+            </a:r>
+            <a:endParaRPr lang="en-US" sz="950" dirty="0"/>
+          </a:p>
+        </p:txBody>
+      </p:sp>
+      <p:sp>
+        <p:nvSpPr>
+          <p:cNvPr id="35" name="Shape 33"/>
+          <p:cNvSpPr/>
+          <p:nvPr/>
+        </p:nvSpPr>
+        <p:spPr>
+          <a:xfrm>
+            <a:off x="5074920" y="2395728"/>
+            <a:ext cx="3474720" cy="2212848"/>
+          </a:xfrm>
+          <a:prstGeom prst="rect">
+            <a:avLst/>
+          </a:prstGeom>
+          <a:solidFill>
+            <a:srgbClr val="0A2540"/>
+          </a:solidFill>
+          <a:ln/>
+        </p:spPr>
+      </p:sp>
+      <p:sp>
+        <p:nvSpPr>
+          <p:cNvPr id="36" name="Shape 34"/>
+          <p:cNvSpPr/>
+          <p:nvPr/>
+        </p:nvSpPr>
+        <p:spPr>
+          <a:xfrm>
+            <a:off x="5074920" y="2395728"/>
+            <a:ext cx="73152" cy="2212848"/>
+          </a:xfrm>
+          <a:prstGeom prst="rect">
+            <a:avLst/>
+          </a:prstGeom>
+          <a:solidFill>
+            <a:srgbClr val="4CC3FF"/>
+          </a:solidFill>
+          <a:ln/>
+        </p:spPr>
+      </p:sp>
+      <p:sp>
+        <p:nvSpPr>
+          <p:cNvPr id="37" name="Text 35"/>
+          <p:cNvSpPr/>
+          <p:nvPr/>
+        </p:nvSpPr>
+        <p:spPr>
+          <a:xfrm>
+            <a:off x="5285232" y="2505456"/>
+            <a:ext cx="3108960" cy="228600"/>
+          </a:xfrm>
+          <a:prstGeom prst="rect">
+            <a:avLst/>
+          </a:prstGeom>
+          <a:noFill/>
+          <a:ln/>
+        </p:spPr>
+        <p:txBody>
+          <a:bodyPr wrap="square" lIns="0" tIns="0" rIns="0" bIns="0" rtlCol="0" anchor="ctr"/>
+          <a:lstStyle/>
+          <a:p>
+            <a:pPr indent="0" marL="0">
+              <a:buNone/>
+            </a:pPr>
+            <a:r>
+              <a:rPr lang="en-US" sz="950" b="1" spc="100" kern="0" dirty="0">
                 <a:solidFill>
                   <a:srgbClr val="4CC3FF"/>
                 </a:solidFill>
-                <a:latin typeface="Georgia" pitchFamily="34" charset="0"/>
-                <a:ea typeface="Georgia" pitchFamily="34" charset="-122"/>
-                <a:cs typeface="Georgia" pitchFamily="34" charset="-120"/>
-              </a:rPr>
-              <a:t>Two things, neither of them a cheque.</a:t>
-            </a:r>
-            <a:endParaRPr lang="en-US" sz="1900" dirty="0"/>
-          </a:p>
-        </p:txBody>
-      </p:sp>
-      <p:sp>
-        <p:nvSpPr>
-          <p:cNvPr id="6" name="Text 4"/>
-          <p:cNvSpPr/>
-          <p:nvPr/>
-        </p:nvSpPr>
-        <p:spPr>
-          <a:xfrm>
-            <a:off x="640080" y="2514600"/>
-            <a:ext cx="457200" cy="640080"/>
-          </a:xfrm>
-          <a:prstGeom prst="rect">
-            <a:avLst/>
-          </a:prstGeom>
-          <a:noFill/>
-          <a:ln/>
-        </p:spPr>
-        <p:txBody>
-          <a:bodyPr wrap="square" lIns="0" tIns="0" rIns="0" bIns="0" rtlCol="0" anchor="ctr"/>
-          <a:lstStyle/>
-          <a:p>
-            <a:pPr indent="0" marL="0">
-              <a:buNone/>
-            </a:pPr>
-            <a:r>
-              <a:rPr lang="en-US" sz="3000" b="1" dirty="0">
-                <a:solidFill>
-                  <a:srgbClr val="4CC3FF"/>
-                </a:solidFill>
-                <a:latin typeface="Georgia" pitchFamily="34" charset="0"/>
-                <a:ea typeface="Georgia" pitchFamily="34" charset="-122"/>
-                <a:cs typeface="Georgia" pitchFamily="34" charset="-120"/>
-              </a:rPr>
-              <a:t>1</a:t>
-            </a:r>
-            <a:endParaRPr lang="en-US" sz="3000" dirty="0"/>
-          </a:p>
-        </p:txBody>
-      </p:sp>
-      <p:sp>
-        <p:nvSpPr>
-          <p:cNvPr id="7" name="Text 5"/>
-          <p:cNvSpPr/>
-          <p:nvPr/>
-        </p:nvSpPr>
-        <p:spPr>
-          <a:xfrm>
-            <a:off x="1188720" y="2532888"/>
-            <a:ext cx="7315200" cy="1005840"/>
+                <a:latin typeface="Calibri" pitchFamily="34" charset="0"/>
+                <a:ea typeface="Calibri" pitchFamily="34" charset="-122"/>
+                <a:cs typeface="Calibri" pitchFamily="34" charset="-120"/>
+              </a:rPr>
+              <a:t>WHAT PAYNOW ALREADY WINS</a:t>
+            </a:r>
+            <a:endParaRPr lang="en-US" sz="950" dirty="0"/>
+          </a:p>
+        </p:txBody>
+      </p:sp>
+      <p:sp>
+        <p:nvSpPr>
+          <p:cNvPr id="38" name="Shape 36"/>
+          <p:cNvSpPr/>
+          <p:nvPr/>
+        </p:nvSpPr>
+        <p:spPr>
+          <a:xfrm>
+            <a:off x="5303520" y="2852928"/>
+            <a:ext cx="91440" cy="91440"/>
+          </a:xfrm>
+          <a:prstGeom prst="ellipse">
+            <a:avLst/>
+          </a:prstGeom>
+          <a:solidFill>
+            <a:srgbClr val="4CC3FF"/>
+          </a:solidFill>
+          <a:ln/>
+        </p:spPr>
+      </p:sp>
+      <p:sp>
+        <p:nvSpPr>
+          <p:cNvPr id="39" name="Text 37"/>
+          <p:cNvSpPr/>
+          <p:nvPr/>
+        </p:nvSpPr>
+        <p:spPr>
+          <a:xfrm>
+            <a:off x="5486400" y="2798064"/>
+            <a:ext cx="2926080" cy="347472"/>
           </a:xfrm>
           <a:prstGeom prst="rect">
             <a:avLst/>
@@ -20957,24 +21850,7 @@
               <a:buNone/>
             </a:pPr>
             <a:r>
-              <a:rPr lang="en-US" sz="1700" b="1" dirty="0">
-                <a:solidFill>
-                  <a:srgbClr val="EEF3FF"/>
-                </a:solidFill>
-                <a:latin typeface="Calibri" pitchFamily="34" charset="0"/>
-                <a:ea typeface="Calibri" pitchFamily="34" charset="-122"/>
-                <a:cs typeface="Calibri" pitchFamily="34" charset="-120"/>
-              </a:rPr>
-              <a:t>Access to your growing contacts   </a:t>
-            </a:r>
-            <a:endParaRPr lang="en-US" sz="1700" dirty="0"/>
-          </a:p>
-          <a:p>
-            <a:pPr indent="0" marL="0">
-              <a:buNone/>
-            </a:pPr>
-            <a:r>
-              <a:rPr lang="en-US" sz="1250" dirty="0">
+              <a:rPr lang="en-US" sz="870" dirty="0">
                 <a:solidFill>
                   <a:srgbClr val="AEC2E0"/>
                 </a:solidFill>
@@ -20982,61 +21858,42 @@
                 <a:ea typeface="Calibri" pitchFamily="34" charset="-122"/>
                 <a:cs typeface="Calibri" pitchFamily="34" charset="-120"/>
               </a:rPr>
-              <a:t>Paynow's expanding network of merchants, billers and industry relationships — as the starting point for selling this settlement engine into the livestock market. Your contacts are the doors; I do the on-the-ground operating you don't want to.</a:t>
-            </a:r>
-            <a:endParaRPr lang="en-US" sz="1700" dirty="0"/>
-          </a:p>
-        </p:txBody>
-      </p:sp>
-      <p:sp>
-        <p:nvSpPr>
-          <p:cNvPr id="8" name="Text 6"/>
-          <p:cNvSpPr/>
-          <p:nvPr/>
-        </p:nvSpPr>
-        <p:spPr>
-          <a:xfrm>
-            <a:off x="640080" y="3611880"/>
-            <a:ext cx="457200" cy="640080"/>
-          </a:xfrm>
-          <a:prstGeom prst="rect">
-            <a:avLst/>
-          </a:prstGeom>
-          <a:noFill/>
-          <a:ln/>
-        </p:spPr>
-        <p:txBody>
-          <a:bodyPr wrap="square" lIns="0" tIns="0" rIns="0" bIns="0" rtlCol="0" anchor="ctr"/>
-          <a:lstStyle/>
-          <a:p>
-            <a:pPr indent="0" marL="0">
-              <a:buNone/>
-            </a:pPr>
-            <a:r>
-              <a:rPr lang="en-US" sz="3000" b="1" dirty="0">
-                <a:solidFill>
-                  <a:srgbClr val="4CC3FF"/>
-                </a:solidFill>
-                <a:latin typeface="Georgia" pitchFamily="34" charset="0"/>
-                <a:ea typeface="Georgia" pitchFamily="34" charset="-122"/>
-                <a:cs typeface="Georgia" pitchFamily="34" charset="-120"/>
-              </a:rPr>
-              <a:t>2</a:t>
-            </a:r>
-            <a:endParaRPr lang="en-US" sz="3000" dirty="0"/>
-          </a:p>
-        </p:txBody>
-      </p:sp>
-      <p:sp>
-        <p:nvSpPr>
-          <p:cNvPr id="9" name="Text 7"/>
-          <p:cNvSpPr/>
-          <p:nvPr/>
-        </p:nvSpPr>
-        <p:spPr>
-          <a:xfrm>
-            <a:off x="1188720" y="3630168"/>
-            <a:ext cx="7315200" cy="1005840"/>
+              <a:t>Widest local coverage — EcoCash, OneMoney, InnBucks, O'mari, Zimswitch, Visa/MC</a:t>
+            </a:r>
+            <a:endParaRPr lang="en-US" sz="870" dirty="0"/>
+          </a:p>
+        </p:txBody>
+      </p:sp>
+      <p:sp>
+        <p:nvSpPr>
+          <p:cNvPr id="40" name="Shape 38"/>
+          <p:cNvSpPr/>
+          <p:nvPr/>
+        </p:nvSpPr>
+        <p:spPr>
+          <a:xfrm>
+            <a:off x="5303520" y="3209544"/>
+            <a:ext cx="91440" cy="91440"/>
+          </a:xfrm>
+          <a:prstGeom prst="ellipse">
+            <a:avLst/>
+          </a:prstGeom>
+          <a:solidFill>
+            <a:srgbClr val="4CC3FF"/>
+          </a:solidFill>
+          <a:ln/>
+        </p:spPr>
+      </p:sp>
+      <p:sp>
+        <p:nvSpPr>
+          <p:cNvPr id="41" name="Text 39"/>
+          <p:cNvSpPr/>
+          <p:nvPr/>
+        </p:nvSpPr>
+        <p:spPr>
+          <a:xfrm>
+            <a:off x="5486400" y="3154680"/>
+            <a:ext cx="2926080" cy="347472"/>
           </a:xfrm>
           <a:prstGeom prst="rect">
             <a:avLst/>
@@ -21052,24 +21909,7 @@
               <a:buNone/>
             </a:pPr>
             <a:r>
-              <a:rPr lang="en-US" sz="1700" b="1" dirty="0">
-                <a:solidFill>
-                  <a:srgbClr val="EEF3FF"/>
-                </a:solidFill>
-                <a:latin typeface="Calibri" pitchFamily="34" charset="0"/>
-                <a:ea typeface="Calibri" pitchFamily="34" charset="-122"/>
-                <a:cs typeface="Calibri" pitchFamily="34" charset="-120"/>
-              </a:rPr>
-              <a:t>Continued access to the rails &amp; core infrastructure   </a:t>
-            </a:r>
-            <a:endParaRPr lang="en-US" sz="1700" dirty="0"/>
-          </a:p>
-          <a:p>
-            <a:pPr indent="0" marL="0">
-              <a:buNone/>
-            </a:pPr>
-            <a:r>
-              <a:rPr lang="en-US" sz="1250" dirty="0">
+              <a:rPr lang="en-US" sz="870" dirty="0">
                 <a:solidFill>
                   <a:srgbClr val="AEC2E0"/>
                 </a:solidFill>
@@ -21077,15 +21917,192 @@
                 <a:ea typeface="Calibri" pitchFamily="34" charset="-122"/>
                 <a:cs typeface="Calibri" pitchFamily="34" charset="-120"/>
               </a:rPr>
-              <a:t>Keep me on the Paynow stack I've built ZimLivestock on — Core Express Checkout, BillPay-as-biller, EcoCash USSD, merchant transfers, SMS. The engine runs on your rails; staying plugged in is what keeps every dollar of GMV flowing onto them.</a:t>
-            </a:r>
-            <a:endParaRPr lang="en-US" sz="1700" dirty="0"/>
-          </a:p>
-        </p:txBody>
-      </p:sp>
-      <p:sp>
-        <p:nvSpPr>
-          <p:cNvPr id="10" name="Text 8"/>
+              <a:t>BuySafe escrow built in — Stripe charges extra; Paystack has none</a:t>
+            </a:r>
+            <a:endParaRPr lang="en-US" sz="870" dirty="0"/>
+          </a:p>
+        </p:txBody>
+      </p:sp>
+      <p:sp>
+        <p:nvSpPr>
+          <p:cNvPr id="42" name="Shape 40"/>
+          <p:cNvSpPr/>
+          <p:nvPr/>
+        </p:nvSpPr>
+        <p:spPr>
+          <a:xfrm>
+            <a:off x="5303520" y="3566160"/>
+            <a:ext cx="91440" cy="91440"/>
+          </a:xfrm>
+          <a:prstGeom prst="ellipse">
+            <a:avLst/>
+          </a:prstGeom>
+          <a:solidFill>
+            <a:srgbClr val="4CC3FF"/>
+          </a:solidFill>
+          <a:ln/>
+        </p:spPr>
+      </p:sp>
+      <p:sp>
+        <p:nvSpPr>
+          <p:cNvPr id="43" name="Text 41"/>
+          <p:cNvSpPr/>
+          <p:nvPr/>
+        </p:nvSpPr>
+        <p:spPr>
+          <a:xfrm>
+            <a:off x="5486400" y="3511296"/>
+            <a:ext cx="2926080" cy="347472"/>
+          </a:xfrm>
+          <a:prstGeom prst="rect">
+            <a:avLst/>
+          </a:prstGeom>
+          <a:noFill/>
+          <a:ln/>
+        </p:spPr>
+        <p:txBody>
+          <a:bodyPr wrap="square" lIns="0" tIns="0" rIns="0" bIns="0" rtlCol="0" anchor="t"/>
+          <a:lstStyle/>
+          <a:p>
+            <a:pPr indent="0" marL="0">
+              <a:buNone/>
+            </a:pPr>
+            <a:r>
+              <a:rPr lang="en-US" sz="870" dirty="0">
+                <a:solidFill>
+                  <a:srgbClr val="AEC2E0"/>
+                </a:solidFill>
+                <a:latin typeface="Calibri" pitchFamily="34" charset="0"/>
+                <a:ea typeface="Calibri" pitchFamily="34" charset="-122"/>
+                <a:cs typeface="Calibri" pitchFamily="34" charset="-120"/>
+              </a:rPr>
+              <a:t>Realistic test mode — success / delayed / cancelled / insufficient</a:t>
+            </a:r>
+            <a:endParaRPr lang="en-US" sz="870" dirty="0"/>
+          </a:p>
+        </p:txBody>
+      </p:sp>
+      <p:sp>
+        <p:nvSpPr>
+          <p:cNvPr id="44" name="Shape 42"/>
+          <p:cNvSpPr/>
+          <p:nvPr/>
+        </p:nvSpPr>
+        <p:spPr>
+          <a:xfrm>
+            <a:off x="5303520" y="3922776"/>
+            <a:ext cx="91440" cy="91440"/>
+          </a:xfrm>
+          <a:prstGeom prst="ellipse">
+            <a:avLst/>
+          </a:prstGeom>
+          <a:solidFill>
+            <a:srgbClr val="4CC3FF"/>
+          </a:solidFill>
+          <a:ln/>
+        </p:spPr>
+      </p:sp>
+      <p:sp>
+        <p:nvSpPr>
+          <p:cNvPr id="45" name="Text 43"/>
+          <p:cNvSpPr/>
+          <p:nvPr/>
+        </p:nvSpPr>
+        <p:spPr>
+          <a:xfrm>
+            <a:off x="5486400" y="3867912"/>
+            <a:ext cx="2926080" cy="347472"/>
+          </a:xfrm>
+          <a:prstGeom prst="rect">
+            <a:avLst/>
+          </a:prstGeom>
+          <a:noFill/>
+          <a:ln/>
+        </p:spPr>
+        <p:txBody>
+          <a:bodyPr wrap="square" lIns="0" tIns="0" rIns="0" bIns="0" rtlCol="0" anchor="t"/>
+          <a:lstStyle/>
+          <a:p>
+            <a:pPr indent="0" marL="0">
+              <a:buNone/>
+            </a:pPr>
+            <a:r>
+              <a:rPr lang="en-US" sz="870" dirty="0">
+                <a:solidFill>
+                  <a:srgbClr val="AEC2E0"/>
+                </a:solidFill>
+                <a:latin typeface="Calibri" pitchFamily="34" charset="0"/>
+                <a:ea typeface="Calibri" pitchFamily="34" charset="-122"/>
+                <a:cs typeface="Calibri" pitchFamily="34" charset="-120"/>
+              </a:rPr>
+              <a:t>BillPay Vendor API is genuinely well-designed (AUTH→PAY, JSON)</a:t>
+            </a:r>
+            <a:endParaRPr lang="en-US" sz="870" dirty="0"/>
+          </a:p>
+        </p:txBody>
+      </p:sp>
+      <p:sp>
+        <p:nvSpPr>
+          <p:cNvPr id="46" name="Shape 44"/>
+          <p:cNvSpPr/>
+          <p:nvPr/>
+        </p:nvSpPr>
+        <p:spPr>
+          <a:xfrm>
+            <a:off x="5303520" y="4279392"/>
+            <a:ext cx="91440" cy="91440"/>
+          </a:xfrm>
+          <a:prstGeom prst="ellipse">
+            <a:avLst/>
+          </a:prstGeom>
+          <a:solidFill>
+            <a:srgbClr val="4CC3FF"/>
+          </a:solidFill>
+          <a:ln/>
+        </p:spPr>
+      </p:sp>
+      <p:sp>
+        <p:nvSpPr>
+          <p:cNvPr id="47" name="Text 45"/>
+          <p:cNvSpPr/>
+          <p:nvPr/>
+        </p:nvSpPr>
+        <p:spPr>
+          <a:xfrm>
+            <a:off x="5486400" y="4224528"/>
+            <a:ext cx="2926080" cy="347472"/>
+          </a:xfrm>
+          <a:prstGeom prst="rect">
+            <a:avLst/>
+          </a:prstGeom>
+          <a:noFill/>
+          <a:ln/>
+        </p:spPr>
+        <p:txBody>
+          <a:bodyPr wrap="square" lIns="0" tIns="0" rIns="0" bIns="0" rtlCol="0" anchor="t"/>
+          <a:lstStyle/>
+          <a:p>
+            <a:pPr indent="0" marL="0">
+              <a:buNone/>
+            </a:pPr>
+            <a:r>
+              <a:rPr lang="en-US" sz="870" dirty="0">
+                <a:solidFill>
+                  <a:srgbClr val="AEC2E0"/>
+                </a:solidFill>
+                <a:latin typeface="Calibri" pitchFamily="34" charset="0"/>
+                <a:ea typeface="Calibri" pitchFamily="34" charset="-122"/>
+                <a:cs typeface="Calibri" pitchFamily="34" charset="-120"/>
+              </a:rPr>
+              <a:t>No minimum fees — works for micro-transactions</a:t>
+            </a:r>
+            <a:endParaRPr lang="en-US" sz="870" dirty="0"/>
+          </a:p>
+        </p:txBody>
+      </p:sp>
+      <p:sp>
+        <p:nvSpPr>
+          <p:cNvPr id="48" name="Text 46"/>
           <p:cNvSpPr/>
           <p:nvPr/>
         </p:nvSpPr>
@@ -21110,7 +22127,7 @@
             <a:r>
               <a:rPr lang="en-US" sz="800" spc="200" kern="0" dirty="0">
                 <a:solidFill>
-                  <a:srgbClr val="AEC2E0"/>
+                  <a:srgbClr val="5B6B86"/>
                 </a:solidFill>
                 <a:latin typeface="Calibri" pitchFamily="34" charset="0"/>
                 <a:ea typeface="Calibri" pitchFamily="34" charset="-122"/>
@@ -21124,7 +22141,7 @@
       </p:sp>
       <p:sp>
         <p:nvSpPr>
-          <p:cNvPr id="11" name="Text 9"/>
+          <p:cNvPr id="49" name="Text 47"/>
           <p:cNvSpPr/>
           <p:nvPr/>
         </p:nvSpPr>
@@ -21149,13 +22166,13 @@
             <a:r>
               <a:rPr lang="en-US" sz="800" dirty="0">
                 <a:solidFill>
-                  <a:srgbClr val="AEC2E0"/>
-                </a:solidFill>
-                <a:latin typeface="Calibri" pitchFamily="34" charset="0"/>
-                <a:ea typeface="Calibri" pitchFamily="34" charset="-122"/>
-                <a:cs typeface="Calibri" pitchFamily="34" charset="-120"/>
-              </a:rPr>
-              <a:t>28 / 29</a:t>
+                  <a:srgbClr val="5B6B86"/>
+                </a:solidFill>
+                <a:latin typeface="Calibri" pitchFamily="34" charset="0"/>
+                <a:ea typeface="Calibri" pitchFamily="34" charset="-122"/>
+                <a:cs typeface="Calibri" pitchFamily="34" charset="-120"/>
+              </a:rPr>
+              <a:t>28 / 31</a:t>
             </a:r>
             <a:endParaRPr lang="en-US" sz="800" dirty="0"/>
           </a:p>
@@ -21175,7 +22192,7 @@
     <p:bg>
       <p:bgPr>
         <a:solidFill>
-          <a:srgbClr val="0A2540"/>
+          <a:srgbClr val="EEF3FF"/>
         </a:solidFill>
       </p:bgPr>
     </p:bg>
@@ -21221,8 +22238,8 @@
         </p:nvSpPr>
         <p:spPr>
           <a:xfrm>
-            <a:off x="640080" y="502920"/>
-            <a:ext cx="7863840" cy="274320"/>
+            <a:off x="640080" y="457200"/>
+            <a:ext cx="7589520" cy="274320"/>
           </a:xfrm>
           <a:prstGeom prst="rect">
             <a:avLst/>
@@ -21240,13 +22257,13 @@
             <a:r>
               <a:rPr lang="en-US" sz="1100" b="1" spc="400" kern="0" dirty="0">
                 <a:solidFill>
-                  <a:srgbClr val="4CC3FF"/>
-                </a:solidFill>
-                <a:latin typeface="Calibri" pitchFamily="34" charset="0"/>
-                <a:ea typeface="Calibri" pitchFamily="34" charset="-122"/>
-                <a:cs typeface="Calibri" pitchFamily="34" charset="-120"/>
-              </a:rPr>
-              <a:t>THE ONE-PARAGRAPH VERSION</a:t>
+                  <a:srgbClr val="175FF8"/>
+                </a:solidFill>
+                <a:latin typeface="Calibri" pitchFamily="34" charset="0"/>
+                <a:ea typeface="Calibri" pitchFamily="34" charset="-122"/>
+                <a:cs typeface="Calibri" pitchFamily="34" charset="-120"/>
+              </a:rPr>
+              <a:t>DEVELOPER EXPERIENCE BENCHMARK · SOLUTIONS</a:t>
             </a:r>
             <a:endParaRPr lang="en-US" sz="1100" dirty="0"/>
           </a:p>
@@ -21260,100 +22277,34 @@
         </p:nvSpPr>
         <p:spPr>
           <a:xfrm>
-            <a:off x="640080" y="1051560"/>
-            <a:ext cx="7863840" cy="2286000"/>
-          </a:xfrm>
-          <a:prstGeom prst="rect">
-            <a:avLst/>
-          </a:prstGeom>
-          <a:noFill/>
-          <a:ln/>
-        </p:spPr>
-        <p:txBody>
-          <a:bodyPr wrap="square" lIns="0" tIns="0" rIns="0" bIns="0" rtlCol="0" anchor="ctr"/>
-          <a:lstStyle/>
-          <a:p>
-            <a:pPr indent="0" marL="0">
-              <a:lnSpc>
-                <a:spcPct val="112000"/>
-              </a:lnSpc>
-              <a:spcAft>
-                <a:spcPts val="400"/>
-              </a:spcAft>
-              <a:buNone/>
-            </a:pPr>
-            <a:r>
-              <a:rPr lang="en-US" sz="1600" dirty="0">
-                <a:solidFill>
-                  <a:srgbClr val="EEF3FF"/>
+            <a:off x="640080" y="841248"/>
+            <a:ext cx="7955280" cy="777240"/>
+          </a:xfrm>
+          <a:prstGeom prst="rect">
+            <a:avLst/>
+          </a:prstGeom>
+          <a:noFill/>
+          <a:ln/>
+        </p:spPr>
+        <p:txBody>
+          <a:bodyPr wrap="square" lIns="0" tIns="0" rIns="0" bIns="0" rtlCol="0" anchor="ctr"/>
+          <a:lstStyle/>
+          <a:p>
+            <a:pPr indent="0" marL="0">
+              <a:buNone/>
+            </a:pPr>
+            <a:r>
+              <a:rPr lang="en-US" sz="3100" b="1" dirty="0">
+                <a:solidFill>
+                  <a:srgbClr val="13233F"/>
                 </a:solidFill>
                 <a:latin typeface="Georgia" pitchFamily="34" charset="0"/>
                 <a:ea typeface="Georgia" pitchFamily="34" charset="-122"/>
                 <a:cs typeface="Georgia" pitchFamily="34" charset="-120"/>
               </a:rPr>
-              <a:t>I sat through a real sale day, found four problems the auction floor can't solve, and built a digital floor on Paynow rails that already runs in production.  </a:t>
-            </a:r>
-            <a:pPr indent="0" marL="0">
-              <a:lnSpc>
-                <a:spcPct val="112000"/>
-              </a:lnSpc>
-              <a:spcAft>
-                <a:spcPts val="400"/>
-              </a:spcAft>
-              <a:buNone/>
-            </a:pPr>
-            <a:r>
-              <a:rPr lang="en-US" sz="1600" b="1" dirty="0">
-                <a:solidFill>
-                  <a:srgbClr val="4CC3FF"/>
-                </a:solidFill>
-                <a:latin typeface="Georgia" pitchFamily="34" charset="0"/>
-                <a:ea typeface="Georgia" pitchFamily="34" charset="-122"/>
-                <a:cs typeface="Georgia" pitchFamily="34" charset="-120"/>
-              </a:rPr>
-              <a:t>It turns out to be the money layer that three of four national cattle-digitization initiatives lack — the settlement, payout and title-transfer engine the identity layers plug into.  </a:t>
-            </a:r>
-            <a:pPr indent="0" marL="0">
-              <a:lnSpc>
-                <a:spcPct val="112000"/>
-              </a:lnSpc>
-              <a:spcAft>
-                <a:spcPts val="400"/>
-              </a:spcAft>
-              <a:buNone/>
-            </a:pPr>
-            <a:r>
-              <a:rPr lang="en-US" sz="1600" dirty="0">
-                <a:solidFill>
-                  <a:srgbClr val="EEF3FF"/>
-                </a:solidFill>
-                <a:latin typeface="Georgia" pitchFamily="34" charset="0"/>
-                <a:ea typeface="Georgia" pitchFamily="34" charset="-122"/>
-                <a:cs typeface="Georgia" pitchFamily="34" charset="-120"/>
-              </a:rPr>
-              <a:t>The five-year plan reaches 20 houses — about a third of the market — for US$1.03M revenue and a US$346,583 cumulative surplus, self-funded, routing over US$19.5M onto Paynow rails.  </a:t>
-            </a:r>
-            <a:pPr indent="0" marL="0">
-              <a:lnSpc>
-                <a:spcPct val="112000"/>
-              </a:lnSpc>
-              <a:spcAft>
-                <a:spcPts val="400"/>
-              </a:spcAft>
-              <a:buNone/>
-            </a:pPr>
-            <a:r>
-              <a:rPr lang="en-US" sz="1600" b="1" dirty="0">
-                <a:solidFill>
-                  <a:srgbClr val="4CC3FF"/>
-                </a:solidFill>
-                <a:latin typeface="Georgia" pitchFamily="34" charset="0"/>
-                <a:ea typeface="Georgia" pitchFamily="34" charset="-122"/>
-                <a:cs typeface="Georgia" pitchFamily="34" charset="-120"/>
-              </a:rPr>
-              <a:t>The ask is one 90-day paid pilot to land the first anchor and prove the playbook.</a:t>
-            </a:r>
-            <a:endParaRPr lang="en-US" sz="1600" dirty="0"/>
+              <a:t>Nine recommendations, ranked by severity.</a:t>
+            </a:r>
+            <a:endParaRPr lang="en-US" sz="3100" dirty="0"/>
           </a:p>
         </p:txBody>
       </p:sp>
@@ -21365,47 +22316,8 @@
         </p:nvSpPr>
         <p:spPr>
           <a:xfrm>
-            <a:off x="640080" y="3657600"/>
-            <a:ext cx="7863840" cy="457200"/>
-          </a:xfrm>
-          <a:prstGeom prst="rect">
-            <a:avLst/>
-          </a:prstGeom>
-          <a:noFill/>
-          <a:ln/>
-        </p:spPr>
-        <p:txBody>
-          <a:bodyPr wrap="square" lIns="0" tIns="0" rIns="0" bIns="0" rtlCol="0" anchor="ctr"/>
-          <a:lstStyle/>
-          <a:p>
-            <a:pPr indent="0" marL="0">
-              <a:buNone/>
-            </a:pPr>
-            <a:r>
-              <a:rPr lang="en-US" sz="2000" b="1" i="1" dirty="0">
-                <a:solidFill>
-                  <a:srgbClr val="4CC3FF"/>
-                </a:solidFill>
-                <a:latin typeface="Georgia" pitchFamily="34" charset="0"/>
-                <a:ea typeface="Georgia" pitchFamily="34" charset="-122"/>
-                <a:cs typeface="Georgia" pitchFamily="34" charset="-120"/>
-              </a:rPr>
-              <a:t>Build software you can sell — and a business this market can actually carry.</a:t>
-            </a:r>
-            <a:endParaRPr lang="en-US" sz="2000" dirty="0"/>
-          </a:p>
-        </p:txBody>
-      </p:sp>
-      <p:sp>
-        <p:nvSpPr>
-          <p:cNvPr id="6" name="Text 4"/>
-          <p:cNvSpPr/>
-          <p:nvPr/>
-        </p:nvSpPr>
-        <p:spPr>
-          <a:xfrm>
-            <a:off x="640080" y="4526280"/>
-            <a:ext cx="7863840" cy="274320"/>
+            <a:off x="640080" y="1627632"/>
+            <a:ext cx="7955280" cy="548640"/>
           </a:xfrm>
           <a:prstGeom prst="rect">
             <a:avLst/>
@@ -21421,31 +22333,662 @@
               <a:buNone/>
             </a:pPr>
             <a:r>
-              <a:rPr lang="en-US" sz="1100" b="1" dirty="0">
-                <a:solidFill>
-                  <a:srgbClr val="EEF3FF"/>
-                </a:solidFill>
-                <a:latin typeface="Calibri" pitchFamily="34" charset="0"/>
-                <a:ea typeface="Calibri" pitchFamily="34" charset="-122"/>
-                <a:cs typeface="Calibri" pitchFamily="34" charset="-120"/>
-              </a:rPr>
-              <a:t>Tatenda Nyemudzo</a:t>
-            </a:r>
-            <a:pPr indent="0" marL="0">
-              <a:buNone/>
-            </a:pPr>
-            <a:r>
-              <a:rPr lang="en-US" sz="1100" dirty="0">
-                <a:solidFill>
-                  <a:srgbClr val="AEC2E0"/>
-                </a:solidFill>
-                <a:latin typeface="Calibri" pitchFamily="34" charset="0"/>
-                <a:ea typeface="Calibri" pitchFamily="34" charset="-122"/>
-                <a:cs typeface="Calibri" pitchFamily="34" charset="-120"/>
-              </a:rPr>
-              <a:t>    dev@paynow.co.zw    ·    companions: gtm-strategy.md · financial-model.xlsx · national-initiative-alignment.md · paynow-dx-recommendations.md</a:t>
-            </a:r>
-            <a:endParaRPr lang="en-US" sz="1100" dirty="0"/>
+              <a:rPr lang="en-US" sz="1300" dirty="0">
+                <a:solidFill>
+                  <a:srgbClr val="5B6B86"/>
+                </a:solidFill>
+                <a:latin typeface="Calibri" pitchFamily="34" charset="0"/>
+                <a:ea typeface="Calibri" pitchFamily="34" charset="-122"/>
+                <a:cs typeface="Calibri" pitchFamily="34" charset="-120"/>
+              </a:rPr>
+              <a:t>Every issue I hit became a concrete, defensible fix. The report is a gift to whoever builds on Paynow next.</a:t>
+            </a:r>
+            <a:endParaRPr lang="en-US" sz="1300" dirty="0"/>
+          </a:p>
+        </p:txBody>
+      </p:sp>
+      <p:sp>
+        <p:nvSpPr>
+          <p:cNvPr id="6" name="Shape 4"/>
+          <p:cNvSpPr/>
+          <p:nvPr/>
+        </p:nvSpPr>
+        <p:spPr>
+          <a:xfrm>
+            <a:off x="640080" y="2176272"/>
+            <a:ext cx="7863840" cy="512064"/>
+          </a:xfrm>
+          <a:prstGeom prst="rect">
+            <a:avLst/>
+          </a:prstGeom>
+          <a:solidFill>
+            <a:srgbClr val="FFFFFF"/>
+          </a:solidFill>
+          <a:ln/>
+          <a:effectLst>
+            <a:outerShdw sx="100000" sy="100000" kx="0" ky="0" algn="bl" rotWithShape="0" blurRad="63500" dist="12700" dir="5400000">
+              <a:srgbClr val="000000">
+                <a:alpha val="7000"/>
+              </a:srgbClr>
+            </a:outerShdw>
+          </a:effectLst>
+        </p:spPr>
+      </p:sp>
+      <p:sp>
+        <p:nvSpPr>
+          <p:cNvPr id="7" name="Shape 5"/>
+          <p:cNvSpPr/>
+          <p:nvPr/>
+        </p:nvSpPr>
+        <p:spPr>
+          <a:xfrm>
+            <a:off x="777240" y="2286000"/>
+            <a:ext cx="1097280" cy="329184"/>
+          </a:xfrm>
+          <a:prstGeom prst="rect">
+            <a:avLst/>
+          </a:prstGeom>
+          <a:solidFill>
+            <a:srgbClr val="E5484D"/>
+          </a:solidFill>
+          <a:ln/>
+        </p:spPr>
+      </p:sp>
+      <p:sp>
+        <p:nvSpPr>
+          <p:cNvPr id="8" name="Text 6"/>
+          <p:cNvSpPr/>
+          <p:nvPr/>
+        </p:nvSpPr>
+        <p:spPr>
+          <a:xfrm>
+            <a:off x="777240" y="2286000"/>
+            <a:ext cx="1097280" cy="329184"/>
+          </a:xfrm>
+          <a:prstGeom prst="rect">
+            <a:avLst/>
+          </a:prstGeom>
+          <a:noFill/>
+          <a:ln/>
+        </p:spPr>
+        <p:txBody>
+          <a:bodyPr wrap="square" lIns="0" tIns="0" rIns="0" bIns="0" rtlCol="0" anchor="ctr"/>
+          <a:lstStyle/>
+          <a:p>
+            <a:pPr algn="ctr" indent="0" marL="0">
+              <a:buNone/>
+            </a:pPr>
+            <a:r>
+              <a:rPr lang="en-US" sz="900" b="1" spc="100" kern="0" dirty="0">
+                <a:solidFill>
+                  <a:srgbClr val="FFFFFF"/>
+                </a:solidFill>
+                <a:latin typeface="Calibri" pitchFamily="34" charset="0"/>
+                <a:ea typeface="Calibri" pitchFamily="34" charset="-122"/>
+                <a:cs typeface="Calibri" pitchFamily="34" charset="-120"/>
+              </a:rPr>
+              <a:t>CRITICAL · 1</a:t>
+            </a:r>
+            <a:endParaRPr lang="en-US" sz="900" dirty="0"/>
+          </a:p>
+        </p:txBody>
+      </p:sp>
+      <p:sp>
+        <p:nvSpPr>
+          <p:cNvPr id="9" name="Text 7"/>
+          <p:cNvSpPr/>
+          <p:nvPr/>
+        </p:nvSpPr>
+        <p:spPr>
+          <a:xfrm>
+            <a:off x="2057400" y="2176272"/>
+            <a:ext cx="6309360" cy="512064"/>
+          </a:xfrm>
+          <a:prstGeom prst="rect">
+            <a:avLst/>
+          </a:prstGeom>
+          <a:noFill/>
+          <a:ln/>
+        </p:spPr>
+        <p:txBody>
+          <a:bodyPr wrap="square" lIns="0" tIns="0" rIns="0" bIns="0" rtlCol="0" anchor="ctr"/>
+          <a:lstStyle/>
+          <a:p>
+            <a:pPr indent="0" marL="0">
+              <a:buNone/>
+            </a:pPr>
+            <a:r>
+              <a:rPr lang="en-US" sz="1000" b="1" dirty="0">
+                <a:solidFill>
+                  <a:srgbClr val="13233F"/>
+                </a:solidFill>
+                <a:latin typeface="Calibri" pitchFamily="34" charset="0"/>
+                <a:ea typeface="Calibri" pitchFamily="34" charset="-122"/>
+                <a:cs typeface="Calibri" pitchFamily="34" charset="-120"/>
+              </a:rPr>
+              <a:t>Move the API off the bot-walled www domain — host it on api.paynow.co.zw with no Cloudflare challenge. </a:t>
+            </a:r>
+            <a:pPr indent="0" marL="0">
+              <a:buNone/>
+            </a:pPr>
+            <a:r>
+              <a:rPr lang="en-US" sz="1000" dirty="0">
+                <a:solidFill>
+                  <a:srgbClr val="5B6B86"/>
+                </a:solidFill>
+                <a:latin typeface="Calibri" pitchFamily="34" charset="0"/>
+                <a:ea typeface="Calibri" pitchFamily="34" charset="-122"/>
+                <a:cs typeface="Calibri" pitchFamily="34" charset="-120"/>
+              </a:rPr>
+              <a:t>This is exactly why the live demo routes through a browser-relay.</a:t>
+            </a:r>
+            <a:endParaRPr lang="en-US" sz="1000" dirty="0"/>
+          </a:p>
+        </p:txBody>
+      </p:sp>
+      <p:sp>
+        <p:nvSpPr>
+          <p:cNvPr id="10" name="Shape 8"/>
+          <p:cNvSpPr/>
+          <p:nvPr/>
+        </p:nvSpPr>
+        <p:spPr>
+          <a:xfrm>
+            <a:off x="640080" y="2761488"/>
+            <a:ext cx="7863840" cy="512064"/>
+          </a:xfrm>
+          <a:prstGeom prst="rect">
+            <a:avLst/>
+          </a:prstGeom>
+          <a:solidFill>
+            <a:srgbClr val="FFFFFF"/>
+          </a:solidFill>
+          <a:ln/>
+          <a:effectLst>
+            <a:outerShdw sx="100000" sy="100000" kx="0" ky="0" algn="bl" rotWithShape="0" blurRad="63500" dist="12700" dir="5400000">
+              <a:srgbClr val="000000">
+                <a:alpha val="7000"/>
+              </a:srgbClr>
+            </a:outerShdw>
+          </a:effectLst>
+        </p:spPr>
+      </p:sp>
+      <p:sp>
+        <p:nvSpPr>
+          <p:cNvPr id="11" name="Shape 9"/>
+          <p:cNvSpPr/>
+          <p:nvPr/>
+        </p:nvSpPr>
+        <p:spPr>
+          <a:xfrm>
+            <a:off x="777240" y="2871216"/>
+            <a:ext cx="1097280" cy="329184"/>
+          </a:xfrm>
+          <a:prstGeom prst="rect">
+            <a:avLst/>
+          </a:prstGeom>
+          <a:solidFill>
+            <a:srgbClr val="175FF8"/>
+          </a:solidFill>
+          <a:ln/>
+        </p:spPr>
+      </p:sp>
+      <p:sp>
+        <p:nvSpPr>
+          <p:cNvPr id="12" name="Text 10"/>
+          <p:cNvSpPr/>
+          <p:nvPr/>
+        </p:nvSpPr>
+        <p:spPr>
+          <a:xfrm>
+            <a:off x="777240" y="2871216"/>
+            <a:ext cx="1097280" cy="329184"/>
+          </a:xfrm>
+          <a:prstGeom prst="rect">
+            <a:avLst/>
+          </a:prstGeom>
+          <a:noFill/>
+          <a:ln/>
+        </p:spPr>
+        <p:txBody>
+          <a:bodyPr wrap="square" lIns="0" tIns="0" rIns="0" bIns="0" rtlCol="0" anchor="ctr"/>
+          <a:lstStyle/>
+          <a:p>
+            <a:pPr algn="ctr" indent="0" marL="0">
+              <a:buNone/>
+            </a:pPr>
+            <a:r>
+              <a:rPr lang="en-US" sz="900" b="1" spc="100" kern="0" dirty="0">
+                <a:solidFill>
+                  <a:srgbClr val="FFFFFF"/>
+                </a:solidFill>
+                <a:latin typeface="Calibri" pitchFamily="34" charset="0"/>
+                <a:ea typeface="Calibri" pitchFamily="34" charset="-122"/>
+                <a:cs typeface="Calibri" pitchFamily="34" charset="-120"/>
+              </a:rPr>
+              <a:t>HIGH · 3</a:t>
+            </a:r>
+            <a:endParaRPr lang="en-US" sz="900" dirty="0"/>
+          </a:p>
+        </p:txBody>
+      </p:sp>
+      <p:sp>
+        <p:nvSpPr>
+          <p:cNvPr id="13" name="Text 11"/>
+          <p:cNvSpPr/>
+          <p:nvPr/>
+        </p:nvSpPr>
+        <p:spPr>
+          <a:xfrm>
+            <a:off x="2057400" y="2761488"/>
+            <a:ext cx="6309360" cy="512064"/>
+          </a:xfrm>
+          <a:prstGeom prst="rect">
+            <a:avLst/>
+          </a:prstGeom>
+          <a:noFill/>
+          <a:ln/>
+        </p:spPr>
+        <p:txBody>
+          <a:bodyPr wrap="square" lIns="0" tIns="0" rIns="0" bIns="0" rtlCol="0" anchor="ctr"/>
+          <a:lstStyle/>
+          <a:p>
+            <a:pPr indent="0" marL="0">
+              <a:buNone/>
+            </a:pPr>
+            <a:r>
+              <a:rPr lang="en-US" sz="1000" dirty="0">
+                <a:solidFill>
+                  <a:srgbClr val="13233F"/>
+                </a:solidFill>
+                <a:latin typeface="Calibri" pitchFamily="34" charset="0"/>
+                <a:ea typeface="Calibri" pitchFamily="34" charset="-122"/>
+                <a:cs typeface="Calibri" pitchFamily="34" charset="-120"/>
+              </a:rPr>
+              <a:t>Accept JSON alongside form-encoding · Document the hash field-order explicitly · Return structured error codes — today one “Invalid Hash” hides five different root causes.</a:t>
+            </a:r>
+            <a:endParaRPr lang="en-US" sz="1000" dirty="0"/>
+          </a:p>
+        </p:txBody>
+      </p:sp>
+      <p:sp>
+        <p:nvSpPr>
+          <p:cNvPr id="14" name="Shape 12"/>
+          <p:cNvSpPr/>
+          <p:nvPr/>
+        </p:nvSpPr>
+        <p:spPr>
+          <a:xfrm>
+            <a:off x="640080" y="3346704"/>
+            <a:ext cx="7863840" cy="512064"/>
+          </a:xfrm>
+          <a:prstGeom prst="rect">
+            <a:avLst/>
+          </a:prstGeom>
+          <a:solidFill>
+            <a:srgbClr val="FFFFFF"/>
+          </a:solidFill>
+          <a:ln/>
+          <a:effectLst>
+            <a:outerShdw sx="100000" sy="100000" kx="0" ky="0" algn="bl" rotWithShape="0" blurRad="63500" dist="12700" dir="5400000">
+              <a:srgbClr val="000000">
+                <a:alpha val="7000"/>
+              </a:srgbClr>
+            </a:outerShdw>
+          </a:effectLst>
+        </p:spPr>
+      </p:sp>
+      <p:sp>
+        <p:nvSpPr>
+          <p:cNvPr id="15" name="Shape 13"/>
+          <p:cNvSpPr/>
+          <p:nvPr/>
+        </p:nvSpPr>
+        <p:spPr>
+          <a:xfrm>
+            <a:off x="777240" y="3456432"/>
+            <a:ext cx="1097280" cy="329184"/>
+          </a:xfrm>
+          <a:prstGeom prst="rect">
+            <a:avLst/>
+          </a:prstGeom>
+          <a:solidFill>
+            <a:srgbClr val="4CC3FF"/>
+          </a:solidFill>
+          <a:ln/>
+        </p:spPr>
+      </p:sp>
+      <p:sp>
+        <p:nvSpPr>
+          <p:cNvPr id="16" name="Text 14"/>
+          <p:cNvSpPr/>
+          <p:nvPr/>
+        </p:nvSpPr>
+        <p:spPr>
+          <a:xfrm>
+            <a:off x="777240" y="3456432"/>
+            <a:ext cx="1097280" cy="329184"/>
+          </a:xfrm>
+          <a:prstGeom prst="rect">
+            <a:avLst/>
+          </a:prstGeom>
+          <a:noFill/>
+          <a:ln/>
+        </p:spPr>
+        <p:txBody>
+          <a:bodyPr wrap="square" lIns="0" tIns="0" rIns="0" bIns="0" rtlCol="0" anchor="ctr"/>
+          <a:lstStyle/>
+          <a:p>
+            <a:pPr algn="ctr" indent="0" marL="0">
+              <a:buNone/>
+            </a:pPr>
+            <a:r>
+              <a:rPr lang="en-US" sz="900" b="1" spc="100" kern="0" dirty="0">
+                <a:solidFill>
+                  <a:srgbClr val="0A2540"/>
+                </a:solidFill>
+                <a:latin typeface="Calibri" pitchFamily="34" charset="0"/>
+                <a:ea typeface="Calibri" pitchFamily="34" charset="-122"/>
+                <a:cs typeface="Calibri" pitchFamily="34" charset="-120"/>
+              </a:rPr>
+              <a:t>MEDIUM · 4</a:t>
+            </a:r>
+            <a:endParaRPr lang="en-US" sz="900" dirty="0"/>
+          </a:p>
+        </p:txBody>
+      </p:sp>
+      <p:sp>
+        <p:nvSpPr>
+          <p:cNvPr id="17" name="Text 15"/>
+          <p:cNvSpPr/>
+          <p:nvPr/>
+        </p:nvSpPr>
+        <p:spPr>
+          <a:xfrm>
+            <a:off x="2057400" y="3346704"/>
+            <a:ext cx="6309360" cy="512064"/>
+          </a:xfrm>
+          <a:prstGeom prst="rect">
+            <a:avLst/>
+          </a:prstGeom>
+          <a:noFill/>
+          <a:ln/>
+        </p:spPr>
+        <p:txBody>
+          <a:bodyPr wrap="square" lIns="0" tIns="0" rIns="0" bIns="0" rtlCol="0" anchor="ctr"/>
+          <a:lstStyle/>
+          <a:p>
+            <a:pPr indent="0" marL="0">
+              <a:buNone/>
+            </a:pPr>
+            <a:r>
+              <a:rPr lang="en-US" sz="1000" dirty="0">
+                <a:solidFill>
+                  <a:srgbClr val="13233F"/>
+                </a:solidFill>
+                <a:latin typeface="Calibri" pitchFamily="34" charset="0"/>
+                <a:ea typeface="Calibri" pitchFamily="34" charset="-122"/>
+                <a:cs typeface="Calibri" pitchFamily="34" charset="-120"/>
+              </a:rPr>
+              <a:t>Add express-checkout examples · A status page + webhook delivery logs · Publish an OpenAPI spec · Make the Node &amp; Java SDKs behave identically.</a:t>
+            </a:r>
+            <a:endParaRPr lang="en-US" sz="1000" dirty="0"/>
+          </a:p>
+        </p:txBody>
+      </p:sp>
+      <p:sp>
+        <p:nvSpPr>
+          <p:cNvPr id="18" name="Shape 16"/>
+          <p:cNvSpPr/>
+          <p:nvPr/>
+        </p:nvSpPr>
+        <p:spPr>
+          <a:xfrm>
+            <a:off x="640080" y="3931920"/>
+            <a:ext cx="7863840" cy="512064"/>
+          </a:xfrm>
+          <a:prstGeom prst="rect">
+            <a:avLst/>
+          </a:prstGeom>
+          <a:solidFill>
+            <a:srgbClr val="FFFFFF"/>
+          </a:solidFill>
+          <a:ln/>
+          <a:effectLst>
+            <a:outerShdw sx="100000" sy="100000" kx="0" ky="0" algn="bl" rotWithShape="0" blurRad="63500" dist="12700" dir="5400000">
+              <a:srgbClr val="000000">
+                <a:alpha val="7000"/>
+              </a:srgbClr>
+            </a:outerShdw>
+          </a:effectLst>
+        </p:spPr>
+      </p:sp>
+      <p:sp>
+        <p:nvSpPr>
+          <p:cNvPr id="19" name="Shape 17"/>
+          <p:cNvSpPr/>
+          <p:nvPr/>
+        </p:nvSpPr>
+        <p:spPr>
+          <a:xfrm>
+            <a:off x="777240" y="4041648"/>
+            <a:ext cx="1097280" cy="329184"/>
+          </a:xfrm>
+          <a:prstGeom prst="rect">
+            <a:avLst/>
+          </a:prstGeom>
+          <a:solidFill>
+            <a:srgbClr val="5B6B86"/>
+          </a:solidFill>
+          <a:ln/>
+        </p:spPr>
+      </p:sp>
+      <p:sp>
+        <p:nvSpPr>
+          <p:cNvPr id="20" name="Text 18"/>
+          <p:cNvSpPr/>
+          <p:nvPr/>
+        </p:nvSpPr>
+        <p:spPr>
+          <a:xfrm>
+            <a:off x="777240" y="4041648"/>
+            <a:ext cx="1097280" cy="329184"/>
+          </a:xfrm>
+          <a:prstGeom prst="rect">
+            <a:avLst/>
+          </a:prstGeom>
+          <a:noFill/>
+          <a:ln/>
+        </p:spPr>
+        <p:txBody>
+          <a:bodyPr wrap="square" lIns="0" tIns="0" rIns="0" bIns="0" rtlCol="0" anchor="ctr"/>
+          <a:lstStyle/>
+          <a:p>
+            <a:pPr algn="ctr" indent="0" marL="0">
+              <a:buNone/>
+            </a:pPr>
+            <a:r>
+              <a:rPr lang="en-US" sz="900" b="1" spc="100" kern="0" dirty="0">
+                <a:solidFill>
+                  <a:srgbClr val="FFFFFF"/>
+                </a:solidFill>
+                <a:latin typeface="Calibri" pitchFamily="34" charset="0"/>
+                <a:ea typeface="Calibri" pitchFamily="34" charset="-122"/>
+                <a:cs typeface="Calibri" pitchFamily="34" charset="-120"/>
+              </a:rPr>
+              <a:t>LOW · 1</a:t>
+            </a:r>
+            <a:endParaRPr lang="en-US" sz="900" dirty="0"/>
+          </a:p>
+        </p:txBody>
+      </p:sp>
+      <p:sp>
+        <p:nvSpPr>
+          <p:cNvPr id="21" name="Text 19"/>
+          <p:cNvSpPr/>
+          <p:nvPr/>
+        </p:nvSpPr>
+        <p:spPr>
+          <a:xfrm>
+            <a:off x="2057400" y="3931920"/>
+            <a:ext cx="6309360" cy="512064"/>
+          </a:xfrm>
+          <a:prstGeom prst="rect">
+            <a:avLst/>
+          </a:prstGeom>
+          <a:noFill/>
+          <a:ln/>
+        </p:spPr>
+        <p:txBody>
+          <a:bodyPr wrap="square" lIns="0" tIns="0" rIns="0" bIns="0" rtlCol="0" anchor="ctr"/>
+          <a:lstStyle/>
+          <a:p>
+            <a:pPr indent="0" marL="0">
+              <a:buNone/>
+            </a:pPr>
+            <a:r>
+              <a:rPr lang="en-US" sz="1000" dirty="0">
+                <a:solidFill>
+                  <a:srgbClr val="13233F"/>
+                </a:solidFill>
+                <a:latin typeface="Calibri" pitchFamily="34" charset="0"/>
+                <a:ea typeface="Calibri" pitchFamily="34" charset="-122"/>
+                <a:cs typeface="Calibri" pitchFamily="34" charset="-120"/>
+              </a:rPr>
+              <a:t>Expand test-mode docs — team testing, webhook testing and a go-live checklist.</a:t>
+            </a:r>
+            <a:endParaRPr lang="en-US" sz="1000" dirty="0"/>
+          </a:p>
+        </p:txBody>
+      </p:sp>
+      <p:sp>
+        <p:nvSpPr>
+          <p:cNvPr id="22" name="Text 20"/>
+          <p:cNvSpPr/>
+          <p:nvPr/>
+        </p:nvSpPr>
+        <p:spPr>
+          <a:xfrm>
+            <a:off x="640080" y="4535424"/>
+            <a:ext cx="7955280" cy="274320"/>
+          </a:xfrm>
+          <a:prstGeom prst="rect">
+            <a:avLst/>
+          </a:prstGeom>
+          <a:noFill/>
+          <a:ln/>
+        </p:spPr>
+        <p:txBody>
+          <a:bodyPr wrap="square" lIns="0" tIns="0" rIns="0" bIns="0" rtlCol="0" anchor="ctr"/>
+          <a:lstStyle/>
+          <a:p>
+            <a:pPr indent="0" marL="0">
+              <a:buNone/>
+            </a:pPr>
+            <a:r>
+              <a:rPr lang="en-US" sz="950" b="1" i="1" dirty="0">
+                <a:solidFill>
+                  <a:srgbClr val="175FF8"/>
+                </a:solidFill>
+                <a:latin typeface="Calibri" pitchFamily="34" charset="0"/>
+                <a:ea typeface="Calibri" pitchFamily="34" charset="-122"/>
+                <a:cs typeface="Calibri" pitchFamily="34" charset="-120"/>
+              </a:rPr>
+              <a:t>Result:  </a:t>
+            </a:r>
+            <a:pPr indent="0" marL="0">
+              <a:buNone/>
+            </a:pPr>
+            <a:r>
+              <a:rPr lang="en-US" sz="950" i="1" dirty="0">
+                <a:solidFill>
+                  <a:srgbClr val="5B6B86"/>
+                </a:solidFill>
+                <a:latin typeface="Calibri" pitchFamily="34" charset="0"/>
+                <a:ea typeface="Calibri" pitchFamily="34" charset="-122"/>
+                <a:cs typeface="Calibri" pitchFamily="34" charset="-120"/>
+              </a:rPr>
+              <a:t>Paynow DX scored 3.0/5 — solid, and every gap is fixable; most are documentation, not architecture. Full report: paynow-dx-recommendations.md.</a:t>
+            </a:r>
+            <a:endParaRPr lang="en-US" sz="950" dirty="0"/>
+          </a:p>
+        </p:txBody>
+      </p:sp>
+      <p:sp>
+        <p:nvSpPr>
+          <p:cNvPr id="23" name="Text 21"/>
+          <p:cNvSpPr/>
+          <p:nvPr/>
+        </p:nvSpPr>
+        <p:spPr>
+          <a:xfrm>
+            <a:off x="457200" y="4828032"/>
+            <a:ext cx="7498080" cy="201168"/>
+          </a:xfrm>
+          <a:prstGeom prst="rect">
+            <a:avLst/>
+          </a:prstGeom>
+          <a:noFill/>
+          <a:ln/>
+        </p:spPr>
+        <p:txBody>
+          <a:bodyPr wrap="square" rtlCol="0" anchor="ctr"/>
+          <a:lstStyle/>
+          <a:p>
+            <a:pPr indent="0" marL="0">
+              <a:buNone/>
+            </a:pPr>
+            <a:r>
+              <a:rPr lang="en-US" sz="800" spc="200" kern="0" dirty="0">
+                <a:solidFill>
+                  <a:srgbClr val="5B6B86"/>
+                </a:solidFill>
+                <a:latin typeface="Calibri" pitchFamily="34" charset="0"/>
+                <a:ea typeface="Calibri" pitchFamily="34" charset="-122"/>
+                <a:cs typeface="Calibri" pitchFamily="34" charset="-120"/>
+              </a:rPr>
+              <a:t>ZIMLIVESTOCK  ·  PAYNOW INTERNSHIP  ·  FINAL PRESENTATION  ·  JUNE 2026</a:t>
+            </a:r>
+            <a:endParaRPr lang="en-US" sz="800" dirty="0"/>
+          </a:p>
+        </p:txBody>
+      </p:sp>
+      <p:sp>
+        <p:nvSpPr>
+          <p:cNvPr id="24" name="Text 22"/>
+          <p:cNvSpPr/>
+          <p:nvPr/>
+        </p:nvSpPr>
+        <p:spPr>
+          <a:xfrm>
+            <a:off x="8229600" y="4828032"/>
+            <a:ext cx="548640" cy="201168"/>
+          </a:xfrm>
+          <a:prstGeom prst="rect">
+            <a:avLst/>
+          </a:prstGeom>
+          <a:noFill/>
+          <a:ln/>
+        </p:spPr>
+        <p:txBody>
+          <a:bodyPr wrap="square" rtlCol="0" anchor="ctr"/>
+          <a:lstStyle/>
+          <a:p>
+            <a:pPr algn="r" indent="0" marL="0">
+              <a:buNone/>
+            </a:pPr>
+            <a:r>
+              <a:rPr lang="en-US" sz="800" dirty="0">
+                <a:solidFill>
+                  <a:srgbClr val="5B6B86"/>
+                </a:solidFill>
+                <a:latin typeface="Calibri" pitchFamily="34" charset="0"/>
+                <a:ea typeface="Calibri" pitchFamily="34" charset="-122"/>
+                <a:cs typeface="Calibri" pitchFamily="34" charset="-120"/>
+              </a:rPr>
+              <a:t>29 / 31</a:t>
+            </a:r>
+            <a:endParaRPr lang="en-US" sz="800" dirty="0"/>
           </a:p>
         </p:txBody>
       </p:sp>
@@ -21665,6 +23208,731 @@
 </p:sld>
 </file>
 
+<file path=ppt/slides/slide30.xml><?xml version="1.0" encoding="utf-8"?>
+<p:sld xmlns:a="http://schemas.openxmlformats.org/drawingml/2006/main" xmlns:r="http://schemas.openxmlformats.org/officeDocument/2006/relationships" xmlns:p="http://schemas.openxmlformats.org/presentationml/2006/main">
+  <p:cSld name="Slide 30">
+    <p:bg>
+      <p:bgPr>
+        <a:solidFill>
+          <a:srgbClr val="0A2540"/>
+        </a:solidFill>
+      </p:bgPr>
+    </p:bg>
+    <p:spTree>
+      <p:nvGrpSpPr>
+        <p:cNvPr id="1" name=""/>
+        <p:cNvGrpSpPr/>
+        <p:nvPr/>
+      </p:nvGrpSpPr>
+      <p:grpSpPr>
+        <a:xfrm>
+          <a:off x="0" y="0"/>
+          <a:ext cx="0" cy="0"/>
+          <a:chOff x="0" y="0"/>
+          <a:chExt cx="0" cy="0"/>
+        </a:xfrm>
+      </p:grpSpPr>
+      <p:sp>
+        <p:nvSpPr>
+          <p:cNvPr id="2" name="Shape 0"/>
+          <p:cNvSpPr/>
+          <p:nvPr/>
+        </p:nvSpPr>
+        <p:spPr>
+          <a:xfrm>
+            <a:off x="0" y="0"/>
+            <a:ext cx="164592" cy="5143500"/>
+          </a:xfrm>
+          <a:prstGeom prst="rect">
+            <a:avLst/>
+          </a:prstGeom>
+          <a:solidFill>
+            <a:srgbClr val="4CC3FF"/>
+          </a:solidFill>
+          <a:ln/>
+        </p:spPr>
+      </p:sp>
+      <p:sp>
+        <p:nvSpPr>
+          <p:cNvPr id="3" name="Text 1"/>
+          <p:cNvSpPr/>
+          <p:nvPr/>
+        </p:nvSpPr>
+        <p:spPr>
+          <a:xfrm>
+            <a:off x="640080" y="502920"/>
+            <a:ext cx="5486400" cy="274320"/>
+          </a:xfrm>
+          <a:prstGeom prst="rect">
+            <a:avLst/>
+          </a:prstGeom>
+          <a:noFill/>
+          <a:ln/>
+        </p:spPr>
+        <p:txBody>
+          <a:bodyPr wrap="square" rtlCol="0" anchor="ctr"/>
+          <a:lstStyle/>
+          <a:p>
+            <a:pPr indent="0" marL="0">
+              <a:buNone/>
+            </a:pPr>
+            <a:r>
+              <a:rPr lang="en-US" sz="1100" b="1" spc="400" kern="0" dirty="0">
+                <a:solidFill>
+                  <a:srgbClr val="4CC3FF"/>
+                </a:solidFill>
+                <a:latin typeface="Calibri" pitchFamily="34" charset="0"/>
+                <a:ea typeface="Calibri" pitchFamily="34" charset="-122"/>
+                <a:cs typeface="Calibri" pitchFamily="34" charset="-120"/>
+              </a:rPr>
+              <a:t>THE ASK</a:t>
+            </a:r>
+            <a:endParaRPr lang="en-US" sz="1100" dirty="0"/>
+          </a:p>
+        </p:txBody>
+      </p:sp>
+      <p:sp>
+        <p:nvSpPr>
+          <p:cNvPr id="4" name="Text 2"/>
+          <p:cNvSpPr/>
+          <p:nvPr/>
+        </p:nvSpPr>
+        <p:spPr>
+          <a:xfrm>
+            <a:off x="640080" y="960120"/>
+            <a:ext cx="7863840" cy="914400"/>
+          </a:xfrm>
+          <a:prstGeom prst="rect">
+            <a:avLst/>
+          </a:prstGeom>
+          <a:noFill/>
+          <a:ln/>
+        </p:spPr>
+        <p:txBody>
+          <a:bodyPr wrap="square" lIns="0" tIns="0" rIns="0" bIns="0" rtlCol="0" anchor="ctr"/>
+          <a:lstStyle/>
+          <a:p>
+            <a:pPr indent="0" marL="0">
+              <a:buNone/>
+            </a:pPr>
+            <a:r>
+              <a:rPr lang="en-US" sz="4000" b="1" dirty="0">
+                <a:solidFill>
+                  <a:srgbClr val="EEF3FF"/>
+                </a:solidFill>
+                <a:latin typeface="Georgia" pitchFamily="34" charset="0"/>
+                <a:ea typeface="Georgia" pitchFamily="34" charset="-122"/>
+                <a:cs typeface="Georgia" pitchFamily="34" charset="-120"/>
+              </a:rPr>
+              <a:t>Not money. Doors and rails.</a:t>
+            </a:r>
+            <a:endParaRPr lang="en-US" sz="4000" dirty="0"/>
+          </a:p>
+        </p:txBody>
+      </p:sp>
+      <p:sp>
+        <p:nvSpPr>
+          <p:cNvPr id="5" name="Text 3"/>
+          <p:cNvSpPr/>
+          <p:nvPr/>
+        </p:nvSpPr>
+        <p:spPr>
+          <a:xfrm>
+            <a:off x="640080" y="1783080"/>
+            <a:ext cx="7863840" cy="457200"/>
+          </a:xfrm>
+          <a:prstGeom prst="rect">
+            <a:avLst/>
+          </a:prstGeom>
+          <a:noFill/>
+          <a:ln/>
+        </p:spPr>
+        <p:txBody>
+          <a:bodyPr wrap="square" lIns="0" tIns="0" rIns="0" bIns="0" rtlCol="0" anchor="ctr"/>
+          <a:lstStyle/>
+          <a:p>
+            <a:pPr indent="0" marL="0">
+              <a:buNone/>
+            </a:pPr>
+            <a:r>
+              <a:rPr lang="en-US" sz="1900" i="1" dirty="0">
+                <a:solidFill>
+                  <a:srgbClr val="4CC3FF"/>
+                </a:solidFill>
+                <a:latin typeface="Georgia" pitchFamily="34" charset="0"/>
+                <a:ea typeface="Georgia" pitchFamily="34" charset="-122"/>
+                <a:cs typeface="Georgia" pitchFamily="34" charset="-120"/>
+              </a:rPr>
+              <a:t>Two things, neither of them a cheque.</a:t>
+            </a:r>
+            <a:endParaRPr lang="en-US" sz="1900" dirty="0"/>
+          </a:p>
+        </p:txBody>
+      </p:sp>
+      <p:sp>
+        <p:nvSpPr>
+          <p:cNvPr id="6" name="Text 4"/>
+          <p:cNvSpPr/>
+          <p:nvPr/>
+        </p:nvSpPr>
+        <p:spPr>
+          <a:xfrm>
+            <a:off x="640080" y="2514600"/>
+            <a:ext cx="457200" cy="640080"/>
+          </a:xfrm>
+          <a:prstGeom prst="rect">
+            <a:avLst/>
+          </a:prstGeom>
+          <a:noFill/>
+          <a:ln/>
+        </p:spPr>
+        <p:txBody>
+          <a:bodyPr wrap="square" lIns="0" tIns="0" rIns="0" bIns="0" rtlCol="0" anchor="ctr"/>
+          <a:lstStyle/>
+          <a:p>
+            <a:pPr indent="0" marL="0">
+              <a:buNone/>
+            </a:pPr>
+            <a:r>
+              <a:rPr lang="en-US" sz="3000" b="1" dirty="0">
+                <a:solidFill>
+                  <a:srgbClr val="4CC3FF"/>
+                </a:solidFill>
+                <a:latin typeface="Georgia" pitchFamily="34" charset="0"/>
+                <a:ea typeface="Georgia" pitchFamily="34" charset="-122"/>
+                <a:cs typeface="Georgia" pitchFamily="34" charset="-120"/>
+              </a:rPr>
+              <a:t>1</a:t>
+            </a:r>
+            <a:endParaRPr lang="en-US" sz="3000" dirty="0"/>
+          </a:p>
+        </p:txBody>
+      </p:sp>
+      <p:sp>
+        <p:nvSpPr>
+          <p:cNvPr id="7" name="Text 5"/>
+          <p:cNvSpPr/>
+          <p:nvPr/>
+        </p:nvSpPr>
+        <p:spPr>
+          <a:xfrm>
+            <a:off x="1188720" y="2532888"/>
+            <a:ext cx="7315200" cy="1005840"/>
+          </a:xfrm>
+          <a:prstGeom prst="rect">
+            <a:avLst/>
+          </a:prstGeom>
+          <a:noFill/>
+          <a:ln/>
+        </p:spPr>
+        <p:txBody>
+          <a:bodyPr wrap="square" lIns="0" tIns="0" rIns="0" bIns="0" rtlCol="0" anchor="t"/>
+          <a:lstStyle/>
+          <a:p>
+            <a:pPr indent="0" marL="0">
+              <a:buNone/>
+            </a:pPr>
+            <a:r>
+              <a:rPr lang="en-US" sz="1700" b="1" dirty="0">
+                <a:solidFill>
+                  <a:srgbClr val="EEF3FF"/>
+                </a:solidFill>
+                <a:latin typeface="Calibri" pitchFamily="34" charset="0"/>
+                <a:ea typeface="Calibri" pitchFamily="34" charset="-122"/>
+                <a:cs typeface="Calibri" pitchFamily="34" charset="-120"/>
+              </a:rPr>
+              <a:t>Access to your growing contacts   </a:t>
+            </a:r>
+            <a:endParaRPr lang="en-US" sz="1700" dirty="0"/>
+          </a:p>
+          <a:p>
+            <a:pPr indent="0" marL="0">
+              <a:buNone/>
+            </a:pPr>
+            <a:r>
+              <a:rPr lang="en-US" sz="1250" dirty="0">
+                <a:solidFill>
+                  <a:srgbClr val="AEC2E0"/>
+                </a:solidFill>
+                <a:latin typeface="Calibri" pitchFamily="34" charset="0"/>
+                <a:ea typeface="Calibri" pitchFamily="34" charset="-122"/>
+                <a:cs typeface="Calibri" pitchFamily="34" charset="-120"/>
+              </a:rPr>
+              <a:t>Paynow's expanding network of merchants, billers and industry relationships — as the starting point for selling this settlement engine into the livestock market. Your contacts are the doors; I do the on-the-ground operating you don't want to.</a:t>
+            </a:r>
+            <a:endParaRPr lang="en-US" sz="1700" dirty="0"/>
+          </a:p>
+        </p:txBody>
+      </p:sp>
+      <p:sp>
+        <p:nvSpPr>
+          <p:cNvPr id="8" name="Text 6"/>
+          <p:cNvSpPr/>
+          <p:nvPr/>
+        </p:nvSpPr>
+        <p:spPr>
+          <a:xfrm>
+            <a:off x="640080" y="3611880"/>
+            <a:ext cx="457200" cy="640080"/>
+          </a:xfrm>
+          <a:prstGeom prst="rect">
+            <a:avLst/>
+          </a:prstGeom>
+          <a:noFill/>
+          <a:ln/>
+        </p:spPr>
+        <p:txBody>
+          <a:bodyPr wrap="square" lIns="0" tIns="0" rIns="0" bIns="0" rtlCol="0" anchor="ctr"/>
+          <a:lstStyle/>
+          <a:p>
+            <a:pPr indent="0" marL="0">
+              <a:buNone/>
+            </a:pPr>
+            <a:r>
+              <a:rPr lang="en-US" sz="3000" b="1" dirty="0">
+                <a:solidFill>
+                  <a:srgbClr val="4CC3FF"/>
+                </a:solidFill>
+                <a:latin typeface="Georgia" pitchFamily="34" charset="0"/>
+                <a:ea typeface="Georgia" pitchFamily="34" charset="-122"/>
+                <a:cs typeface="Georgia" pitchFamily="34" charset="-120"/>
+              </a:rPr>
+              <a:t>2</a:t>
+            </a:r>
+            <a:endParaRPr lang="en-US" sz="3000" dirty="0"/>
+          </a:p>
+        </p:txBody>
+      </p:sp>
+      <p:sp>
+        <p:nvSpPr>
+          <p:cNvPr id="9" name="Text 7"/>
+          <p:cNvSpPr/>
+          <p:nvPr/>
+        </p:nvSpPr>
+        <p:spPr>
+          <a:xfrm>
+            <a:off x="1188720" y="3630168"/>
+            <a:ext cx="7315200" cy="1005840"/>
+          </a:xfrm>
+          <a:prstGeom prst="rect">
+            <a:avLst/>
+          </a:prstGeom>
+          <a:noFill/>
+          <a:ln/>
+        </p:spPr>
+        <p:txBody>
+          <a:bodyPr wrap="square" lIns="0" tIns="0" rIns="0" bIns="0" rtlCol="0" anchor="t"/>
+          <a:lstStyle/>
+          <a:p>
+            <a:pPr indent="0" marL="0">
+              <a:buNone/>
+            </a:pPr>
+            <a:r>
+              <a:rPr lang="en-US" sz="1700" b="1" dirty="0">
+                <a:solidFill>
+                  <a:srgbClr val="EEF3FF"/>
+                </a:solidFill>
+                <a:latin typeface="Calibri" pitchFamily="34" charset="0"/>
+                <a:ea typeface="Calibri" pitchFamily="34" charset="-122"/>
+                <a:cs typeface="Calibri" pitchFamily="34" charset="-120"/>
+              </a:rPr>
+              <a:t>Continued access to the rails &amp; core infrastructure   </a:t>
+            </a:r>
+            <a:endParaRPr lang="en-US" sz="1700" dirty="0"/>
+          </a:p>
+          <a:p>
+            <a:pPr indent="0" marL="0">
+              <a:buNone/>
+            </a:pPr>
+            <a:r>
+              <a:rPr lang="en-US" sz="1250" dirty="0">
+                <a:solidFill>
+                  <a:srgbClr val="AEC2E0"/>
+                </a:solidFill>
+                <a:latin typeface="Calibri" pitchFamily="34" charset="0"/>
+                <a:ea typeface="Calibri" pitchFamily="34" charset="-122"/>
+                <a:cs typeface="Calibri" pitchFamily="34" charset="-120"/>
+              </a:rPr>
+              <a:t>Keep me on the Paynow stack I've built ZimLivestock on — Core Express Checkout, BillPay-as-biller, EcoCash USSD, merchant transfers, SMS. The engine runs on your rails; staying plugged in is what keeps every dollar of GMV flowing onto them.</a:t>
+            </a:r>
+            <a:endParaRPr lang="en-US" sz="1700" dirty="0"/>
+          </a:p>
+        </p:txBody>
+      </p:sp>
+      <p:sp>
+        <p:nvSpPr>
+          <p:cNvPr id="10" name="Text 8"/>
+          <p:cNvSpPr/>
+          <p:nvPr/>
+        </p:nvSpPr>
+        <p:spPr>
+          <a:xfrm>
+            <a:off x="457200" y="4828032"/>
+            <a:ext cx="7498080" cy="201168"/>
+          </a:xfrm>
+          <a:prstGeom prst="rect">
+            <a:avLst/>
+          </a:prstGeom>
+          <a:noFill/>
+          <a:ln/>
+        </p:spPr>
+        <p:txBody>
+          <a:bodyPr wrap="square" rtlCol="0" anchor="ctr"/>
+          <a:lstStyle/>
+          <a:p>
+            <a:pPr indent="0" marL="0">
+              <a:buNone/>
+            </a:pPr>
+            <a:r>
+              <a:rPr lang="en-US" sz="800" spc="200" kern="0" dirty="0">
+                <a:solidFill>
+                  <a:srgbClr val="AEC2E0"/>
+                </a:solidFill>
+                <a:latin typeface="Calibri" pitchFamily="34" charset="0"/>
+                <a:ea typeface="Calibri" pitchFamily="34" charset="-122"/>
+                <a:cs typeface="Calibri" pitchFamily="34" charset="-120"/>
+              </a:rPr>
+              <a:t>ZIMLIVESTOCK  ·  PAYNOW INTERNSHIP  ·  FINAL PRESENTATION  ·  JUNE 2026</a:t>
+            </a:r>
+            <a:endParaRPr lang="en-US" sz="800" dirty="0"/>
+          </a:p>
+        </p:txBody>
+      </p:sp>
+      <p:sp>
+        <p:nvSpPr>
+          <p:cNvPr id="11" name="Text 9"/>
+          <p:cNvSpPr/>
+          <p:nvPr/>
+        </p:nvSpPr>
+        <p:spPr>
+          <a:xfrm>
+            <a:off x="8229600" y="4828032"/>
+            <a:ext cx="548640" cy="201168"/>
+          </a:xfrm>
+          <a:prstGeom prst="rect">
+            <a:avLst/>
+          </a:prstGeom>
+          <a:noFill/>
+          <a:ln/>
+        </p:spPr>
+        <p:txBody>
+          <a:bodyPr wrap="square" rtlCol="0" anchor="ctr"/>
+          <a:lstStyle/>
+          <a:p>
+            <a:pPr algn="r" indent="0" marL="0">
+              <a:buNone/>
+            </a:pPr>
+            <a:r>
+              <a:rPr lang="en-US" sz="800" dirty="0">
+                <a:solidFill>
+                  <a:srgbClr val="AEC2E0"/>
+                </a:solidFill>
+                <a:latin typeface="Calibri" pitchFamily="34" charset="0"/>
+                <a:ea typeface="Calibri" pitchFamily="34" charset="-122"/>
+                <a:cs typeface="Calibri" pitchFamily="34" charset="-120"/>
+              </a:rPr>
+              <a:t>30 / 31</a:t>
+            </a:r>
+            <a:endParaRPr lang="en-US" sz="800" dirty="0"/>
+          </a:p>
+        </p:txBody>
+      </p:sp>
+    </p:spTree>
+  </p:cSld>
+  <p:clrMapOvr>
+    <a:masterClrMapping/>
+  </p:clrMapOvr>
+</p:sld>
+</file>
+
+<file path=ppt/slides/slide31.xml><?xml version="1.0" encoding="utf-8"?>
+<p:sld xmlns:a="http://schemas.openxmlformats.org/drawingml/2006/main" xmlns:r="http://schemas.openxmlformats.org/officeDocument/2006/relationships" xmlns:p="http://schemas.openxmlformats.org/presentationml/2006/main">
+  <p:cSld name="Slide 31">
+    <p:bg>
+      <p:bgPr>
+        <a:solidFill>
+          <a:srgbClr val="0A2540"/>
+        </a:solidFill>
+      </p:bgPr>
+    </p:bg>
+    <p:spTree>
+      <p:nvGrpSpPr>
+        <p:cNvPr id="1" name=""/>
+        <p:cNvGrpSpPr/>
+        <p:nvPr/>
+      </p:nvGrpSpPr>
+      <p:grpSpPr>
+        <a:xfrm>
+          <a:off x="0" y="0"/>
+          <a:ext cx="0" cy="0"/>
+          <a:chOff x="0" y="0"/>
+          <a:chExt cx="0" cy="0"/>
+        </a:xfrm>
+      </p:grpSpPr>
+      <p:sp>
+        <p:nvSpPr>
+          <p:cNvPr id="2" name="Shape 0"/>
+          <p:cNvSpPr/>
+          <p:nvPr/>
+        </p:nvSpPr>
+        <p:spPr>
+          <a:xfrm>
+            <a:off x="0" y="0"/>
+            <a:ext cx="164592" cy="5143500"/>
+          </a:xfrm>
+          <a:prstGeom prst="rect">
+            <a:avLst/>
+          </a:prstGeom>
+          <a:solidFill>
+            <a:srgbClr val="4CC3FF"/>
+          </a:solidFill>
+          <a:ln/>
+        </p:spPr>
+      </p:sp>
+      <p:sp>
+        <p:nvSpPr>
+          <p:cNvPr id="3" name="Text 1"/>
+          <p:cNvSpPr/>
+          <p:nvPr/>
+        </p:nvSpPr>
+        <p:spPr>
+          <a:xfrm>
+            <a:off x="640080" y="502920"/>
+            <a:ext cx="7863840" cy="274320"/>
+          </a:xfrm>
+          <a:prstGeom prst="rect">
+            <a:avLst/>
+          </a:prstGeom>
+          <a:noFill/>
+          <a:ln/>
+        </p:spPr>
+        <p:txBody>
+          <a:bodyPr wrap="square" rtlCol="0" anchor="ctr"/>
+          <a:lstStyle/>
+          <a:p>
+            <a:pPr indent="0" marL="0">
+              <a:buNone/>
+            </a:pPr>
+            <a:r>
+              <a:rPr lang="en-US" sz="1100" b="1" spc="400" kern="0" dirty="0">
+                <a:solidFill>
+                  <a:srgbClr val="4CC3FF"/>
+                </a:solidFill>
+                <a:latin typeface="Calibri" pitchFamily="34" charset="0"/>
+                <a:ea typeface="Calibri" pitchFamily="34" charset="-122"/>
+                <a:cs typeface="Calibri" pitchFamily="34" charset="-120"/>
+              </a:rPr>
+              <a:t>THE ONE-PARAGRAPH VERSION</a:t>
+            </a:r>
+            <a:endParaRPr lang="en-US" sz="1100" dirty="0"/>
+          </a:p>
+        </p:txBody>
+      </p:sp>
+      <p:sp>
+        <p:nvSpPr>
+          <p:cNvPr id="4" name="Text 2"/>
+          <p:cNvSpPr/>
+          <p:nvPr/>
+        </p:nvSpPr>
+        <p:spPr>
+          <a:xfrm>
+            <a:off x="640080" y="1051560"/>
+            <a:ext cx="7863840" cy="2286000"/>
+          </a:xfrm>
+          <a:prstGeom prst="rect">
+            <a:avLst/>
+          </a:prstGeom>
+          <a:noFill/>
+          <a:ln/>
+        </p:spPr>
+        <p:txBody>
+          <a:bodyPr wrap="square" lIns="0" tIns="0" rIns="0" bIns="0" rtlCol="0" anchor="ctr"/>
+          <a:lstStyle/>
+          <a:p>
+            <a:pPr indent="0" marL="0">
+              <a:lnSpc>
+                <a:spcPct val="112000"/>
+              </a:lnSpc>
+              <a:spcAft>
+                <a:spcPts val="400"/>
+              </a:spcAft>
+              <a:buNone/>
+            </a:pPr>
+            <a:r>
+              <a:rPr lang="en-US" sz="1600" dirty="0">
+                <a:solidFill>
+                  <a:srgbClr val="EEF3FF"/>
+                </a:solidFill>
+                <a:latin typeface="Georgia" pitchFamily="34" charset="0"/>
+                <a:ea typeface="Georgia" pitchFamily="34" charset="-122"/>
+                <a:cs typeface="Georgia" pitchFamily="34" charset="-120"/>
+              </a:rPr>
+              <a:t>I sat through a real sale day, found four problems the auction floor can't solve, and built a digital floor on Paynow rails that already runs in production.  </a:t>
+            </a:r>
+            <a:pPr indent="0" marL="0">
+              <a:lnSpc>
+                <a:spcPct val="112000"/>
+              </a:lnSpc>
+              <a:spcAft>
+                <a:spcPts val="400"/>
+              </a:spcAft>
+              <a:buNone/>
+            </a:pPr>
+            <a:r>
+              <a:rPr lang="en-US" sz="1600" b="1" dirty="0">
+                <a:solidFill>
+                  <a:srgbClr val="4CC3FF"/>
+                </a:solidFill>
+                <a:latin typeface="Georgia" pitchFamily="34" charset="0"/>
+                <a:ea typeface="Georgia" pitchFamily="34" charset="-122"/>
+                <a:cs typeface="Georgia" pitchFamily="34" charset="-120"/>
+              </a:rPr>
+              <a:t>It turns out to be the money layer that three of four national cattle-digitization initiatives lack — the settlement, payout and title-transfer engine the identity layers plug into.  </a:t>
+            </a:r>
+            <a:pPr indent="0" marL="0">
+              <a:lnSpc>
+                <a:spcPct val="112000"/>
+              </a:lnSpc>
+              <a:spcAft>
+                <a:spcPts val="400"/>
+              </a:spcAft>
+              <a:buNone/>
+            </a:pPr>
+            <a:r>
+              <a:rPr lang="en-US" sz="1600" dirty="0">
+                <a:solidFill>
+                  <a:srgbClr val="EEF3FF"/>
+                </a:solidFill>
+                <a:latin typeface="Georgia" pitchFamily="34" charset="0"/>
+                <a:ea typeface="Georgia" pitchFamily="34" charset="-122"/>
+                <a:cs typeface="Georgia" pitchFamily="34" charset="-120"/>
+              </a:rPr>
+              <a:t>The five-year plan reaches 20 houses — about a third of the market — for US$1.03M revenue and a US$346,583 cumulative surplus, self-funded, routing over US$19.5M onto Paynow rails.  </a:t>
+            </a:r>
+            <a:pPr indent="0" marL="0">
+              <a:lnSpc>
+                <a:spcPct val="112000"/>
+              </a:lnSpc>
+              <a:spcAft>
+                <a:spcPts val="400"/>
+              </a:spcAft>
+              <a:buNone/>
+            </a:pPr>
+            <a:r>
+              <a:rPr lang="en-US" sz="1600" b="1" dirty="0">
+                <a:solidFill>
+                  <a:srgbClr val="4CC3FF"/>
+                </a:solidFill>
+                <a:latin typeface="Georgia" pitchFamily="34" charset="0"/>
+                <a:ea typeface="Georgia" pitchFamily="34" charset="-122"/>
+                <a:cs typeface="Georgia" pitchFamily="34" charset="-120"/>
+              </a:rPr>
+              <a:t>The ask is one 90-day paid pilot to land the first anchor and prove the playbook.</a:t>
+            </a:r>
+            <a:endParaRPr lang="en-US" sz="1600" dirty="0"/>
+          </a:p>
+        </p:txBody>
+      </p:sp>
+      <p:sp>
+        <p:nvSpPr>
+          <p:cNvPr id="5" name="Text 3"/>
+          <p:cNvSpPr/>
+          <p:nvPr/>
+        </p:nvSpPr>
+        <p:spPr>
+          <a:xfrm>
+            <a:off x="640080" y="3657600"/>
+            <a:ext cx="7863840" cy="457200"/>
+          </a:xfrm>
+          <a:prstGeom prst="rect">
+            <a:avLst/>
+          </a:prstGeom>
+          <a:noFill/>
+          <a:ln/>
+        </p:spPr>
+        <p:txBody>
+          <a:bodyPr wrap="square" lIns="0" tIns="0" rIns="0" bIns="0" rtlCol="0" anchor="ctr"/>
+          <a:lstStyle/>
+          <a:p>
+            <a:pPr indent="0" marL="0">
+              <a:buNone/>
+            </a:pPr>
+            <a:r>
+              <a:rPr lang="en-US" sz="2000" b="1" i="1" dirty="0">
+                <a:solidFill>
+                  <a:srgbClr val="4CC3FF"/>
+                </a:solidFill>
+                <a:latin typeface="Georgia" pitchFamily="34" charset="0"/>
+                <a:ea typeface="Georgia" pitchFamily="34" charset="-122"/>
+                <a:cs typeface="Georgia" pitchFamily="34" charset="-120"/>
+              </a:rPr>
+              <a:t>Build software you can sell — and a business this market can actually carry.</a:t>
+            </a:r>
+            <a:endParaRPr lang="en-US" sz="2000" dirty="0"/>
+          </a:p>
+        </p:txBody>
+      </p:sp>
+      <p:sp>
+        <p:nvSpPr>
+          <p:cNvPr id="6" name="Text 4"/>
+          <p:cNvSpPr/>
+          <p:nvPr/>
+        </p:nvSpPr>
+        <p:spPr>
+          <a:xfrm>
+            <a:off x="640080" y="4526280"/>
+            <a:ext cx="7863840" cy="274320"/>
+          </a:xfrm>
+          <a:prstGeom prst="rect">
+            <a:avLst/>
+          </a:prstGeom>
+          <a:noFill/>
+          <a:ln/>
+        </p:spPr>
+        <p:txBody>
+          <a:bodyPr wrap="square" rtlCol="0" anchor="ctr"/>
+          <a:lstStyle/>
+          <a:p>
+            <a:pPr indent="0" marL="0">
+              <a:buNone/>
+            </a:pPr>
+            <a:r>
+              <a:rPr lang="en-US" sz="1100" b="1" dirty="0">
+                <a:solidFill>
+                  <a:srgbClr val="EEF3FF"/>
+                </a:solidFill>
+                <a:latin typeface="Calibri" pitchFamily="34" charset="0"/>
+                <a:ea typeface="Calibri" pitchFamily="34" charset="-122"/>
+                <a:cs typeface="Calibri" pitchFamily="34" charset="-120"/>
+              </a:rPr>
+              <a:t>Tatenda Nyemudzo</a:t>
+            </a:r>
+            <a:pPr indent="0" marL="0">
+              <a:buNone/>
+            </a:pPr>
+            <a:r>
+              <a:rPr lang="en-US" sz="1100" dirty="0">
+                <a:solidFill>
+                  <a:srgbClr val="AEC2E0"/>
+                </a:solidFill>
+                <a:latin typeface="Calibri" pitchFamily="34" charset="0"/>
+                <a:ea typeface="Calibri" pitchFamily="34" charset="-122"/>
+                <a:cs typeface="Calibri" pitchFamily="34" charset="-120"/>
+              </a:rPr>
+              <a:t>    dev@paynow.co.zw    ·    companions: gtm-strategy.md · financial-model.xlsx · national-initiative-alignment.md · paynow-dx-recommendations.md</a:t>
+            </a:r>
+            <a:endParaRPr lang="en-US" sz="1100" dirty="0"/>
+          </a:p>
+        </p:txBody>
+      </p:sp>
+    </p:spTree>
+  </p:cSld>
+  <p:clrMapOvr>
+    <a:masterClrMapping/>
+  </p:clrMapOvr>
+</p:sld>
+</file>
+
 <file path=ppt/slides/slide4.xml><?xml version="1.0" encoding="utf-8"?>
 <p:sld xmlns:a="http://schemas.openxmlformats.org/drawingml/2006/main" xmlns:r="http://schemas.openxmlformats.org/officeDocument/2006/relationships" xmlns:p="http://schemas.openxmlformats.org/presentationml/2006/main">
   <p:cSld name="Slide 4">
@@ -22607,7 +24875,7 @@
                 <a:ea typeface="Calibri" pitchFamily="34" charset="-122"/>
                 <a:cs typeface="Calibri" pitchFamily="34" charset="-120"/>
               </a:rPr>
-              <a:t>4 / 29</a:t>
+              <a:t>4 / 31</a:t>
             </a:r>
             <a:endParaRPr lang="en-US" sz="800" dirty="0"/>
           </a:p>
@@ -23600,7 +25868,7 @@
                 <a:ea typeface="Calibri" pitchFamily="34" charset="-122"/>
                 <a:cs typeface="Calibri" pitchFamily="34" charset="-120"/>
               </a:rPr>
-              <a:t>5 / 29</a:t>
+              <a:t>5 / 31</a:t>
             </a:r>
             <a:endParaRPr lang="en-US" sz="800" dirty="0"/>
           </a:p>
@@ -24240,7 +26508,7 @@
                 <a:ea typeface="Calibri" pitchFamily="34" charset="-122"/>
                 <a:cs typeface="Calibri" pitchFamily="34" charset="-120"/>
               </a:rPr>
-              <a:t>6 / 29</a:t>
+              <a:t>6 / 31</a:t>
             </a:r>
             <a:endParaRPr lang="en-US" sz="800" dirty="0"/>
           </a:p>
@@ -25049,7 +27317,7 @@
                 <a:ea typeface="Calibri" pitchFamily="34" charset="-122"/>
                 <a:cs typeface="Calibri" pitchFamily="34" charset="-120"/>
               </a:rPr>
-              <a:t>8 / 29</a:t>
+              <a:t>8 / 31</a:t>
             </a:r>
             <a:endParaRPr lang="en-US" sz="800" dirty="0"/>
           </a:p>
@@ -26097,7 +28365,7 @@
                 <a:ea typeface="Calibri" pitchFamily="34" charset="-122"/>
                 <a:cs typeface="Calibri" pitchFamily="34" charset="-120"/>
               </a:rPr>
-              <a:t>9 / 29</a:t>
+              <a:t>9 / 31</a:t>
             </a:r>
             <a:endParaRPr lang="en-US" sz="800" dirty="0"/>
           </a:p>
